--- a/Coll 400 Powerpoint.pptx
+++ b/Coll 400 Powerpoint.pptx
@@ -2,10 +2,24 @@
 <file path=ppt/presentation.xml><?xml version="1.0" encoding="utf-8"?>
 <p:presentation xmlns:a="http://schemas.openxmlformats.org/drawingml/2006/main" xmlns:r="http://schemas.openxmlformats.org/officeDocument/2006/relationships" xmlns:p="http://schemas.openxmlformats.org/presentationml/2006/main" saveSubsetFonts="1">
   <p:sldMasterIdLst>
-    <p:sldMasterId id="2147483648" r:id="rId4"/>
+    <p:sldMasterId id="2147483660" r:id="rId4"/>
   </p:sldMasterIdLst>
   <p:sldIdLst>
     <p:sldId id="256" r:id="rId5"/>
+    <p:sldId id="257" r:id="rId6"/>
+    <p:sldId id="258" r:id="rId7"/>
+    <p:sldId id="260" r:id="rId8"/>
+    <p:sldId id="261" r:id="rId9"/>
+    <p:sldId id="270" r:id="rId10"/>
+    <p:sldId id="262" r:id="rId11"/>
+    <p:sldId id="263" r:id="rId12"/>
+    <p:sldId id="264" r:id="rId13"/>
+    <p:sldId id="265" r:id="rId14"/>
+    <p:sldId id="271" r:id="rId15"/>
+    <p:sldId id="266" r:id="rId16"/>
+    <p:sldId id="267" r:id="rId17"/>
+    <p:sldId id="268" r:id="rId18"/>
+    <p:sldId id="269" r:id="rId19"/>
   </p:sldIdLst>
   <p:sldSz cx="12192000" cy="6858000"/>
   <p:notesSz cx="6858000" cy="9144000"/>
@@ -13,7 +27,7 @@
     <a:defPPr>
       <a:defRPr lang="en-US"/>
     </a:defPPr>
-    <a:lvl1pPr marL="0" algn="l" defTabSz="914400" rtl="0" eaLnBrk="1" latinLnBrk="0" hangingPunct="1">
+    <a:lvl1pPr marL="0" algn="l" defTabSz="457200" rtl="0" eaLnBrk="1" latinLnBrk="0" hangingPunct="1">
       <a:defRPr sz="1800" kern="1200">
         <a:solidFill>
           <a:schemeClr val="tx1"/>
@@ -23,7 +37,7 @@
         <a:cs typeface="+mn-cs"/>
       </a:defRPr>
     </a:lvl1pPr>
-    <a:lvl2pPr marL="457200" algn="l" defTabSz="914400" rtl="0" eaLnBrk="1" latinLnBrk="0" hangingPunct="1">
+    <a:lvl2pPr marL="457200" algn="l" defTabSz="457200" rtl="0" eaLnBrk="1" latinLnBrk="0" hangingPunct="1">
       <a:defRPr sz="1800" kern="1200">
         <a:solidFill>
           <a:schemeClr val="tx1"/>
@@ -33,7 +47,7 @@
         <a:cs typeface="+mn-cs"/>
       </a:defRPr>
     </a:lvl2pPr>
-    <a:lvl3pPr marL="914400" algn="l" defTabSz="914400" rtl="0" eaLnBrk="1" latinLnBrk="0" hangingPunct="1">
+    <a:lvl3pPr marL="914400" algn="l" defTabSz="457200" rtl="0" eaLnBrk="1" latinLnBrk="0" hangingPunct="1">
       <a:defRPr sz="1800" kern="1200">
         <a:solidFill>
           <a:schemeClr val="tx1"/>
@@ -43,7 +57,7 @@
         <a:cs typeface="+mn-cs"/>
       </a:defRPr>
     </a:lvl3pPr>
-    <a:lvl4pPr marL="1371600" algn="l" defTabSz="914400" rtl="0" eaLnBrk="1" latinLnBrk="0" hangingPunct="1">
+    <a:lvl4pPr marL="1371600" algn="l" defTabSz="457200" rtl="0" eaLnBrk="1" latinLnBrk="0" hangingPunct="1">
       <a:defRPr sz="1800" kern="1200">
         <a:solidFill>
           <a:schemeClr val="tx1"/>
@@ -53,7 +67,7 @@
         <a:cs typeface="+mn-cs"/>
       </a:defRPr>
     </a:lvl4pPr>
-    <a:lvl5pPr marL="1828800" algn="l" defTabSz="914400" rtl="0" eaLnBrk="1" latinLnBrk="0" hangingPunct="1">
+    <a:lvl5pPr marL="1828800" algn="l" defTabSz="457200" rtl="0" eaLnBrk="1" latinLnBrk="0" hangingPunct="1">
       <a:defRPr sz="1800" kern="1200">
         <a:solidFill>
           <a:schemeClr val="tx1"/>
@@ -63,7 +77,7 @@
         <a:cs typeface="+mn-cs"/>
       </a:defRPr>
     </a:lvl5pPr>
-    <a:lvl6pPr marL="2286000" algn="l" defTabSz="914400" rtl="0" eaLnBrk="1" latinLnBrk="0" hangingPunct="1">
+    <a:lvl6pPr marL="2286000" algn="l" defTabSz="457200" rtl="0" eaLnBrk="1" latinLnBrk="0" hangingPunct="1">
       <a:defRPr sz="1800" kern="1200">
         <a:solidFill>
           <a:schemeClr val="tx1"/>
@@ -73,7 +87,7 @@
         <a:cs typeface="+mn-cs"/>
       </a:defRPr>
     </a:lvl6pPr>
-    <a:lvl7pPr marL="2743200" algn="l" defTabSz="914400" rtl="0" eaLnBrk="1" latinLnBrk="0" hangingPunct="1">
+    <a:lvl7pPr marL="2743200" algn="l" defTabSz="457200" rtl="0" eaLnBrk="1" latinLnBrk="0" hangingPunct="1">
       <a:defRPr sz="1800" kern="1200">
         <a:solidFill>
           <a:schemeClr val="tx1"/>
@@ -83,7 +97,7 @@
         <a:cs typeface="+mn-cs"/>
       </a:defRPr>
     </a:lvl7pPr>
-    <a:lvl8pPr marL="3200400" algn="l" defTabSz="914400" rtl="0" eaLnBrk="1" latinLnBrk="0" hangingPunct="1">
+    <a:lvl8pPr marL="3200400" algn="l" defTabSz="457200" rtl="0" eaLnBrk="1" latinLnBrk="0" hangingPunct="1">
       <a:defRPr sz="1800" kern="1200">
         <a:solidFill>
           <a:schemeClr val="tx1"/>
@@ -93,7 +107,7 @@
         <a:cs typeface="+mn-cs"/>
       </a:defRPr>
     </a:lvl8pPr>
-    <a:lvl9pPr marL="3657600" algn="l" defTabSz="914400" rtl="0" eaLnBrk="1" latinLnBrk="0" hangingPunct="1">
+    <a:lvl9pPr marL="3657600" algn="l" defTabSz="457200" rtl="0" eaLnBrk="1" latinLnBrk="0" hangingPunct="1">
       <a:defRPr sz="1800" kern="1200">
         <a:solidFill>
           <a:schemeClr val="tx1"/>
@@ -107,8 +121,19 @@
 </p:presentation>
 </file>
 
+<file path=ppt/revisionInfo.xml><?xml version="1.0" encoding="utf-8"?>
+<p1510:revInfo xmlns:a="http://schemas.openxmlformats.org/drawingml/2006/main" xmlns:r="http://schemas.openxmlformats.org/officeDocument/2006/relationships" xmlns:p1510="http://schemas.microsoft.com/office/powerpoint/2015/10/main">
+  <p1510:revLst>
+    <p1510:client id="{4C564AFA-1F0E-FCA0-5810-8FB3CE4DD200}" v="32" dt="2026-04-30T18:22:50.188"/>
+    <p1510:client id="{82363033-AB6D-48E7-7F7F-99C6A8AE2219}" v="3" dt="2026-04-30T14:43:56.972"/>
+    <p1510:client id="{90DB3212-2EC9-2B20-A1F2-861943223F8E}" v="287" dt="2026-04-30T18:11:57.231"/>
+    <p1510:client id="{BD621032-F849-461D-9EA9-BFDC3F0C9C22}" v="1480" dt="2026-04-30T18:25:24.476"/>
+  </p1510:revLst>
+</p1510:revInfo>
+</file>
+
 <file path=ppt/slideLayouts/slideLayout1.xml><?xml version="1.0" encoding="utf-8"?>
-<p:sldLayout xmlns:a="http://schemas.openxmlformats.org/drawingml/2006/main" xmlns:r="http://schemas.openxmlformats.org/officeDocument/2006/relationships" xmlns:p="http://schemas.openxmlformats.org/presentationml/2006/main" type="title" preserve="1">
+<p:sldLayout xmlns:a="http://schemas.openxmlformats.org/drawingml/2006/main" xmlns:r="http://schemas.openxmlformats.org/officeDocument/2006/relationships" xmlns:p="http://schemas.openxmlformats.org/presentationml/2006/main" showMasterSp="0" type="title" preserve="1">
   <p:cSld name="Title Slide">
     <p:spTree>
       <p:nvGrpSpPr>
@@ -124,15 +149,364 @@
           <a:chExt cx="0" cy="0"/>
         </a:xfrm>
       </p:grpSpPr>
-      <p:sp>
-        <p:nvSpPr>
-          <p:cNvPr id="2" name="Title 1">
-            <a:extLst>
-              <a:ext uri="{FF2B5EF4-FFF2-40B4-BE49-F238E27FC236}">
-                <a16:creationId xmlns:a16="http://schemas.microsoft.com/office/drawing/2014/main" id="{D0C85F87-CE78-2E85-8E3F-60B54A8C7748}"/>
-              </a:ext>
-            </a:extLst>
-          </p:cNvPr>
+      <p:grpSp>
+        <p:nvGrpSpPr>
+          <p:cNvPr id="19" name="Group 18"/>
+          <p:cNvGrpSpPr/>
+          <p:nvPr/>
+        </p:nvGrpSpPr>
+        <p:grpSpPr>
+          <a:xfrm>
+            <a:off x="546100" y="-4763"/>
+            <a:ext cx="5014912" cy="6862763"/>
+            <a:chOff x="2928938" y="-4763"/>
+            <a:chExt cx="5014912" cy="6862763"/>
+          </a:xfrm>
+        </p:grpSpPr>
+        <p:sp>
+          <p:nvSpPr>
+            <p:cNvPr id="22" name="Freeform 6"/>
+            <p:cNvSpPr/>
+            <p:nvPr/>
+          </p:nvSpPr>
+          <p:spPr bwMode="auto">
+            <a:xfrm>
+              <a:off x="3367088" y="-4763"/>
+              <a:ext cx="1063625" cy="2782888"/>
+            </a:xfrm>
+            <a:custGeom>
+              <a:avLst/>
+              <a:gdLst/>
+              <a:ahLst/>
+              <a:cxnLst/>
+              <a:rect l="0" t="0" r="r" b="b"/>
+              <a:pathLst>
+                <a:path w="670" h="1753">
+                  <a:moveTo>
+                    <a:pt x="0" y="1696"/>
+                  </a:moveTo>
+                  <a:lnTo>
+                    <a:pt x="225" y="1753"/>
+                  </a:lnTo>
+                  <a:lnTo>
+                    <a:pt x="670" y="0"/>
+                  </a:lnTo>
+                  <a:lnTo>
+                    <a:pt x="430" y="0"/>
+                  </a:lnTo>
+                  <a:lnTo>
+                    <a:pt x="0" y="1696"/>
+                  </a:lnTo>
+                  <a:close/>
+                </a:path>
+              </a:pathLst>
+            </a:custGeom>
+            <a:solidFill>
+              <a:schemeClr val="accent1"/>
+            </a:solidFill>
+            <a:ln>
+              <a:noFill/>
+            </a:ln>
+          </p:spPr>
+          <p:txBody>
+            <a:bodyPr/>
+            <a:lstStyle/>
+            <a:p>
+              <a:endParaRPr lang="en-US"/>
+            </a:p>
+          </p:txBody>
+        </p:sp>
+        <p:sp>
+          <p:nvSpPr>
+            <p:cNvPr id="23" name="Freeform 7"/>
+            <p:cNvSpPr/>
+            <p:nvPr/>
+          </p:nvSpPr>
+          <p:spPr bwMode="auto">
+            <a:xfrm>
+              <a:off x="2928938" y="-4763"/>
+              <a:ext cx="1035050" cy="2673350"/>
+            </a:xfrm>
+            <a:custGeom>
+              <a:avLst/>
+              <a:gdLst/>
+              <a:ahLst/>
+              <a:cxnLst/>
+              <a:rect l="0" t="0" r="r" b="b"/>
+              <a:pathLst>
+                <a:path w="652" h="1684">
+                  <a:moveTo>
+                    <a:pt x="225" y="1684"/>
+                  </a:moveTo>
+                  <a:lnTo>
+                    <a:pt x="652" y="0"/>
+                  </a:lnTo>
+                  <a:lnTo>
+                    <a:pt x="411" y="0"/>
+                  </a:lnTo>
+                  <a:lnTo>
+                    <a:pt x="0" y="1627"/>
+                  </a:lnTo>
+                  <a:lnTo>
+                    <a:pt x="219" y="1681"/>
+                  </a:lnTo>
+                  <a:lnTo>
+                    <a:pt x="225" y="1684"/>
+                  </a:lnTo>
+                  <a:close/>
+                </a:path>
+              </a:pathLst>
+            </a:custGeom>
+            <a:solidFill>
+              <a:schemeClr val="tx1">
+                <a:lumMod val="65000"/>
+                <a:lumOff val="35000"/>
+              </a:schemeClr>
+            </a:solidFill>
+            <a:ln>
+              <a:noFill/>
+            </a:ln>
+          </p:spPr>
+          <p:txBody>
+            <a:bodyPr/>
+            <a:lstStyle/>
+            <a:p>
+              <a:endParaRPr lang="en-US"/>
+            </a:p>
+          </p:txBody>
+        </p:sp>
+        <p:sp>
+          <p:nvSpPr>
+            <p:cNvPr id="24" name="Freeform 9"/>
+            <p:cNvSpPr/>
+            <p:nvPr/>
+          </p:nvSpPr>
+          <p:spPr bwMode="auto">
+            <a:xfrm>
+              <a:off x="2928938" y="2582862"/>
+              <a:ext cx="2693987" cy="4275138"/>
+            </a:xfrm>
+            <a:custGeom>
+              <a:avLst/>
+              <a:gdLst/>
+              <a:ahLst/>
+              <a:cxnLst/>
+              <a:rect l="0" t="0" r="r" b="b"/>
+              <a:pathLst>
+                <a:path w="1697" h="2693">
+                  <a:moveTo>
+                    <a:pt x="0" y="0"/>
+                  </a:moveTo>
+                  <a:lnTo>
+                    <a:pt x="1622" y="2693"/>
+                  </a:lnTo>
+                  <a:lnTo>
+                    <a:pt x="1697" y="2693"/>
+                  </a:lnTo>
+                  <a:lnTo>
+                    <a:pt x="0" y="0"/>
+                  </a:lnTo>
+                  <a:close/>
+                </a:path>
+              </a:pathLst>
+            </a:custGeom>
+            <a:solidFill>
+              <a:schemeClr val="tx1">
+                <a:lumMod val="85000"/>
+                <a:lumOff val="15000"/>
+              </a:schemeClr>
+            </a:solidFill>
+            <a:ln>
+              <a:noFill/>
+            </a:ln>
+          </p:spPr>
+          <p:txBody>
+            <a:bodyPr/>
+            <a:lstStyle/>
+            <a:p>
+              <a:endParaRPr lang="en-US"/>
+            </a:p>
+          </p:txBody>
+        </p:sp>
+        <p:sp>
+          <p:nvSpPr>
+            <p:cNvPr id="25" name="Freeform 10"/>
+            <p:cNvSpPr/>
+            <p:nvPr/>
+          </p:nvSpPr>
+          <p:spPr bwMode="auto">
+            <a:xfrm>
+              <a:off x="3371850" y="2692400"/>
+              <a:ext cx="3332162" cy="4165600"/>
+            </a:xfrm>
+            <a:custGeom>
+              <a:avLst/>
+              <a:gdLst/>
+              <a:ahLst/>
+              <a:cxnLst/>
+              <a:rect l="0" t="0" r="r" b="b"/>
+              <a:pathLst>
+                <a:path w="2099" h="2624">
+                  <a:moveTo>
+                    <a:pt x="2099" y="2624"/>
+                  </a:moveTo>
+                  <a:lnTo>
+                    <a:pt x="0" y="0"/>
+                  </a:lnTo>
+                  <a:lnTo>
+                    <a:pt x="2021" y="2624"/>
+                  </a:lnTo>
+                  <a:lnTo>
+                    <a:pt x="2099" y="2624"/>
+                  </a:lnTo>
+                  <a:close/>
+                </a:path>
+              </a:pathLst>
+            </a:custGeom>
+            <a:solidFill>
+              <a:schemeClr val="accent1">
+                <a:lumMod val="50000"/>
+              </a:schemeClr>
+            </a:solidFill>
+            <a:ln>
+              <a:noFill/>
+            </a:ln>
+          </p:spPr>
+          <p:txBody>
+            <a:bodyPr/>
+            <a:lstStyle/>
+            <a:p>
+              <a:endParaRPr lang="en-US"/>
+            </a:p>
+          </p:txBody>
+        </p:sp>
+        <p:sp>
+          <p:nvSpPr>
+            <p:cNvPr id="26" name="Freeform 11"/>
+            <p:cNvSpPr/>
+            <p:nvPr/>
+          </p:nvSpPr>
+          <p:spPr bwMode="auto">
+            <a:xfrm>
+              <a:off x="3367088" y="2687637"/>
+              <a:ext cx="4576762" cy="4170363"/>
+            </a:xfrm>
+            <a:custGeom>
+              <a:avLst/>
+              <a:gdLst/>
+              <a:ahLst/>
+              <a:cxnLst/>
+              <a:rect l="0" t="0" r="r" b="b"/>
+              <a:pathLst>
+                <a:path w="2883" h="2627">
+                  <a:moveTo>
+                    <a:pt x="0" y="0"/>
+                  </a:moveTo>
+                  <a:lnTo>
+                    <a:pt x="3" y="3"/>
+                  </a:lnTo>
+                  <a:lnTo>
+                    <a:pt x="2102" y="2627"/>
+                  </a:lnTo>
+                  <a:lnTo>
+                    <a:pt x="2883" y="2627"/>
+                  </a:lnTo>
+                  <a:lnTo>
+                    <a:pt x="225" y="57"/>
+                  </a:lnTo>
+                  <a:lnTo>
+                    <a:pt x="0" y="0"/>
+                  </a:lnTo>
+                  <a:close/>
+                </a:path>
+              </a:pathLst>
+            </a:custGeom>
+            <a:solidFill>
+              <a:schemeClr val="accent1">
+                <a:lumMod val="75000"/>
+              </a:schemeClr>
+            </a:solidFill>
+            <a:ln>
+              <a:noFill/>
+            </a:ln>
+          </p:spPr>
+          <p:txBody>
+            <a:bodyPr/>
+            <a:lstStyle/>
+            <a:p>
+              <a:endParaRPr lang="en-US"/>
+            </a:p>
+          </p:txBody>
+        </p:sp>
+        <p:sp>
+          <p:nvSpPr>
+            <p:cNvPr id="27" name="Freeform 12"/>
+            <p:cNvSpPr/>
+            <p:nvPr/>
+          </p:nvSpPr>
+          <p:spPr bwMode="auto">
+            <a:xfrm>
+              <a:off x="2928938" y="2578100"/>
+              <a:ext cx="3584575" cy="4279900"/>
+            </a:xfrm>
+            <a:custGeom>
+              <a:avLst/>
+              <a:gdLst/>
+              <a:ahLst/>
+              <a:cxnLst/>
+              <a:rect l="0" t="0" r="r" b="b"/>
+              <a:pathLst>
+                <a:path w="2258" h="2696">
+                  <a:moveTo>
+                    <a:pt x="2258" y="2696"/>
+                  </a:moveTo>
+                  <a:lnTo>
+                    <a:pt x="264" y="111"/>
+                  </a:lnTo>
+                  <a:lnTo>
+                    <a:pt x="228" y="60"/>
+                  </a:lnTo>
+                  <a:lnTo>
+                    <a:pt x="225" y="57"/>
+                  </a:lnTo>
+                  <a:lnTo>
+                    <a:pt x="0" y="0"/>
+                  </a:lnTo>
+                  <a:lnTo>
+                    <a:pt x="0" y="3"/>
+                  </a:lnTo>
+                  <a:lnTo>
+                    <a:pt x="1697" y="2696"/>
+                  </a:lnTo>
+                  <a:lnTo>
+                    <a:pt x="2258" y="2696"/>
+                  </a:lnTo>
+                  <a:close/>
+                </a:path>
+              </a:pathLst>
+            </a:custGeom>
+            <a:solidFill>
+              <a:schemeClr val="tx1">
+                <a:lumMod val="75000"/>
+                <a:lumOff val="25000"/>
+              </a:schemeClr>
+            </a:solidFill>
+            <a:ln>
+              <a:noFill/>
+            </a:ln>
+          </p:spPr>
+          <p:txBody>
+            <a:bodyPr/>
+            <a:lstStyle/>
+            <a:p>
+              <a:endParaRPr lang="en-US"/>
+            </a:p>
+          </p:txBody>
+        </p:sp>
+      </p:grpSp>
+      <p:sp>
+        <p:nvSpPr>
+          <p:cNvPr id="2" name="Title 1"/>
           <p:cNvSpPr>
             <a:spLocks noGrp="1"/>
           </p:cNvSpPr>
@@ -142,15 +516,19 @@
         </p:nvSpPr>
         <p:spPr>
           <a:xfrm>
-            <a:off x="1524000" y="1122363"/>
-            <a:ext cx="9144000" cy="2387600"/>
+            <a:off x="2928401" y="1380068"/>
+            <a:ext cx="8574622" cy="2616199"/>
           </a:xfrm>
         </p:spPr>
         <p:txBody>
-          <a:bodyPr anchor="b"/>
+          <a:bodyPr anchor="b">
+            <a:normAutofit/>
+          </a:bodyPr>
           <a:lstStyle>
-            <a:lvl1pPr algn="ctr">
-              <a:defRPr sz="6000"/>
+            <a:lvl1pPr algn="r">
+              <a:defRPr sz="6000">
+                <a:effectLst/>
+              </a:defRPr>
             </a:lvl1pPr>
           </a:lstStyle>
           <a:p>
@@ -163,13 +541,7 @@
       </p:sp>
       <p:sp>
         <p:nvSpPr>
-          <p:cNvPr id="3" name="Subtitle 2">
-            <a:extLst>
-              <a:ext uri="{FF2B5EF4-FFF2-40B4-BE49-F238E27FC236}">
-                <a16:creationId xmlns:a16="http://schemas.microsoft.com/office/drawing/2014/main" id="{E770D6D8-FC3D-2A4C-64C1-F9BAFFCC5C10}"/>
-              </a:ext>
-            </a:extLst>
-          </p:cNvPr>
+          <p:cNvPr id="3" name="Subtitle 2"/>
           <p:cNvSpPr>
             <a:spLocks noGrp="1"/>
           </p:cNvSpPr>
@@ -179,48 +551,102 @@
         </p:nvSpPr>
         <p:spPr>
           <a:xfrm>
-            <a:off x="1524000" y="3602038"/>
-            <a:ext cx="9144000" cy="1655762"/>
+            <a:off x="4515377" y="3996267"/>
+            <a:ext cx="6987645" cy="1388534"/>
           </a:xfrm>
         </p:spPr>
         <p:txBody>
-          <a:bodyPr/>
+          <a:bodyPr anchor="t">
+            <a:normAutofit/>
+          </a:bodyPr>
           <a:lstStyle>
-            <a:lvl1pPr marL="0" indent="0" algn="ctr">
-              <a:buNone/>
-              <a:defRPr sz="2400"/>
+            <a:lvl1pPr marL="0" indent="0" algn="r">
+              <a:buNone/>
+              <a:defRPr sz="2100">
+                <a:solidFill>
+                  <a:schemeClr val="tx1"/>
+                </a:solidFill>
+              </a:defRPr>
             </a:lvl1pPr>
             <a:lvl2pPr marL="457200" indent="0" algn="ctr">
               <a:buNone/>
-              <a:defRPr sz="2000"/>
+              <a:defRPr>
+                <a:solidFill>
+                  <a:schemeClr val="tx1">
+                    <a:tint val="75000"/>
+                  </a:schemeClr>
+                </a:solidFill>
+              </a:defRPr>
             </a:lvl2pPr>
             <a:lvl3pPr marL="914400" indent="0" algn="ctr">
               <a:buNone/>
-              <a:defRPr sz="1800"/>
+              <a:defRPr>
+                <a:solidFill>
+                  <a:schemeClr val="tx1">
+                    <a:tint val="75000"/>
+                  </a:schemeClr>
+                </a:solidFill>
+              </a:defRPr>
             </a:lvl3pPr>
             <a:lvl4pPr marL="1371600" indent="0" algn="ctr">
               <a:buNone/>
-              <a:defRPr sz="1600"/>
+              <a:defRPr>
+                <a:solidFill>
+                  <a:schemeClr val="tx1">
+                    <a:tint val="75000"/>
+                  </a:schemeClr>
+                </a:solidFill>
+              </a:defRPr>
             </a:lvl4pPr>
             <a:lvl5pPr marL="1828800" indent="0" algn="ctr">
               <a:buNone/>
-              <a:defRPr sz="1600"/>
+              <a:defRPr>
+                <a:solidFill>
+                  <a:schemeClr val="tx1">
+                    <a:tint val="75000"/>
+                  </a:schemeClr>
+                </a:solidFill>
+              </a:defRPr>
             </a:lvl5pPr>
             <a:lvl6pPr marL="2286000" indent="0" algn="ctr">
               <a:buNone/>
-              <a:defRPr sz="1600"/>
+              <a:defRPr>
+                <a:solidFill>
+                  <a:schemeClr val="tx1">
+                    <a:tint val="75000"/>
+                  </a:schemeClr>
+                </a:solidFill>
+              </a:defRPr>
             </a:lvl6pPr>
             <a:lvl7pPr marL="2743200" indent="0" algn="ctr">
               <a:buNone/>
-              <a:defRPr sz="1600"/>
+              <a:defRPr>
+                <a:solidFill>
+                  <a:schemeClr val="tx1">
+                    <a:tint val="75000"/>
+                  </a:schemeClr>
+                </a:solidFill>
+              </a:defRPr>
             </a:lvl7pPr>
             <a:lvl8pPr marL="3200400" indent="0" algn="ctr">
               <a:buNone/>
-              <a:defRPr sz="1600"/>
+              <a:defRPr>
+                <a:solidFill>
+                  <a:schemeClr val="tx1">
+                    <a:tint val="75000"/>
+                  </a:schemeClr>
+                </a:solidFill>
+              </a:defRPr>
             </a:lvl8pPr>
             <a:lvl9pPr marL="3657600" indent="0" algn="ctr">
               <a:buNone/>
-              <a:defRPr sz="1600"/>
+              <a:defRPr>
+                <a:solidFill>
+                  <a:schemeClr val="tx1">
+                    <a:tint val="75000"/>
+                  </a:schemeClr>
+                </a:solidFill>
+              </a:defRPr>
             </a:lvl9pPr>
           </a:lstStyle>
           <a:p>
@@ -233,13 +659,7 @@
       </p:sp>
       <p:sp>
         <p:nvSpPr>
-          <p:cNvPr id="4" name="Date Placeholder 3">
-            <a:extLst>
-              <a:ext uri="{FF2B5EF4-FFF2-40B4-BE49-F238E27FC236}">
-                <a16:creationId xmlns:a16="http://schemas.microsoft.com/office/drawing/2014/main" id="{B76AB921-119F-6CAB-0AC0-49CCBF04C8F3}"/>
-              </a:ext>
-            </a:extLst>
-          </p:cNvPr>
+          <p:cNvPr id="4" name="Date Placeholder 3"/>
           <p:cNvSpPr>
             <a:spLocks noGrp="1"/>
           </p:cNvSpPr>
@@ -254,7 +674,7 @@
           <a:p>
             <a:fld id="{1705C18A-ADD3-4375-A699-9F4488C0E00E}" type="datetimeFigureOut">
               <a:rPr lang="en-US" smtClean="0"/>
-              <a:t>4/26/2026</a:t>
+              <a:t>5/1/2026</a:t>
             </a:fld>
             <a:endParaRPr lang="en-US"/>
           </a:p>
@@ -262,13 +682,7 @@
       </p:sp>
       <p:sp>
         <p:nvSpPr>
-          <p:cNvPr id="5" name="Footer Placeholder 4">
-            <a:extLst>
-              <a:ext uri="{FF2B5EF4-FFF2-40B4-BE49-F238E27FC236}">
-                <a16:creationId xmlns:a16="http://schemas.microsoft.com/office/drawing/2014/main" id="{3AE2DF09-AFCA-A213-FFFA-E46EC6EB98A8}"/>
-              </a:ext>
-            </a:extLst>
-          </p:cNvPr>
+          <p:cNvPr id="5" name="Footer Placeholder 4"/>
           <p:cNvSpPr>
             <a:spLocks noGrp="1"/>
           </p:cNvSpPr>
@@ -276,7 +690,12 @@
             <p:ph type="ftr" sz="quarter" idx="11"/>
           </p:nvPr>
         </p:nvSpPr>
-        <p:spPr/>
+        <p:spPr>
+          <a:xfrm>
+            <a:off x="5332412" y="5883275"/>
+            <a:ext cx="4324044" cy="365125"/>
+          </a:xfrm>
+        </p:spPr>
         <p:txBody>
           <a:bodyPr/>
           <a:lstStyle/>
@@ -287,13 +706,7 @@
       </p:sp>
       <p:sp>
         <p:nvSpPr>
-          <p:cNvPr id="6" name="Slide Number Placeholder 5">
-            <a:extLst>
-              <a:ext uri="{FF2B5EF4-FFF2-40B4-BE49-F238E27FC236}">
-                <a16:creationId xmlns:a16="http://schemas.microsoft.com/office/drawing/2014/main" id="{1277B14A-A28F-C595-706E-0AFB336DBC08}"/>
-              </a:ext>
-            </a:extLst>
-          </p:cNvPr>
+          <p:cNvPr id="6" name="Slide Number Placeholder 5"/>
           <p:cNvSpPr>
             <a:spLocks noGrp="1"/>
           </p:cNvSpPr>
@@ -317,7 +730,7 @@
     </p:spTree>
     <p:extLst>
       <p:ext uri="{BB962C8B-B14F-4D97-AF65-F5344CB8AC3E}">
-        <p14:creationId xmlns:p14="http://schemas.microsoft.com/office/powerpoint/2010/main" val="1434271081"/>
+        <p14:creationId xmlns:p14="http://schemas.microsoft.com/office/powerpoint/2010/main" val="304974509"/>
       </p:ext>
     </p:extLst>
   </p:cSld>
@@ -328,6 +741,2155 @@
 </file>
 
 <file path=ppt/slideLayouts/slideLayout10.xml><?xml version="1.0" encoding="utf-8"?>
+<p:sldLayout xmlns:a="http://schemas.openxmlformats.org/drawingml/2006/main" xmlns:r="http://schemas.openxmlformats.org/officeDocument/2006/relationships" xmlns:p="http://schemas.openxmlformats.org/presentationml/2006/main" preserve="1">
+  <p:cSld name="Panoramic Picture with Caption">
+    <p:spTree>
+      <p:nvGrpSpPr>
+        <p:cNvPr id="1" name=""/>
+        <p:cNvGrpSpPr/>
+        <p:nvPr/>
+      </p:nvGrpSpPr>
+      <p:grpSpPr>
+        <a:xfrm>
+          <a:off x="0" y="0"/>
+          <a:ext cx="0" cy="0"/>
+          <a:chOff x="0" y="0"/>
+          <a:chExt cx="0" cy="0"/>
+        </a:xfrm>
+      </p:grpSpPr>
+      <p:sp>
+        <p:nvSpPr>
+          <p:cNvPr id="2" name="Title 1"/>
+          <p:cNvSpPr>
+            <a:spLocks noGrp="1"/>
+          </p:cNvSpPr>
+          <p:nvPr>
+            <p:ph type="title"/>
+          </p:nvPr>
+        </p:nvSpPr>
+        <p:spPr>
+          <a:xfrm>
+            <a:off x="1484311" y="4732865"/>
+            <a:ext cx="10018711" cy="566738"/>
+          </a:xfrm>
+        </p:spPr>
+        <p:txBody>
+          <a:bodyPr anchor="b">
+            <a:normAutofit/>
+          </a:bodyPr>
+          <a:lstStyle>
+            <a:lvl1pPr algn="ctr">
+              <a:defRPr sz="2400" b="0"/>
+            </a:lvl1pPr>
+          </a:lstStyle>
+          <a:p>
+            <a:r>
+              <a:rPr lang="en-US"/>
+              <a:t>Click to edit Master title style</a:t>
+            </a:r>
+          </a:p>
+        </p:txBody>
+      </p:sp>
+      <p:sp>
+        <p:nvSpPr>
+          <p:cNvPr id="3" name="Picture Placeholder 2"/>
+          <p:cNvSpPr>
+            <a:spLocks noGrp="1" noChangeAspect="1"/>
+          </p:cNvSpPr>
+          <p:nvPr>
+            <p:ph type="pic" idx="1"/>
+          </p:nvPr>
+        </p:nvSpPr>
+        <p:spPr>
+          <a:xfrm>
+            <a:off x="2386012" y="932112"/>
+            <a:ext cx="8225944" cy="3164976"/>
+          </a:xfrm>
+          <a:prstGeom prst="roundRect">
+            <a:avLst>
+              <a:gd name="adj" fmla="val 4380"/>
+            </a:avLst>
+          </a:prstGeom>
+          <a:ln w="38100">
+            <a:gradFill flip="none" rotWithShape="1">
+              <a:gsLst>
+                <a:gs pos="0">
+                  <a:schemeClr val="bg2"/>
+                </a:gs>
+                <a:gs pos="100000">
+                  <a:schemeClr val="bg2">
+                    <a:lumMod val="75000"/>
+                  </a:schemeClr>
+                </a:gs>
+              </a:gsLst>
+              <a:lin ang="5400000" scaled="0"/>
+              <a:tileRect/>
+            </a:gradFill>
+          </a:ln>
+          <a:effectLst>
+            <a:innerShdw blurRad="57150" dist="38100" dir="14460000">
+              <a:srgbClr val="000000">
+                <a:alpha val="70000"/>
+              </a:srgbClr>
+            </a:innerShdw>
+          </a:effectLst>
+        </p:spPr>
+        <p:txBody>
+          <a:bodyPr anchor="t">
+            <a:normAutofit/>
+          </a:bodyPr>
+          <a:lstStyle>
+            <a:lvl1pPr marL="0" indent="0" algn="ctr">
+              <a:buNone/>
+              <a:defRPr sz="1600"/>
+            </a:lvl1pPr>
+            <a:lvl2pPr marL="457200" indent="0">
+              <a:buNone/>
+              <a:defRPr sz="1600"/>
+            </a:lvl2pPr>
+            <a:lvl3pPr marL="914400" indent="0">
+              <a:buNone/>
+              <a:defRPr sz="1600"/>
+            </a:lvl3pPr>
+            <a:lvl4pPr marL="1371600" indent="0">
+              <a:buNone/>
+              <a:defRPr sz="1600"/>
+            </a:lvl4pPr>
+            <a:lvl5pPr marL="1828800" indent="0">
+              <a:buNone/>
+              <a:defRPr sz="1600"/>
+            </a:lvl5pPr>
+            <a:lvl6pPr marL="2286000" indent="0">
+              <a:buNone/>
+              <a:defRPr sz="1600"/>
+            </a:lvl6pPr>
+            <a:lvl7pPr marL="2743200" indent="0">
+              <a:buNone/>
+              <a:defRPr sz="1600"/>
+            </a:lvl7pPr>
+            <a:lvl8pPr marL="3200400" indent="0">
+              <a:buNone/>
+              <a:defRPr sz="1600"/>
+            </a:lvl8pPr>
+            <a:lvl9pPr marL="3657600" indent="0">
+              <a:buNone/>
+              <a:defRPr sz="1600"/>
+            </a:lvl9pPr>
+          </a:lstStyle>
+          <a:p>
+            <a:r>
+              <a:rPr lang="en-US"/>
+              <a:t>Click icon to add picture</a:t>
+            </a:r>
+          </a:p>
+        </p:txBody>
+      </p:sp>
+      <p:sp>
+        <p:nvSpPr>
+          <p:cNvPr id="4" name="Text Placeholder 3"/>
+          <p:cNvSpPr>
+            <a:spLocks noGrp="1"/>
+          </p:cNvSpPr>
+          <p:nvPr>
+            <p:ph type="body" sz="half" idx="2"/>
+          </p:nvPr>
+        </p:nvSpPr>
+        <p:spPr>
+          <a:xfrm>
+            <a:off x="1484311" y="5299603"/>
+            <a:ext cx="10018711" cy="493712"/>
+          </a:xfrm>
+        </p:spPr>
+        <p:txBody>
+          <a:bodyPr>
+            <a:normAutofit/>
+          </a:bodyPr>
+          <a:lstStyle>
+            <a:lvl1pPr marL="0" indent="0" algn="ctr">
+              <a:buNone/>
+              <a:defRPr sz="1400"/>
+            </a:lvl1pPr>
+            <a:lvl2pPr marL="457200" indent="0">
+              <a:buNone/>
+              <a:defRPr sz="1200"/>
+            </a:lvl2pPr>
+            <a:lvl3pPr marL="914400" indent="0">
+              <a:buNone/>
+              <a:defRPr sz="1000"/>
+            </a:lvl3pPr>
+            <a:lvl4pPr marL="1371600" indent="0">
+              <a:buNone/>
+              <a:defRPr sz="900"/>
+            </a:lvl4pPr>
+            <a:lvl5pPr marL="1828800" indent="0">
+              <a:buNone/>
+              <a:defRPr sz="900"/>
+            </a:lvl5pPr>
+            <a:lvl6pPr marL="2286000" indent="0">
+              <a:buNone/>
+              <a:defRPr sz="900"/>
+            </a:lvl6pPr>
+            <a:lvl7pPr marL="2743200" indent="0">
+              <a:buNone/>
+              <a:defRPr sz="900"/>
+            </a:lvl7pPr>
+            <a:lvl8pPr marL="3200400" indent="0">
+              <a:buNone/>
+              <a:defRPr sz="900"/>
+            </a:lvl8pPr>
+            <a:lvl9pPr marL="3657600" indent="0">
+              <a:buNone/>
+              <a:defRPr sz="900"/>
+            </a:lvl9pPr>
+          </a:lstStyle>
+          <a:p>
+            <a:pPr lvl="0"/>
+            <a:r>
+              <a:rPr lang="en-US"/>
+              <a:t>Click to edit Master text styles</a:t>
+            </a:r>
+          </a:p>
+        </p:txBody>
+      </p:sp>
+      <p:sp>
+        <p:nvSpPr>
+          <p:cNvPr id="5" name="Date Placeholder 4"/>
+          <p:cNvSpPr>
+            <a:spLocks noGrp="1"/>
+          </p:cNvSpPr>
+          <p:nvPr>
+            <p:ph type="dt" sz="half" idx="10"/>
+          </p:nvPr>
+        </p:nvSpPr>
+        <p:spPr/>
+        <p:txBody>
+          <a:bodyPr/>
+          <a:lstStyle/>
+          <a:p>
+            <a:fld id="{1705C18A-ADD3-4375-A699-9F4488C0E00E}" type="datetimeFigureOut">
+              <a:rPr lang="en-US" smtClean="0"/>
+              <a:t>5/1/2026</a:t>
+            </a:fld>
+            <a:endParaRPr lang="en-US"/>
+          </a:p>
+        </p:txBody>
+      </p:sp>
+      <p:sp>
+        <p:nvSpPr>
+          <p:cNvPr id="6" name="Footer Placeholder 5"/>
+          <p:cNvSpPr>
+            <a:spLocks noGrp="1"/>
+          </p:cNvSpPr>
+          <p:nvPr>
+            <p:ph type="ftr" sz="quarter" idx="11"/>
+          </p:nvPr>
+        </p:nvSpPr>
+        <p:spPr/>
+        <p:txBody>
+          <a:bodyPr/>
+          <a:lstStyle/>
+          <a:p>
+            <a:endParaRPr lang="en-US"/>
+          </a:p>
+        </p:txBody>
+      </p:sp>
+      <p:sp>
+        <p:nvSpPr>
+          <p:cNvPr id="7" name="Slide Number Placeholder 6"/>
+          <p:cNvSpPr>
+            <a:spLocks noGrp="1"/>
+          </p:cNvSpPr>
+          <p:nvPr>
+            <p:ph type="sldNum" sz="quarter" idx="12"/>
+          </p:nvPr>
+        </p:nvSpPr>
+        <p:spPr/>
+        <p:txBody>
+          <a:bodyPr/>
+          <a:lstStyle/>
+          <a:p>
+            <a:fld id="{432135D0-4141-4185-A76B-8A0D017CF383}" type="slidenum">
+              <a:rPr lang="en-US" smtClean="0"/>
+              <a:t>‹#›</a:t>
+            </a:fld>
+            <a:endParaRPr lang="en-US"/>
+          </a:p>
+        </p:txBody>
+      </p:sp>
+    </p:spTree>
+    <p:extLst>
+      <p:ext uri="{BB962C8B-B14F-4D97-AF65-F5344CB8AC3E}">
+        <p14:creationId xmlns:p14="http://schemas.microsoft.com/office/powerpoint/2010/main" val="3498113971"/>
+      </p:ext>
+    </p:extLst>
+  </p:cSld>
+  <p:clrMapOvr>
+    <a:masterClrMapping/>
+  </p:clrMapOvr>
+</p:sldLayout>
+</file>
+
+<file path=ppt/slideLayouts/slideLayout11.xml><?xml version="1.0" encoding="utf-8"?>
+<p:sldLayout xmlns:a="http://schemas.openxmlformats.org/drawingml/2006/main" xmlns:r="http://schemas.openxmlformats.org/officeDocument/2006/relationships" xmlns:p="http://schemas.openxmlformats.org/presentationml/2006/main" preserve="1">
+  <p:cSld name="Title and Caption">
+    <p:spTree>
+      <p:nvGrpSpPr>
+        <p:cNvPr id="1" name=""/>
+        <p:cNvGrpSpPr/>
+        <p:nvPr/>
+      </p:nvGrpSpPr>
+      <p:grpSpPr>
+        <a:xfrm>
+          <a:off x="0" y="0"/>
+          <a:ext cx="0" cy="0"/>
+          <a:chOff x="0" y="0"/>
+          <a:chExt cx="0" cy="0"/>
+        </a:xfrm>
+      </p:grpSpPr>
+      <p:sp>
+        <p:nvSpPr>
+          <p:cNvPr id="2" name="Title 1"/>
+          <p:cNvSpPr>
+            <a:spLocks noGrp="1"/>
+          </p:cNvSpPr>
+          <p:nvPr>
+            <p:ph type="title"/>
+          </p:nvPr>
+        </p:nvSpPr>
+        <p:spPr>
+          <a:xfrm>
+            <a:off x="1484312" y="685800"/>
+            <a:ext cx="10018711" cy="3048000"/>
+          </a:xfrm>
+        </p:spPr>
+        <p:txBody>
+          <a:bodyPr anchor="ctr">
+            <a:normAutofit/>
+          </a:bodyPr>
+          <a:lstStyle>
+            <a:lvl1pPr algn="ctr">
+              <a:defRPr sz="3200" b="0" cap="none"/>
+            </a:lvl1pPr>
+          </a:lstStyle>
+          <a:p>
+            <a:r>
+              <a:rPr lang="en-US"/>
+              <a:t>Click to edit Master title style</a:t>
+            </a:r>
+          </a:p>
+        </p:txBody>
+      </p:sp>
+      <p:sp>
+        <p:nvSpPr>
+          <p:cNvPr id="3" name="Text Placeholder 2"/>
+          <p:cNvSpPr>
+            <a:spLocks noGrp="1"/>
+          </p:cNvSpPr>
+          <p:nvPr>
+            <p:ph type="body" idx="1"/>
+          </p:nvPr>
+        </p:nvSpPr>
+        <p:spPr>
+          <a:xfrm>
+            <a:off x="1484312" y="4343400"/>
+            <a:ext cx="10018713" cy="1447800"/>
+          </a:xfrm>
+        </p:spPr>
+        <p:txBody>
+          <a:bodyPr anchor="ctr">
+            <a:normAutofit/>
+          </a:bodyPr>
+          <a:lstStyle>
+            <a:lvl1pPr marL="0" indent="0" algn="ctr">
+              <a:buNone/>
+              <a:defRPr sz="2000">
+                <a:solidFill>
+                  <a:schemeClr val="tx1"/>
+                </a:solidFill>
+              </a:defRPr>
+            </a:lvl1pPr>
+            <a:lvl2pPr marL="457200" indent="0">
+              <a:buNone/>
+              <a:defRPr sz="1800">
+                <a:solidFill>
+                  <a:schemeClr val="tx1">
+                    <a:tint val="75000"/>
+                  </a:schemeClr>
+                </a:solidFill>
+              </a:defRPr>
+            </a:lvl2pPr>
+            <a:lvl3pPr marL="914400" indent="0">
+              <a:buNone/>
+              <a:defRPr sz="1600">
+                <a:solidFill>
+                  <a:schemeClr val="tx1">
+                    <a:tint val="75000"/>
+                  </a:schemeClr>
+                </a:solidFill>
+              </a:defRPr>
+            </a:lvl3pPr>
+            <a:lvl4pPr marL="1371600" indent="0">
+              <a:buNone/>
+              <a:defRPr sz="1400">
+                <a:solidFill>
+                  <a:schemeClr val="tx1">
+                    <a:tint val="75000"/>
+                  </a:schemeClr>
+                </a:solidFill>
+              </a:defRPr>
+            </a:lvl4pPr>
+            <a:lvl5pPr marL="1828800" indent="0">
+              <a:buNone/>
+              <a:defRPr sz="1400">
+                <a:solidFill>
+                  <a:schemeClr val="tx1">
+                    <a:tint val="75000"/>
+                  </a:schemeClr>
+                </a:solidFill>
+              </a:defRPr>
+            </a:lvl5pPr>
+            <a:lvl6pPr marL="2286000" indent="0">
+              <a:buNone/>
+              <a:defRPr sz="1400">
+                <a:solidFill>
+                  <a:schemeClr val="tx1">
+                    <a:tint val="75000"/>
+                  </a:schemeClr>
+                </a:solidFill>
+              </a:defRPr>
+            </a:lvl6pPr>
+            <a:lvl7pPr marL="2743200" indent="0">
+              <a:buNone/>
+              <a:defRPr sz="1400">
+                <a:solidFill>
+                  <a:schemeClr val="tx1">
+                    <a:tint val="75000"/>
+                  </a:schemeClr>
+                </a:solidFill>
+              </a:defRPr>
+            </a:lvl7pPr>
+            <a:lvl8pPr marL="3200400" indent="0">
+              <a:buNone/>
+              <a:defRPr sz="1400">
+                <a:solidFill>
+                  <a:schemeClr val="tx1">
+                    <a:tint val="75000"/>
+                  </a:schemeClr>
+                </a:solidFill>
+              </a:defRPr>
+            </a:lvl8pPr>
+            <a:lvl9pPr marL="3657600" indent="0">
+              <a:buNone/>
+              <a:defRPr sz="1400">
+                <a:solidFill>
+                  <a:schemeClr val="tx1">
+                    <a:tint val="75000"/>
+                  </a:schemeClr>
+                </a:solidFill>
+              </a:defRPr>
+            </a:lvl9pPr>
+          </a:lstStyle>
+          <a:p>
+            <a:pPr lvl="0"/>
+            <a:r>
+              <a:rPr lang="en-US"/>
+              <a:t>Click to edit Master text styles</a:t>
+            </a:r>
+          </a:p>
+        </p:txBody>
+      </p:sp>
+      <p:sp>
+        <p:nvSpPr>
+          <p:cNvPr id="4" name="Date Placeholder 3"/>
+          <p:cNvSpPr>
+            <a:spLocks noGrp="1"/>
+          </p:cNvSpPr>
+          <p:nvPr>
+            <p:ph type="dt" sz="half" idx="10"/>
+          </p:nvPr>
+        </p:nvSpPr>
+        <p:spPr/>
+        <p:txBody>
+          <a:bodyPr/>
+          <a:lstStyle/>
+          <a:p>
+            <a:fld id="{1705C18A-ADD3-4375-A699-9F4488C0E00E}" type="datetimeFigureOut">
+              <a:rPr lang="en-US" smtClean="0"/>
+              <a:t>5/1/2026</a:t>
+            </a:fld>
+            <a:endParaRPr lang="en-US"/>
+          </a:p>
+        </p:txBody>
+      </p:sp>
+      <p:sp>
+        <p:nvSpPr>
+          <p:cNvPr id="5" name="Footer Placeholder 4"/>
+          <p:cNvSpPr>
+            <a:spLocks noGrp="1"/>
+          </p:cNvSpPr>
+          <p:nvPr>
+            <p:ph type="ftr" sz="quarter" idx="11"/>
+          </p:nvPr>
+        </p:nvSpPr>
+        <p:spPr/>
+        <p:txBody>
+          <a:bodyPr/>
+          <a:lstStyle/>
+          <a:p>
+            <a:endParaRPr lang="en-US"/>
+          </a:p>
+        </p:txBody>
+      </p:sp>
+      <p:sp>
+        <p:nvSpPr>
+          <p:cNvPr id="6" name="Slide Number Placeholder 5"/>
+          <p:cNvSpPr>
+            <a:spLocks noGrp="1"/>
+          </p:cNvSpPr>
+          <p:nvPr>
+            <p:ph type="sldNum" sz="quarter" idx="12"/>
+          </p:nvPr>
+        </p:nvSpPr>
+        <p:spPr/>
+        <p:txBody>
+          <a:bodyPr/>
+          <a:lstStyle/>
+          <a:p>
+            <a:fld id="{432135D0-4141-4185-A76B-8A0D017CF383}" type="slidenum">
+              <a:rPr lang="en-US" smtClean="0"/>
+              <a:t>‹#›</a:t>
+            </a:fld>
+            <a:endParaRPr lang="en-US"/>
+          </a:p>
+        </p:txBody>
+      </p:sp>
+    </p:spTree>
+    <p:extLst>
+      <p:ext uri="{BB962C8B-B14F-4D97-AF65-F5344CB8AC3E}">
+        <p14:creationId xmlns:p14="http://schemas.microsoft.com/office/powerpoint/2010/main" val="585631018"/>
+      </p:ext>
+    </p:extLst>
+  </p:cSld>
+  <p:clrMapOvr>
+    <a:masterClrMapping/>
+  </p:clrMapOvr>
+</p:sldLayout>
+</file>
+
+<file path=ppt/slideLayouts/slideLayout12.xml><?xml version="1.0" encoding="utf-8"?>
+<p:sldLayout xmlns:a="http://schemas.openxmlformats.org/drawingml/2006/main" xmlns:r="http://schemas.openxmlformats.org/officeDocument/2006/relationships" xmlns:p="http://schemas.openxmlformats.org/presentationml/2006/main" preserve="1">
+  <p:cSld name="Quote with Caption">
+    <p:spTree>
+      <p:nvGrpSpPr>
+        <p:cNvPr id="1" name=""/>
+        <p:cNvGrpSpPr/>
+        <p:nvPr/>
+      </p:nvGrpSpPr>
+      <p:grpSpPr>
+        <a:xfrm>
+          <a:off x="0" y="0"/>
+          <a:ext cx="0" cy="0"/>
+          <a:chOff x="0" y="0"/>
+          <a:chExt cx="0" cy="0"/>
+        </a:xfrm>
+      </p:grpSpPr>
+      <p:sp>
+        <p:nvSpPr>
+          <p:cNvPr id="14" name="TextBox 13"/>
+          <p:cNvSpPr txBox="1"/>
+          <p:nvPr/>
+        </p:nvSpPr>
+        <p:spPr>
+          <a:xfrm>
+            <a:off x="1598612" y="863023"/>
+            <a:ext cx="609600" cy="584776"/>
+          </a:xfrm>
+          <a:prstGeom prst="rect">
+            <a:avLst/>
+          </a:prstGeom>
+        </p:spPr>
+        <p:txBody>
+          <a:bodyPr vert="horz" lIns="91440" tIns="45720" rIns="91440" bIns="45720" rtlCol="0" anchor="ctr">
+            <a:noAutofit/>
+          </a:bodyPr>
+          <a:lstStyle>
+            <a:lvl1pPr>
+              <a:spcBef>
+                <a:spcPct val="0"/>
+              </a:spcBef>
+              <a:buNone/>
+              <a:defRPr sz="3200" b="0" cap="all">
+                <a:ln w="3175" cmpd="sng">
+                  <a:noFill/>
+                </a:ln>
+                <a:effectLst>
+                  <a:glow rad="38100">
+                    <a:schemeClr val="bg1">
+                      <a:lumMod val="65000"/>
+                      <a:lumOff val="35000"/>
+                      <a:alpha val="40000"/>
+                    </a:schemeClr>
+                  </a:glow>
+                  <a:outerShdw blurRad="28575" dist="38100" dir="14040000" algn="tl" rotWithShape="0">
+                    <a:srgbClr val="000000">
+                      <a:alpha val="25000"/>
+                    </a:srgbClr>
+                  </a:outerShdw>
+                </a:effectLst>
+              </a:defRPr>
+            </a:lvl1pPr>
+            <a:lvl2pPr>
+              <a:defRPr>
+                <a:solidFill>
+                  <a:schemeClr val="tx2"/>
+                </a:solidFill>
+              </a:defRPr>
+            </a:lvl2pPr>
+            <a:lvl3pPr>
+              <a:defRPr>
+                <a:solidFill>
+                  <a:schemeClr val="tx2"/>
+                </a:solidFill>
+              </a:defRPr>
+            </a:lvl3pPr>
+            <a:lvl4pPr>
+              <a:defRPr>
+                <a:solidFill>
+                  <a:schemeClr val="tx2"/>
+                </a:solidFill>
+              </a:defRPr>
+            </a:lvl4pPr>
+            <a:lvl5pPr>
+              <a:defRPr>
+                <a:solidFill>
+                  <a:schemeClr val="tx2"/>
+                </a:solidFill>
+              </a:defRPr>
+            </a:lvl5pPr>
+            <a:lvl6pPr>
+              <a:defRPr>
+                <a:solidFill>
+                  <a:schemeClr val="tx2"/>
+                </a:solidFill>
+              </a:defRPr>
+            </a:lvl6pPr>
+            <a:lvl7pPr>
+              <a:defRPr>
+                <a:solidFill>
+                  <a:schemeClr val="tx2"/>
+                </a:solidFill>
+              </a:defRPr>
+            </a:lvl7pPr>
+            <a:lvl8pPr>
+              <a:defRPr>
+                <a:solidFill>
+                  <a:schemeClr val="tx2"/>
+                </a:solidFill>
+              </a:defRPr>
+            </a:lvl8pPr>
+            <a:lvl9pPr>
+              <a:defRPr>
+                <a:solidFill>
+                  <a:schemeClr val="tx2"/>
+                </a:solidFill>
+              </a:defRPr>
+            </a:lvl9pPr>
+          </a:lstStyle>
+          <a:p>
+            <a:pPr lvl="0"/>
+            <a:r>
+              <a:rPr lang="en-US" sz="8000">
+                <a:solidFill>
+                  <a:schemeClr val="tx1"/>
+                </a:solidFill>
+                <a:effectLst/>
+              </a:rPr>
+              <a:t>“</a:t>
+            </a:r>
+          </a:p>
+        </p:txBody>
+      </p:sp>
+      <p:sp>
+        <p:nvSpPr>
+          <p:cNvPr id="15" name="TextBox 14"/>
+          <p:cNvSpPr txBox="1"/>
+          <p:nvPr/>
+        </p:nvSpPr>
+        <p:spPr>
+          <a:xfrm>
+            <a:off x="10893425" y="2819399"/>
+            <a:ext cx="609600" cy="584776"/>
+          </a:xfrm>
+          <a:prstGeom prst="rect">
+            <a:avLst/>
+          </a:prstGeom>
+        </p:spPr>
+        <p:txBody>
+          <a:bodyPr vert="horz" lIns="91440" tIns="45720" rIns="91440" bIns="45720" rtlCol="0" anchor="ctr">
+            <a:noAutofit/>
+          </a:bodyPr>
+          <a:lstStyle>
+            <a:lvl1pPr>
+              <a:spcBef>
+                <a:spcPct val="0"/>
+              </a:spcBef>
+              <a:buNone/>
+              <a:defRPr sz="3200" b="0" cap="all">
+                <a:ln w="3175" cmpd="sng">
+                  <a:noFill/>
+                </a:ln>
+                <a:effectLst>
+                  <a:glow rad="38100">
+                    <a:schemeClr val="bg1">
+                      <a:lumMod val="65000"/>
+                      <a:lumOff val="35000"/>
+                      <a:alpha val="40000"/>
+                    </a:schemeClr>
+                  </a:glow>
+                  <a:outerShdw blurRad="28575" dist="38100" dir="14040000" algn="tl" rotWithShape="0">
+                    <a:srgbClr val="000000">
+                      <a:alpha val="25000"/>
+                    </a:srgbClr>
+                  </a:outerShdw>
+                </a:effectLst>
+              </a:defRPr>
+            </a:lvl1pPr>
+            <a:lvl2pPr>
+              <a:defRPr>
+                <a:solidFill>
+                  <a:schemeClr val="tx2"/>
+                </a:solidFill>
+              </a:defRPr>
+            </a:lvl2pPr>
+            <a:lvl3pPr>
+              <a:defRPr>
+                <a:solidFill>
+                  <a:schemeClr val="tx2"/>
+                </a:solidFill>
+              </a:defRPr>
+            </a:lvl3pPr>
+            <a:lvl4pPr>
+              <a:defRPr>
+                <a:solidFill>
+                  <a:schemeClr val="tx2"/>
+                </a:solidFill>
+              </a:defRPr>
+            </a:lvl4pPr>
+            <a:lvl5pPr>
+              <a:defRPr>
+                <a:solidFill>
+                  <a:schemeClr val="tx2"/>
+                </a:solidFill>
+              </a:defRPr>
+            </a:lvl5pPr>
+            <a:lvl6pPr>
+              <a:defRPr>
+                <a:solidFill>
+                  <a:schemeClr val="tx2"/>
+                </a:solidFill>
+              </a:defRPr>
+            </a:lvl6pPr>
+            <a:lvl7pPr>
+              <a:defRPr>
+                <a:solidFill>
+                  <a:schemeClr val="tx2"/>
+                </a:solidFill>
+              </a:defRPr>
+            </a:lvl7pPr>
+            <a:lvl8pPr>
+              <a:defRPr>
+                <a:solidFill>
+                  <a:schemeClr val="tx2"/>
+                </a:solidFill>
+              </a:defRPr>
+            </a:lvl8pPr>
+            <a:lvl9pPr>
+              <a:defRPr>
+                <a:solidFill>
+                  <a:schemeClr val="tx2"/>
+                </a:solidFill>
+              </a:defRPr>
+            </a:lvl9pPr>
+          </a:lstStyle>
+          <a:p>
+            <a:pPr lvl="0" algn="r"/>
+            <a:r>
+              <a:rPr lang="en-US" sz="8000">
+                <a:solidFill>
+                  <a:schemeClr val="tx1"/>
+                </a:solidFill>
+                <a:effectLst/>
+              </a:rPr>
+              <a:t>”</a:t>
+            </a:r>
+          </a:p>
+        </p:txBody>
+      </p:sp>
+      <p:sp>
+        <p:nvSpPr>
+          <p:cNvPr id="2" name="Title 1"/>
+          <p:cNvSpPr>
+            <a:spLocks noGrp="1"/>
+          </p:cNvSpPr>
+          <p:nvPr>
+            <p:ph type="title"/>
+          </p:nvPr>
+        </p:nvSpPr>
+        <p:spPr>
+          <a:xfrm>
+            <a:off x="2208212" y="685800"/>
+            <a:ext cx="8990012" cy="2743199"/>
+          </a:xfrm>
+        </p:spPr>
+        <p:txBody>
+          <a:bodyPr anchor="ctr">
+            <a:normAutofit/>
+          </a:bodyPr>
+          <a:lstStyle>
+            <a:lvl1pPr algn="ctr">
+              <a:defRPr sz="3200" b="0" cap="none">
+                <a:solidFill>
+                  <a:schemeClr val="tx1"/>
+                </a:solidFill>
+              </a:defRPr>
+            </a:lvl1pPr>
+          </a:lstStyle>
+          <a:p>
+            <a:r>
+              <a:rPr lang="en-US"/>
+              <a:t>Click to edit Master title style</a:t>
+            </a:r>
+          </a:p>
+        </p:txBody>
+      </p:sp>
+      <p:sp>
+        <p:nvSpPr>
+          <p:cNvPr id="10" name="Text Placeholder 9"/>
+          <p:cNvSpPr>
+            <a:spLocks noGrp="1"/>
+          </p:cNvSpPr>
+          <p:nvPr>
+            <p:ph type="body" sz="quarter" idx="13"/>
+          </p:nvPr>
+        </p:nvSpPr>
+        <p:spPr>
+          <a:xfrm>
+            <a:off x="2436811" y="3428999"/>
+            <a:ext cx="8532815" cy="381000"/>
+          </a:xfrm>
+        </p:spPr>
+        <p:txBody>
+          <a:bodyPr anchor="ctr">
+            <a:normAutofit/>
+          </a:bodyPr>
+          <a:lstStyle>
+            <a:lvl1pPr marL="0" indent="0">
+              <a:buFontTx/>
+              <a:buNone/>
+              <a:defRPr sz="1800"/>
+            </a:lvl1pPr>
+            <a:lvl2pPr marL="457200" indent="0">
+              <a:buFontTx/>
+              <a:buNone/>
+              <a:defRPr/>
+            </a:lvl2pPr>
+            <a:lvl3pPr marL="914400" indent="0">
+              <a:buFontTx/>
+              <a:buNone/>
+              <a:defRPr/>
+            </a:lvl3pPr>
+            <a:lvl4pPr marL="1371600" indent="0">
+              <a:buFontTx/>
+              <a:buNone/>
+              <a:defRPr/>
+            </a:lvl4pPr>
+            <a:lvl5pPr marL="1828800" indent="0">
+              <a:buFontTx/>
+              <a:buNone/>
+              <a:defRPr/>
+            </a:lvl5pPr>
+          </a:lstStyle>
+          <a:p>
+            <a:pPr lvl="0"/>
+            <a:r>
+              <a:rPr lang="en-US"/>
+              <a:t>Click to edit Master text styles</a:t>
+            </a:r>
+          </a:p>
+        </p:txBody>
+      </p:sp>
+      <p:sp>
+        <p:nvSpPr>
+          <p:cNvPr id="3" name="Text Placeholder 2"/>
+          <p:cNvSpPr>
+            <a:spLocks noGrp="1"/>
+          </p:cNvSpPr>
+          <p:nvPr>
+            <p:ph type="body" idx="1"/>
+          </p:nvPr>
+        </p:nvSpPr>
+        <p:spPr>
+          <a:xfrm>
+            <a:off x="1484311" y="4343400"/>
+            <a:ext cx="10018711" cy="1447800"/>
+          </a:xfrm>
+        </p:spPr>
+        <p:txBody>
+          <a:bodyPr anchor="ctr">
+            <a:normAutofit/>
+          </a:bodyPr>
+          <a:lstStyle>
+            <a:lvl1pPr marL="0" indent="0" algn="ctr">
+              <a:buNone/>
+              <a:defRPr sz="2000">
+                <a:solidFill>
+                  <a:schemeClr val="tx1"/>
+                </a:solidFill>
+              </a:defRPr>
+            </a:lvl1pPr>
+            <a:lvl2pPr marL="457200" indent="0">
+              <a:buNone/>
+              <a:defRPr sz="1800">
+                <a:solidFill>
+                  <a:schemeClr val="tx1">
+                    <a:tint val="75000"/>
+                  </a:schemeClr>
+                </a:solidFill>
+              </a:defRPr>
+            </a:lvl2pPr>
+            <a:lvl3pPr marL="914400" indent="0">
+              <a:buNone/>
+              <a:defRPr sz="1600">
+                <a:solidFill>
+                  <a:schemeClr val="tx1">
+                    <a:tint val="75000"/>
+                  </a:schemeClr>
+                </a:solidFill>
+              </a:defRPr>
+            </a:lvl3pPr>
+            <a:lvl4pPr marL="1371600" indent="0">
+              <a:buNone/>
+              <a:defRPr sz="1400">
+                <a:solidFill>
+                  <a:schemeClr val="tx1">
+                    <a:tint val="75000"/>
+                  </a:schemeClr>
+                </a:solidFill>
+              </a:defRPr>
+            </a:lvl4pPr>
+            <a:lvl5pPr marL="1828800" indent="0">
+              <a:buNone/>
+              <a:defRPr sz="1400">
+                <a:solidFill>
+                  <a:schemeClr val="tx1">
+                    <a:tint val="75000"/>
+                  </a:schemeClr>
+                </a:solidFill>
+              </a:defRPr>
+            </a:lvl5pPr>
+            <a:lvl6pPr marL="2286000" indent="0">
+              <a:buNone/>
+              <a:defRPr sz="1400">
+                <a:solidFill>
+                  <a:schemeClr val="tx1">
+                    <a:tint val="75000"/>
+                  </a:schemeClr>
+                </a:solidFill>
+              </a:defRPr>
+            </a:lvl6pPr>
+            <a:lvl7pPr marL="2743200" indent="0">
+              <a:buNone/>
+              <a:defRPr sz="1400">
+                <a:solidFill>
+                  <a:schemeClr val="tx1">
+                    <a:tint val="75000"/>
+                  </a:schemeClr>
+                </a:solidFill>
+              </a:defRPr>
+            </a:lvl7pPr>
+            <a:lvl8pPr marL="3200400" indent="0">
+              <a:buNone/>
+              <a:defRPr sz="1400">
+                <a:solidFill>
+                  <a:schemeClr val="tx1">
+                    <a:tint val="75000"/>
+                  </a:schemeClr>
+                </a:solidFill>
+              </a:defRPr>
+            </a:lvl8pPr>
+            <a:lvl9pPr marL="3657600" indent="0">
+              <a:buNone/>
+              <a:defRPr sz="1400">
+                <a:solidFill>
+                  <a:schemeClr val="tx1">
+                    <a:tint val="75000"/>
+                  </a:schemeClr>
+                </a:solidFill>
+              </a:defRPr>
+            </a:lvl9pPr>
+          </a:lstStyle>
+          <a:p>
+            <a:pPr lvl="0"/>
+            <a:r>
+              <a:rPr lang="en-US"/>
+              <a:t>Click to edit Master text styles</a:t>
+            </a:r>
+          </a:p>
+        </p:txBody>
+      </p:sp>
+      <p:sp>
+        <p:nvSpPr>
+          <p:cNvPr id="4" name="Date Placeholder 3"/>
+          <p:cNvSpPr>
+            <a:spLocks noGrp="1"/>
+          </p:cNvSpPr>
+          <p:nvPr>
+            <p:ph type="dt" sz="half" idx="10"/>
+          </p:nvPr>
+        </p:nvSpPr>
+        <p:spPr/>
+        <p:txBody>
+          <a:bodyPr/>
+          <a:lstStyle/>
+          <a:p>
+            <a:fld id="{1705C18A-ADD3-4375-A699-9F4488C0E00E}" type="datetimeFigureOut">
+              <a:rPr lang="en-US" smtClean="0"/>
+              <a:t>5/1/2026</a:t>
+            </a:fld>
+            <a:endParaRPr lang="en-US"/>
+          </a:p>
+        </p:txBody>
+      </p:sp>
+      <p:sp>
+        <p:nvSpPr>
+          <p:cNvPr id="5" name="Footer Placeholder 4"/>
+          <p:cNvSpPr>
+            <a:spLocks noGrp="1"/>
+          </p:cNvSpPr>
+          <p:nvPr>
+            <p:ph type="ftr" sz="quarter" idx="11"/>
+          </p:nvPr>
+        </p:nvSpPr>
+        <p:spPr/>
+        <p:txBody>
+          <a:bodyPr/>
+          <a:lstStyle/>
+          <a:p>
+            <a:endParaRPr lang="en-US"/>
+          </a:p>
+        </p:txBody>
+      </p:sp>
+      <p:sp>
+        <p:nvSpPr>
+          <p:cNvPr id="6" name="Slide Number Placeholder 5"/>
+          <p:cNvSpPr>
+            <a:spLocks noGrp="1"/>
+          </p:cNvSpPr>
+          <p:nvPr>
+            <p:ph type="sldNum" sz="quarter" idx="12"/>
+          </p:nvPr>
+        </p:nvSpPr>
+        <p:spPr/>
+        <p:txBody>
+          <a:bodyPr/>
+          <a:lstStyle/>
+          <a:p>
+            <a:fld id="{432135D0-4141-4185-A76B-8A0D017CF383}" type="slidenum">
+              <a:rPr lang="en-US" smtClean="0"/>
+              <a:t>‹#›</a:t>
+            </a:fld>
+            <a:endParaRPr lang="en-US"/>
+          </a:p>
+        </p:txBody>
+      </p:sp>
+    </p:spTree>
+    <p:extLst>
+      <p:ext uri="{BB962C8B-B14F-4D97-AF65-F5344CB8AC3E}">
+        <p14:creationId xmlns:p14="http://schemas.microsoft.com/office/powerpoint/2010/main" val="3124386450"/>
+      </p:ext>
+    </p:extLst>
+  </p:cSld>
+  <p:clrMapOvr>
+    <a:masterClrMapping/>
+  </p:clrMapOvr>
+</p:sldLayout>
+</file>
+
+<file path=ppt/slideLayouts/slideLayout13.xml><?xml version="1.0" encoding="utf-8"?>
+<p:sldLayout xmlns:a="http://schemas.openxmlformats.org/drawingml/2006/main" xmlns:r="http://schemas.openxmlformats.org/officeDocument/2006/relationships" xmlns:p="http://schemas.openxmlformats.org/presentationml/2006/main" preserve="1">
+  <p:cSld name="Name Card">
+    <p:spTree>
+      <p:nvGrpSpPr>
+        <p:cNvPr id="1" name=""/>
+        <p:cNvGrpSpPr/>
+        <p:nvPr/>
+      </p:nvGrpSpPr>
+      <p:grpSpPr>
+        <a:xfrm>
+          <a:off x="0" y="0"/>
+          <a:ext cx="0" cy="0"/>
+          <a:chOff x="0" y="0"/>
+          <a:chExt cx="0" cy="0"/>
+        </a:xfrm>
+      </p:grpSpPr>
+      <p:sp>
+        <p:nvSpPr>
+          <p:cNvPr id="2" name="Title 1"/>
+          <p:cNvSpPr>
+            <a:spLocks noGrp="1"/>
+          </p:cNvSpPr>
+          <p:nvPr>
+            <p:ph type="title"/>
+          </p:nvPr>
+        </p:nvSpPr>
+        <p:spPr>
+          <a:xfrm>
+            <a:off x="1484313" y="3308581"/>
+            <a:ext cx="10018709" cy="1468800"/>
+          </a:xfrm>
+        </p:spPr>
+        <p:txBody>
+          <a:bodyPr anchor="b">
+            <a:normAutofit/>
+          </a:bodyPr>
+          <a:lstStyle>
+            <a:lvl1pPr algn="r">
+              <a:defRPr sz="3200" b="0" cap="none"/>
+            </a:lvl1pPr>
+          </a:lstStyle>
+          <a:p>
+            <a:r>
+              <a:rPr lang="en-US"/>
+              <a:t>Click to edit Master title style</a:t>
+            </a:r>
+          </a:p>
+        </p:txBody>
+      </p:sp>
+      <p:sp>
+        <p:nvSpPr>
+          <p:cNvPr id="3" name="Text Placeholder 2"/>
+          <p:cNvSpPr>
+            <a:spLocks noGrp="1"/>
+          </p:cNvSpPr>
+          <p:nvPr>
+            <p:ph type="body" idx="1"/>
+          </p:nvPr>
+        </p:nvSpPr>
+        <p:spPr>
+          <a:xfrm>
+            <a:off x="1484312" y="4777381"/>
+            <a:ext cx="10018710" cy="860400"/>
+          </a:xfrm>
+        </p:spPr>
+        <p:txBody>
+          <a:bodyPr anchor="t">
+            <a:normAutofit/>
+          </a:bodyPr>
+          <a:lstStyle>
+            <a:lvl1pPr marL="0" indent="0" algn="r">
+              <a:buNone/>
+              <a:defRPr sz="2000">
+                <a:solidFill>
+                  <a:schemeClr val="tx1"/>
+                </a:solidFill>
+              </a:defRPr>
+            </a:lvl1pPr>
+            <a:lvl2pPr marL="457200" indent="0">
+              <a:buNone/>
+              <a:defRPr sz="1800">
+                <a:solidFill>
+                  <a:schemeClr val="tx1">
+                    <a:tint val="75000"/>
+                  </a:schemeClr>
+                </a:solidFill>
+              </a:defRPr>
+            </a:lvl2pPr>
+            <a:lvl3pPr marL="914400" indent="0">
+              <a:buNone/>
+              <a:defRPr sz="1600">
+                <a:solidFill>
+                  <a:schemeClr val="tx1">
+                    <a:tint val="75000"/>
+                  </a:schemeClr>
+                </a:solidFill>
+              </a:defRPr>
+            </a:lvl3pPr>
+            <a:lvl4pPr marL="1371600" indent="0">
+              <a:buNone/>
+              <a:defRPr sz="1400">
+                <a:solidFill>
+                  <a:schemeClr val="tx1">
+                    <a:tint val="75000"/>
+                  </a:schemeClr>
+                </a:solidFill>
+              </a:defRPr>
+            </a:lvl4pPr>
+            <a:lvl5pPr marL="1828800" indent="0">
+              <a:buNone/>
+              <a:defRPr sz="1400">
+                <a:solidFill>
+                  <a:schemeClr val="tx1">
+                    <a:tint val="75000"/>
+                  </a:schemeClr>
+                </a:solidFill>
+              </a:defRPr>
+            </a:lvl5pPr>
+            <a:lvl6pPr marL="2286000" indent="0">
+              <a:buNone/>
+              <a:defRPr sz="1400">
+                <a:solidFill>
+                  <a:schemeClr val="tx1">
+                    <a:tint val="75000"/>
+                  </a:schemeClr>
+                </a:solidFill>
+              </a:defRPr>
+            </a:lvl6pPr>
+            <a:lvl7pPr marL="2743200" indent="0">
+              <a:buNone/>
+              <a:defRPr sz="1400">
+                <a:solidFill>
+                  <a:schemeClr val="tx1">
+                    <a:tint val="75000"/>
+                  </a:schemeClr>
+                </a:solidFill>
+              </a:defRPr>
+            </a:lvl7pPr>
+            <a:lvl8pPr marL="3200400" indent="0">
+              <a:buNone/>
+              <a:defRPr sz="1400">
+                <a:solidFill>
+                  <a:schemeClr val="tx1">
+                    <a:tint val="75000"/>
+                  </a:schemeClr>
+                </a:solidFill>
+              </a:defRPr>
+            </a:lvl8pPr>
+            <a:lvl9pPr marL="3657600" indent="0">
+              <a:buNone/>
+              <a:defRPr sz="1400">
+                <a:solidFill>
+                  <a:schemeClr val="tx1">
+                    <a:tint val="75000"/>
+                  </a:schemeClr>
+                </a:solidFill>
+              </a:defRPr>
+            </a:lvl9pPr>
+          </a:lstStyle>
+          <a:p>
+            <a:pPr lvl="0"/>
+            <a:r>
+              <a:rPr lang="en-US"/>
+              <a:t>Click to edit Master text styles</a:t>
+            </a:r>
+          </a:p>
+        </p:txBody>
+      </p:sp>
+      <p:sp>
+        <p:nvSpPr>
+          <p:cNvPr id="4" name="Date Placeholder 3"/>
+          <p:cNvSpPr>
+            <a:spLocks noGrp="1"/>
+          </p:cNvSpPr>
+          <p:nvPr>
+            <p:ph type="dt" sz="half" idx="10"/>
+          </p:nvPr>
+        </p:nvSpPr>
+        <p:spPr/>
+        <p:txBody>
+          <a:bodyPr/>
+          <a:lstStyle/>
+          <a:p>
+            <a:fld id="{1705C18A-ADD3-4375-A699-9F4488C0E00E}" type="datetimeFigureOut">
+              <a:rPr lang="en-US" smtClean="0"/>
+              <a:t>5/1/2026</a:t>
+            </a:fld>
+            <a:endParaRPr lang="en-US"/>
+          </a:p>
+        </p:txBody>
+      </p:sp>
+      <p:sp>
+        <p:nvSpPr>
+          <p:cNvPr id="5" name="Footer Placeholder 4"/>
+          <p:cNvSpPr>
+            <a:spLocks noGrp="1"/>
+          </p:cNvSpPr>
+          <p:nvPr>
+            <p:ph type="ftr" sz="quarter" idx="11"/>
+          </p:nvPr>
+        </p:nvSpPr>
+        <p:spPr/>
+        <p:txBody>
+          <a:bodyPr/>
+          <a:lstStyle/>
+          <a:p>
+            <a:endParaRPr lang="en-US"/>
+          </a:p>
+        </p:txBody>
+      </p:sp>
+      <p:sp>
+        <p:nvSpPr>
+          <p:cNvPr id="6" name="Slide Number Placeholder 5"/>
+          <p:cNvSpPr>
+            <a:spLocks noGrp="1"/>
+          </p:cNvSpPr>
+          <p:nvPr>
+            <p:ph type="sldNum" sz="quarter" idx="12"/>
+          </p:nvPr>
+        </p:nvSpPr>
+        <p:spPr/>
+        <p:txBody>
+          <a:bodyPr/>
+          <a:lstStyle/>
+          <a:p>
+            <a:fld id="{432135D0-4141-4185-A76B-8A0D017CF383}" type="slidenum">
+              <a:rPr lang="en-US" smtClean="0"/>
+              <a:t>‹#›</a:t>
+            </a:fld>
+            <a:endParaRPr lang="en-US"/>
+          </a:p>
+        </p:txBody>
+      </p:sp>
+    </p:spTree>
+    <p:extLst>
+      <p:ext uri="{BB962C8B-B14F-4D97-AF65-F5344CB8AC3E}">
+        <p14:creationId xmlns:p14="http://schemas.microsoft.com/office/powerpoint/2010/main" val="3938614676"/>
+      </p:ext>
+    </p:extLst>
+  </p:cSld>
+  <p:clrMapOvr>
+    <a:masterClrMapping/>
+  </p:clrMapOvr>
+</p:sldLayout>
+</file>
+
+<file path=ppt/slideLayouts/slideLayout14.xml><?xml version="1.0" encoding="utf-8"?>
+<p:sldLayout xmlns:a="http://schemas.openxmlformats.org/drawingml/2006/main" xmlns:r="http://schemas.openxmlformats.org/officeDocument/2006/relationships" xmlns:p="http://schemas.openxmlformats.org/presentationml/2006/main" preserve="1">
+  <p:cSld name="Quote Name Card">
+    <p:spTree>
+      <p:nvGrpSpPr>
+        <p:cNvPr id="1" name=""/>
+        <p:cNvGrpSpPr/>
+        <p:nvPr/>
+      </p:nvGrpSpPr>
+      <p:grpSpPr>
+        <a:xfrm>
+          <a:off x="0" y="0"/>
+          <a:ext cx="0" cy="0"/>
+          <a:chOff x="0" y="0"/>
+          <a:chExt cx="0" cy="0"/>
+        </a:xfrm>
+      </p:grpSpPr>
+      <p:sp>
+        <p:nvSpPr>
+          <p:cNvPr id="14" name="TextBox 13"/>
+          <p:cNvSpPr txBox="1"/>
+          <p:nvPr/>
+        </p:nvSpPr>
+        <p:spPr>
+          <a:xfrm>
+            <a:off x="1598612" y="863023"/>
+            <a:ext cx="609600" cy="584776"/>
+          </a:xfrm>
+          <a:prstGeom prst="rect">
+            <a:avLst/>
+          </a:prstGeom>
+        </p:spPr>
+        <p:txBody>
+          <a:bodyPr vert="horz" lIns="91440" tIns="45720" rIns="91440" bIns="45720" rtlCol="0" anchor="ctr">
+            <a:noAutofit/>
+          </a:bodyPr>
+          <a:lstStyle>
+            <a:lvl1pPr>
+              <a:spcBef>
+                <a:spcPct val="0"/>
+              </a:spcBef>
+              <a:buNone/>
+              <a:defRPr sz="3200" b="0" cap="all">
+                <a:ln w="3175" cmpd="sng">
+                  <a:noFill/>
+                </a:ln>
+                <a:effectLst>
+                  <a:glow rad="38100">
+                    <a:schemeClr val="bg1">
+                      <a:lumMod val="65000"/>
+                      <a:lumOff val="35000"/>
+                      <a:alpha val="40000"/>
+                    </a:schemeClr>
+                  </a:glow>
+                  <a:outerShdw blurRad="28575" dist="38100" dir="14040000" algn="tl" rotWithShape="0">
+                    <a:srgbClr val="000000">
+                      <a:alpha val="25000"/>
+                    </a:srgbClr>
+                  </a:outerShdw>
+                </a:effectLst>
+              </a:defRPr>
+            </a:lvl1pPr>
+            <a:lvl2pPr>
+              <a:defRPr>
+                <a:solidFill>
+                  <a:schemeClr val="tx2"/>
+                </a:solidFill>
+              </a:defRPr>
+            </a:lvl2pPr>
+            <a:lvl3pPr>
+              <a:defRPr>
+                <a:solidFill>
+                  <a:schemeClr val="tx2"/>
+                </a:solidFill>
+              </a:defRPr>
+            </a:lvl3pPr>
+            <a:lvl4pPr>
+              <a:defRPr>
+                <a:solidFill>
+                  <a:schemeClr val="tx2"/>
+                </a:solidFill>
+              </a:defRPr>
+            </a:lvl4pPr>
+            <a:lvl5pPr>
+              <a:defRPr>
+                <a:solidFill>
+                  <a:schemeClr val="tx2"/>
+                </a:solidFill>
+              </a:defRPr>
+            </a:lvl5pPr>
+            <a:lvl6pPr>
+              <a:defRPr>
+                <a:solidFill>
+                  <a:schemeClr val="tx2"/>
+                </a:solidFill>
+              </a:defRPr>
+            </a:lvl6pPr>
+            <a:lvl7pPr>
+              <a:defRPr>
+                <a:solidFill>
+                  <a:schemeClr val="tx2"/>
+                </a:solidFill>
+              </a:defRPr>
+            </a:lvl7pPr>
+            <a:lvl8pPr>
+              <a:defRPr>
+                <a:solidFill>
+                  <a:schemeClr val="tx2"/>
+                </a:solidFill>
+              </a:defRPr>
+            </a:lvl8pPr>
+            <a:lvl9pPr>
+              <a:defRPr>
+                <a:solidFill>
+                  <a:schemeClr val="tx2"/>
+                </a:solidFill>
+              </a:defRPr>
+            </a:lvl9pPr>
+          </a:lstStyle>
+          <a:p>
+            <a:pPr lvl="0"/>
+            <a:r>
+              <a:rPr lang="en-US" sz="8000">
+                <a:solidFill>
+                  <a:schemeClr val="tx1"/>
+                </a:solidFill>
+                <a:effectLst/>
+              </a:rPr>
+              <a:t>“</a:t>
+            </a:r>
+          </a:p>
+        </p:txBody>
+      </p:sp>
+      <p:sp>
+        <p:nvSpPr>
+          <p:cNvPr id="15" name="TextBox 14"/>
+          <p:cNvSpPr txBox="1"/>
+          <p:nvPr/>
+        </p:nvSpPr>
+        <p:spPr>
+          <a:xfrm>
+            <a:off x="10893425" y="2819399"/>
+            <a:ext cx="609600" cy="584776"/>
+          </a:xfrm>
+          <a:prstGeom prst="rect">
+            <a:avLst/>
+          </a:prstGeom>
+        </p:spPr>
+        <p:txBody>
+          <a:bodyPr vert="horz" lIns="91440" tIns="45720" rIns="91440" bIns="45720" rtlCol="0" anchor="ctr">
+            <a:noAutofit/>
+          </a:bodyPr>
+          <a:lstStyle>
+            <a:lvl1pPr>
+              <a:spcBef>
+                <a:spcPct val="0"/>
+              </a:spcBef>
+              <a:buNone/>
+              <a:defRPr sz="3200" b="0" cap="all">
+                <a:ln w="3175" cmpd="sng">
+                  <a:noFill/>
+                </a:ln>
+                <a:effectLst>
+                  <a:glow rad="38100">
+                    <a:schemeClr val="bg1">
+                      <a:lumMod val="65000"/>
+                      <a:lumOff val="35000"/>
+                      <a:alpha val="40000"/>
+                    </a:schemeClr>
+                  </a:glow>
+                  <a:outerShdw blurRad="28575" dist="38100" dir="14040000" algn="tl" rotWithShape="0">
+                    <a:srgbClr val="000000">
+                      <a:alpha val="25000"/>
+                    </a:srgbClr>
+                  </a:outerShdw>
+                </a:effectLst>
+              </a:defRPr>
+            </a:lvl1pPr>
+            <a:lvl2pPr>
+              <a:defRPr>
+                <a:solidFill>
+                  <a:schemeClr val="tx2"/>
+                </a:solidFill>
+              </a:defRPr>
+            </a:lvl2pPr>
+            <a:lvl3pPr>
+              <a:defRPr>
+                <a:solidFill>
+                  <a:schemeClr val="tx2"/>
+                </a:solidFill>
+              </a:defRPr>
+            </a:lvl3pPr>
+            <a:lvl4pPr>
+              <a:defRPr>
+                <a:solidFill>
+                  <a:schemeClr val="tx2"/>
+                </a:solidFill>
+              </a:defRPr>
+            </a:lvl4pPr>
+            <a:lvl5pPr>
+              <a:defRPr>
+                <a:solidFill>
+                  <a:schemeClr val="tx2"/>
+                </a:solidFill>
+              </a:defRPr>
+            </a:lvl5pPr>
+            <a:lvl6pPr>
+              <a:defRPr>
+                <a:solidFill>
+                  <a:schemeClr val="tx2"/>
+                </a:solidFill>
+              </a:defRPr>
+            </a:lvl6pPr>
+            <a:lvl7pPr>
+              <a:defRPr>
+                <a:solidFill>
+                  <a:schemeClr val="tx2"/>
+                </a:solidFill>
+              </a:defRPr>
+            </a:lvl7pPr>
+            <a:lvl8pPr>
+              <a:defRPr>
+                <a:solidFill>
+                  <a:schemeClr val="tx2"/>
+                </a:solidFill>
+              </a:defRPr>
+            </a:lvl8pPr>
+            <a:lvl9pPr>
+              <a:defRPr>
+                <a:solidFill>
+                  <a:schemeClr val="tx2"/>
+                </a:solidFill>
+              </a:defRPr>
+            </a:lvl9pPr>
+          </a:lstStyle>
+          <a:p>
+            <a:pPr lvl="0" algn="r"/>
+            <a:r>
+              <a:rPr lang="en-US" sz="8000">
+                <a:solidFill>
+                  <a:schemeClr val="tx1"/>
+                </a:solidFill>
+                <a:effectLst/>
+              </a:rPr>
+              <a:t>”</a:t>
+            </a:r>
+          </a:p>
+        </p:txBody>
+      </p:sp>
+      <p:sp>
+        <p:nvSpPr>
+          <p:cNvPr id="2" name="Title 1"/>
+          <p:cNvSpPr>
+            <a:spLocks noGrp="1"/>
+          </p:cNvSpPr>
+          <p:nvPr>
+            <p:ph type="title"/>
+          </p:nvPr>
+        </p:nvSpPr>
+        <p:spPr>
+          <a:xfrm>
+            <a:off x="2208212" y="685800"/>
+            <a:ext cx="8990012" cy="2743199"/>
+          </a:xfrm>
+        </p:spPr>
+        <p:txBody>
+          <a:bodyPr anchor="ctr">
+            <a:normAutofit/>
+          </a:bodyPr>
+          <a:lstStyle>
+            <a:lvl1pPr algn="ctr">
+              <a:defRPr sz="3200" b="0" cap="none">
+                <a:solidFill>
+                  <a:schemeClr val="tx1"/>
+                </a:solidFill>
+              </a:defRPr>
+            </a:lvl1pPr>
+          </a:lstStyle>
+          <a:p>
+            <a:r>
+              <a:rPr lang="en-US"/>
+              <a:t>Click to edit Master title style</a:t>
+            </a:r>
+          </a:p>
+        </p:txBody>
+      </p:sp>
+      <p:sp>
+        <p:nvSpPr>
+          <p:cNvPr id="10" name="Text Placeholder 9"/>
+          <p:cNvSpPr>
+            <a:spLocks noGrp="1"/>
+          </p:cNvSpPr>
+          <p:nvPr>
+            <p:ph type="body" sz="quarter" idx="13"/>
+          </p:nvPr>
+        </p:nvSpPr>
+        <p:spPr>
+          <a:xfrm>
+            <a:off x="1484313" y="3886200"/>
+            <a:ext cx="10018710" cy="889000"/>
+          </a:xfrm>
+        </p:spPr>
+        <p:txBody>
+          <a:bodyPr vert="horz" lIns="91440" tIns="45720" rIns="91440" bIns="45720" rtlCol="0" anchor="b">
+            <a:normAutofit/>
+          </a:bodyPr>
+          <a:lstStyle>
+            <a:lvl1pPr algn="r">
+              <a:buNone/>
+              <a:defRPr lang="en-US" sz="2400" b="0" cap="none" dirty="0">
+                <a:ln w="3175" cmpd="sng">
+                  <a:noFill/>
+                </a:ln>
+                <a:solidFill>
+                  <a:schemeClr val="tx1"/>
+                </a:solidFill>
+                <a:effectLst/>
+              </a:defRPr>
+            </a:lvl1pPr>
+          </a:lstStyle>
+          <a:p>
+            <a:pPr marL="0" lvl="0">
+              <a:spcBef>
+                <a:spcPct val="0"/>
+              </a:spcBef>
+              <a:buNone/>
+            </a:pPr>
+            <a:r>
+              <a:rPr lang="en-US"/>
+              <a:t>Click to edit Master text styles</a:t>
+            </a:r>
+          </a:p>
+        </p:txBody>
+      </p:sp>
+      <p:sp>
+        <p:nvSpPr>
+          <p:cNvPr id="3" name="Text Placeholder 2"/>
+          <p:cNvSpPr>
+            <a:spLocks noGrp="1"/>
+          </p:cNvSpPr>
+          <p:nvPr>
+            <p:ph type="body" idx="1"/>
+          </p:nvPr>
+        </p:nvSpPr>
+        <p:spPr>
+          <a:xfrm>
+            <a:off x="1484312" y="4775200"/>
+            <a:ext cx="10018710" cy="1016000"/>
+          </a:xfrm>
+        </p:spPr>
+        <p:txBody>
+          <a:bodyPr anchor="t">
+            <a:normAutofit/>
+          </a:bodyPr>
+          <a:lstStyle>
+            <a:lvl1pPr marL="0" indent="0" algn="r">
+              <a:buNone/>
+              <a:defRPr sz="1800">
+                <a:solidFill>
+                  <a:schemeClr val="tx1"/>
+                </a:solidFill>
+              </a:defRPr>
+            </a:lvl1pPr>
+            <a:lvl2pPr marL="457200" indent="0">
+              <a:buNone/>
+              <a:defRPr sz="1800">
+                <a:solidFill>
+                  <a:schemeClr val="tx1">
+                    <a:tint val="75000"/>
+                  </a:schemeClr>
+                </a:solidFill>
+              </a:defRPr>
+            </a:lvl2pPr>
+            <a:lvl3pPr marL="914400" indent="0">
+              <a:buNone/>
+              <a:defRPr sz="1600">
+                <a:solidFill>
+                  <a:schemeClr val="tx1">
+                    <a:tint val="75000"/>
+                  </a:schemeClr>
+                </a:solidFill>
+              </a:defRPr>
+            </a:lvl3pPr>
+            <a:lvl4pPr marL="1371600" indent="0">
+              <a:buNone/>
+              <a:defRPr sz="1400">
+                <a:solidFill>
+                  <a:schemeClr val="tx1">
+                    <a:tint val="75000"/>
+                  </a:schemeClr>
+                </a:solidFill>
+              </a:defRPr>
+            </a:lvl4pPr>
+            <a:lvl5pPr marL="1828800" indent="0">
+              <a:buNone/>
+              <a:defRPr sz="1400">
+                <a:solidFill>
+                  <a:schemeClr val="tx1">
+                    <a:tint val="75000"/>
+                  </a:schemeClr>
+                </a:solidFill>
+              </a:defRPr>
+            </a:lvl5pPr>
+            <a:lvl6pPr marL="2286000" indent="0">
+              <a:buNone/>
+              <a:defRPr sz="1400">
+                <a:solidFill>
+                  <a:schemeClr val="tx1">
+                    <a:tint val="75000"/>
+                  </a:schemeClr>
+                </a:solidFill>
+              </a:defRPr>
+            </a:lvl6pPr>
+            <a:lvl7pPr marL="2743200" indent="0">
+              <a:buNone/>
+              <a:defRPr sz="1400">
+                <a:solidFill>
+                  <a:schemeClr val="tx1">
+                    <a:tint val="75000"/>
+                  </a:schemeClr>
+                </a:solidFill>
+              </a:defRPr>
+            </a:lvl7pPr>
+            <a:lvl8pPr marL="3200400" indent="0">
+              <a:buNone/>
+              <a:defRPr sz="1400">
+                <a:solidFill>
+                  <a:schemeClr val="tx1">
+                    <a:tint val="75000"/>
+                  </a:schemeClr>
+                </a:solidFill>
+              </a:defRPr>
+            </a:lvl8pPr>
+            <a:lvl9pPr marL="3657600" indent="0">
+              <a:buNone/>
+              <a:defRPr sz="1400">
+                <a:solidFill>
+                  <a:schemeClr val="tx1">
+                    <a:tint val="75000"/>
+                  </a:schemeClr>
+                </a:solidFill>
+              </a:defRPr>
+            </a:lvl9pPr>
+          </a:lstStyle>
+          <a:p>
+            <a:pPr lvl="0"/>
+            <a:r>
+              <a:rPr lang="en-US"/>
+              <a:t>Click to edit Master text styles</a:t>
+            </a:r>
+          </a:p>
+        </p:txBody>
+      </p:sp>
+      <p:sp>
+        <p:nvSpPr>
+          <p:cNvPr id="4" name="Date Placeholder 3"/>
+          <p:cNvSpPr>
+            <a:spLocks noGrp="1"/>
+          </p:cNvSpPr>
+          <p:nvPr>
+            <p:ph type="dt" sz="half" idx="10"/>
+          </p:nvPr>
+        </p:nvSpPr>
+        <p:spPr/>
+        <p:txBody>
+          <a:bodyPr/>
+          <a:lstStyle/>
+          <a:p>
+            <a:fld id="{1705C18A-ADD3-4375-A699-9F4488C0E00E}" type="datetimeFigureOut">
+              <a:rPr lang="en-US" smtClean="0"/>
+              <a:t>5/1/2026</a:t>
+            </a:fld>
+            <a:endParaRPr lang="en-US"/>
+          </a:p>
+        </p:txBody>
+      </p:sp>
+      <p:sp>
+        <p:nvSpPr>
+          <p:cNvPr id="5" name="Footer Placeholder 4"/>
+          <p:cNvSpPr>
+            <a:spLocks noGrp="1"/>
+          </p:cNvSpPr>
+          <p:nvPr>
+            <p:ph type="ftr" sz="quarter" idx="11"/>
+          </p:nvPr>
+        </p:nvSpPr>
+        <p:spPr/>
+        <p:txBody>
+          <a:bodyPr/>
+          <a:lstStyle/>
+          <a:p>
+            <a:endParaRPr lang="en-US"/>
+          </a:p>
+        </p:txBody>
+      </p:sp>
+      <p:sp>
+        <p:nvSpPr>
+          <p:cNvPr id="6" name="Slide Number Placeholder 5"/>
+          <p:cNvSpPr>
+            <a:spLocks noGrp="1"/>
+          </p:cNvSpPr>
+          <p:nvPr>
+            <p:ph type="sldNum" sz="quarter" idx="12"/>
+          </p:nvPr>
+        </p:nvSpPr>
+        <p:spPr/>
+        <p:txBody>
+          <a:bodyPr/>
+          <a:lstStyle/>
+          <a:p>
+            <a:fld id="{432135D0-4141-4185-A76B-8A0D017CF383}" type="slidenum">
+              <a:rPr lang="en-US" smtClean="0"/>
+              <a:t>‹#›</a:t>
+            </a:fld>
+            <a:endParaRPr lang="en-US"/>
+          </a:p>
+        </p:txBody>
+      </p:sp>
+    </p:spTree>
+    <p:extLst>
+      <p:ext uri="{BB962C8B-B14F-4D97-AF65-F5344CB8AC3E}">
+        <p14:creationId xmlns:p14="http://schemas.microsoft.com/office/powerpoint/2010/main" val="3580707907"/>
+      </p:ext>
+    </p:extLst>
+  </p:cSld>
+  <p:clrMapOvr>
+    <a:masterClrMapping/>
+  </p:clrMapOvr>
+</p:sldLayout>
+</file>
+
+<file path=ppt/slideLayouts/slideLayout15.xml><?xml version="1.0" encoding="utf-8"?>
+<p:sldLayout xmlns:a="http://schemas.openxmlformats.org/drawingml/2006/main" xmlns:r="http://schemas.openxmlformats.org/officeDocument/2006/relationships" xmlns:p="http://schemas.openxmlformats.org/presentationml/2006/main" preserve="1">
+  <p:cSld name="True or False">
+    <p:spTree>
+      <p:nvGrpSpPr>
+        <p:cNvPr id="1" name=""/>
+        <p:cNvGrpSpPr/>
+        <p:nvPr/>
+      </p:nvGrpSpPr>
+      <p:grpSpPr>
+        <a:xfrm>
+          <a:off x="0" y="0"/>
+          <a:ext cx="0" cy="0"/>
+          <a:chOff x="0" y="0"/>
+          <a:chExt cx="0" cy="0"/>
+        </a:xfrm>
+      </p:grpSpPr>
+      <p:sp>
+        <p:nvSpPr>
+          <p:cNvPr id="2" name="Title 1"/>
+          <p:cNvSpPr>
+            <a:spLocks noGrp="1"/>
+          </p:cNvSpPr>
+          <p:nvPr>
+            <p:ph type="title"/>
+          </p:nvPr>
+        </p:nvSpPr>
+        <p:spPr>
+          <a:xfrm>
+            <a:off x="1484313" y="685800"/>
+            <a:ext cx="10018712" cy="2727325"/>
+          </a:xfrm>
+        </p:spPr>
+        <p:txBody>
+          <a:bodyPr vert="horz" lIns="91440" tIns="45720" rIns="91440" bIns="45720" rtlCol="0" anchor="ctr">
+            <a:normAutofit/>
+          </a:bodyPr>
+          <a:lstStyle>
+            <a:lvl1pPr>
+              <a:defRPr lang="en-US" b="0" dirty="0"/>
+            </a:lvl1pPr>
+          </a:lstStyle>
+          <a:p>
+            <a:pPr marL="0" lvl="0"/>
+            <a:r>
+              <a:rPr lang="en-US"/>
+              <a:t>Click to edit Master title style</a:t>
+            </a:r>
+          </a:p>
+        </p:txBody>
+      </p:sp>
+      <p:sp>
+        <p:nvSpPr>
+          <p:cNvPr id="10" name="Text Placeholder 9"/>
+          <p:cNvSpPr>
+            <a:spLocks noGrp="1"/>
+          </p:cNvSpPr>
+          <p:nvPr>
+            <p:ph type="body" sz="quarter" idx="13"/>
+          </p:nvPr>
+        </p:nvSpPr>
+        <p:spPr>
+          <a:xfrm>
+            <a:off x="1484312" y="3505200"/>
+            <a:ext cx="10018713" cy="838200"/>
+          </a:xfrm>
+        </p:spPr>
+        <p:txBody>
+          <a:bodyPr vert="horz" lIns="91440" tIns="45720" rIns="91440" bIns="45720" rtlCol="0" anchor="b">
+            <a:normAutofit/>
+          </a:bodyPr>
+          <a:lstStyle>
+            <a:lvl1pPr>
+              <a:buNone/>
+              <a:defRPr lang="en-US" sz="2800" b="0" cap="none" dirty="0">
+                <a:ln w="3175" cmpd="sng">
+                  <a:noFill/>
+                </a:ln>
+                <a:solidFill>
+                  <a:schemeClr val="tx1"/>
+                </a:solidFill>
+                <a:effectLst/>
+              </a:defRPr>
+            </a:lvl1pPr>
+          </a:lstStyle>
+          <a:p>
+            <a:pPr marL="0" lvl="0">
+              <a:spcBef>
+                <a:spcPct val="0"/>
+              </a:spcBef>
+              <a:buNone/>
+            </a:pPr>
+            <a:r>
+              <a:rPr lang="en-US"/>
+              <a:t>Click to edit Master text styles</a:t>
+            </a:r>
+          </a:p>
+        </p:txBody>
+      </p:sp>
+      <p:sp>
+        <p:nvSpPr>
+          <p:cNvPr id="3" name="Text Placeholder 2"/>
+          <p:cNvSpPr>
+            <a:spLocks noGrp="1"/>
+          </p:cNvSpPr>
+          <p:nvPr>
+            <p:ph type="body" idx="1"/>
+          </p:nvPr>
+        </p:nvSpPr>
+        <p:spPr>
+          <a:xfrm>
+            <a:off x="1484311" y="4343400"/>
+            <a:ext cx="10018713" cy="1447800"/>
+          </a:xfrm>
+        </p:spPr>
+        <p:txBody>
+          <a:bodyPr anchor="t">
+            <a:normAutofit/>
+          </a:bodyPr>
+          <a:lstStyle>
+            <a:lvl1pPr marL="0" indent="0" algn="l">
+              <a:buNone/>
+              <a:defRPr sz="1800">
+                <a:solidFill>
+                  <a:schemeClr val="tx1"/>
+                </a:solidFill>
+              </a:defRPr>
+            </a:lvl1pPr>
+            <a:lvl2pPr marL="457200" indent="0">
+              <a:buNone/>
+              <a:defRPr sz="1800">
+                <a:solidFill>
+                  <a:schemeClr val="tx1">
+                    <a:tint val="75000"/>
+                  </a:schemeClr>
+                </a:solidFill>
+              </a:defRPr>
+            </a:lvl2pPr>
+            <a:lvl3pPr marL="914400" indent="0">
+              <a:buNone/>
+              <a:defRPr sz="1600">
+                <a:solidFill>
+                  <a:schemeClr val="tx1">
+                    <a:tint val="75000"/>
+                  </a:schemeClr>
+                </a:solidFill>
+              </a:defRPr>
+            </a:lvl3pPr>
+            <a:lvl4pPr marL="1371600" indent="0">
+              <a:buNone/>
+              <a:defRPr sz="1400">
+                <a:solidFill>
+                  <a:schemeClr val="tx1">
+                    <a:tint val="75000"/>
+                  </a:schemeClr>
+                </a:solidFill>
+              </a:defRPr>
+            </a:lvl4pPr>
+            <a:lvl5pPr marL="1828800" indent="0">
+              <a:buNone/>
+              <a:defRPr sz="1400">
+                <a:solidFill>
+                  <a:schemeClr val="tx1">
+                    <a:tint val="75000"/>
+                  </a:schemeClr>
+                </a:solidFill>
+              </a:defRPr>
+            </a:lvl5pPr>
+            <a:lvl6pPr marL="2286000" indent="0">
+              <a:buNone/>
+              <a:defRPr sz="1400">
+                <a:solidFill>
+                  <a:schemeClr val="tx1">
+                    <a:tint val="75000"/>
+                  </a:schemeClr>
+                </a:solidFill>
+              </a:defRPr>
+            </a:lvl6pPr>
+            <a:lvl7pPr marL="2743200" indent="0">
+              <a:buNone/>
+              <a:defRPr sz="1400">
+                <a:solidFill>
+                  <a:schemeClr val="tx1">
+                    <a:tint val="75000"/>
+                  </a:schemeClr>
+                </a:solidFill>
+              </a:defRPr>
+            </a:lvl7pPr>
+            <a:lvl8pPr marL="3200400" indent="0">
+              <a:buNone/>
+              <a:defRPr sz="1400">
+                <a:solidFill>
+                  <a:schemeClr val="tx1">
+                    <a:tint val="75000"/>
+                  </a:schemeClr>
+                </a:solidFill>
+              </a:defRPr>
+            </a:lvl8pPr>
+            <a:lvl9pPr marL="3657600" indent="0">
+              <a:buNone/>
+              <a:defRPr sz="1400">
+                <a:solidFill>
+                  <a:schemeClr val="tx1">
+                    <a:tint val="75000"/>
+                  </a:schemeClr>
+                </a:solidFill>
+              </a:defRPr>
+            </a:lvl9pPr>
+          </a:lstStyle>
+          <a:p>
+            <a:pPr lvl="0"/>
+            <a:r>
+              <a:rPr lang="en-US"/>
+              <a:t>Click to edit Master text styles</a:t>
+            </a:r>
+          </a:p>
+        </p:txBody>
+      </p:sp>
+      <p:sp>
+        <p:nvSpPr>
+          <p:cNvPr id="4" name="Date Placeholder 3"/>
+          <p:cNvSpPr>
+            <a:spLocks noGrp="1"/>
+          </p:cNvSpPr>
+          <p:nvPr>
+            <p:ph type="dt" sz="half" idx="10"/>
+          </p:nvPr>
+        </p:nvSpPr>
+        <p:spPr/>
+        <p:txBody>
+          <a:bodyPr/>
+          <a:lstStyle/>
+          <a:p>
+            <a:fld id="{1705C18A-ADD3-4375-A699-9F4488C0E00E}" type="datetimeFigureOut">
+              <a:rPr lang="en-US" smtClean="0"/>
+              <a:t>5/1/2026</a:t>
+            </a:fld>
+            <a:endParaRPr lang="en-US"/>
+          </a:p>
+        </p:txBody>
+      </p:sp>
+      <p:sp>
+        <p:nvSpPr>
+          <p:cNvPr id="5" name="Footer Placeholder 4"/>
+          <p:cNvSpPr>
+            <a:spLocks noGrp="1"/>
+          </p:cNvSpPr>
+          <p:nvPr>
+            <p:ph type="ftr" sz="quarter" idx="11"/>
+          </p:nvPr>
+        </p:nvSpPr>
+        <p:spPr/>
+        <p:txBody>
+          <a:bodyPr/>
+          <a:lstStyle/>
+          <a:p>
+            <a:endParaRPr lang="en-US"/>
+          </a:p>
+        </p:txBody>
+      </p:sp>
+      <p:sp>
+        <p:nvSpPr>
+          <p:cNvPr id="6" name="Slide Number Placeholder 5"/>
+          <p:cNvSpPr>
+            <a:spLocks noGrp="1"/>
+          </p:cNvSpPr>
+          <p:nvPr>
+            <p:ph type="sldNum" sz="quarter" idx="12"/>
+          </p:nvPr>
+        </p:nvSpPr>
+        <p:spPr/>
+        <p:txBody>
+          <a:bodyPr/>
+          <a:lstStyle/>
+          <a:p>
+            <a:fld id="{432135D0-4141-4185-A76B-8A0D017CF383}" type="slidenum">
+              <a:rPr lang="en-US" smtClean="0"/>
+              <a:t>‹#›</a:t>
+            </a:fld>
+            <a:endParaRPr lang="en-US"/>
+          </a:p>
+        </p:txBody>
+      </p:sp>
+    </p:spTree>
+    <p:extLst>
+      <p:ext uri="{BB962C8B-B14F-4D97-AF65-F5344CB8AC3E}">
+        <p14:creationId xmlns:p14="http://schemas.microsoft.com/office/powerpoint/2010/main" val="2108036395"/>
+      </p:ext>
+    </p:extLst>
+  </p:cSld>
+  <p:clrMapOvr>
+    <a:masterClrMapping/>
+  </p:clrMapOvr>
+</p:sldLayout>
+</file>
+
+<file path=ppt/slideLayouts/slideLayout16.xml><?xml version="1.0" encoding="utf-8"?>
 <p:sldLayout xmlns:a="http://schemas.openxmlformats.org/drawingml/2006/main" xmlns:r="http://schemas.openxmlformats.org/officeDocument/2006/relationships" xmlns:p="http://schemas.openxmlformats.org/presentationml/2006/main" type="vertTx" preserve="1">
   <p:cSld name="Title and Vertical Text">
     <p:spTree>
@@ -346,18 +2908,89 @@
       </p:grpSpPr>
       <p:sp>
         <p:nvSpPr>
-          <p:cNvPr id="2" name="Title 1">
-            <a:extLst>
-              <a:ext uri="{FF2B5EF4-FFF2-40B4-BE49-F238E27FC236}">
-                <a16:creationId xmlns:a16="http://schemas.microsoft.com/office/drawing/2014/main" id="{DE35C92D-4368-614C-DBE0-53AA1797938E}"/>
-              </a:ext>
-            </a:extLst>
-          </p:cNvPr>
+          <p:cNvPr id="2" name="Title 1"/>
           <p:cNvSpPr>
             <a:spLocks noGrp="1"/>
           </p:cNvSpPr>
           <p:nvPr>
             <p:ph type="title"/>
+          </p:nvPr>
+        </p:nvSpPr>
+        <p:spPr/>
+        <p:txBody>
+          <a:bodyPr/>
+          <a:lstStyle>
+            <a:lvl1pPr algn="ctr">
+              <a:defRPr/>
+            </a:lvl1pPr>
+          </a:lstStyle>
+          <a:p>
+            <a:r>
+              <a:rPr lang="en-US"/>
+              <a:t>Click to edit Master title style</a:t>
+            </a:r>
+          </a:p>
+        </p:txBody>
+      </p:sp>
+      <p:sp>
+        <p:nvSpPr>
+          <p:cNvPr id="3" name="Vertical Text Placeholder 2"/>
+          <p:cNvSpPr>
+            <a:spLocks noGrp="1"/>
+          </p:cNvSpPr>
+          <p:nvPr>
+            <p:ph type="body" orient="vert" idx="1"/>
+          </p:nvPr>
+        </p:nvSpPr>
+        <p:spPr/>
+        <p:txBody>
+          <a:bodyPr vert="eaVert" anchor="t"/>
+          <a:lstStyle/>
+          <a:p>
+            <a:pPr lvl="0"/>
+            <a:r>
+              <a:rPr lang="en-US"/>
+              <a:t>Click to edit Master text styles</a:t>
+            </a:r>
+          </a:p>
+          <a:p>
+            <a:pPr lvl="1"/>
+            <a:r>
+              <a:rPr lang="en-US"/>
+              <a:t>Second level</a:t>
+            </a:r>
+          </a:p>
+          <a:p>
+            <a:pPr lvl="2"/>
+            <a:r>
+              <a:rPr lang="en-US"/>
+              <a:t>Third level</a:t>
+            </a:r>
+          </a:p>
+          <a:p>
+            <a:pPr lvl="3"/>
+            <a:r>
+              <a:rPr lang="en-US"/>
+              <a:t>Fourth level</a:t>
+            </a:r>
+          </a:p>
+          <a:p>
+            <a:pPr lvl="4"/>
+            <a:r>
+              <a:rPr lang="en-US"/>
+              <a:t>Fifth level</a:t>
+            </a:r>
+          </a:p>
+        </p:txBody>
+      </p:sp>
+      <p:sp>
+        <p:nvSpPr>
+          <p:cNvPr id="4" name="Date Placeholder 3"/>
+          <p:cNvSpPr>
+            <a:spLocks noGrp="1"/>
+          </p:cNvSpPr>
+          <p:nvPr>
+            <p:ph type="dt" sz="half" idx="10"/>
           </p:nvPr>
         </p:nvSpPr>
         <p:spPr/>
@@ -365,84 +2998,22 @@
           <a:bodyPr/>
           <a:lstStyle/>
           <a:p>
-            <a:r>
-              <a:rPr lang="en-US"/>
-              <a:t>Click to edit Master title style</a:t>
-            </a:r>
-          </a:p>
-        </p:txBody>
-      </p:sp>
-      <p:sp>
-        <p:nvSpPr>
-          <p:cNvPr id="3" name="Vertical Text Placeholder 2">
-            <a:extLst>
-              <a:ext uri="{FF2B5EF4-FFF2-40B4-BE49-F238E27FC236}">
-                <a16:creationId xmlns:a16="http://schemas.microsoft.com/office/drawing/2014/main" id="{90A5BD9A-E858-F76C-4E4E-CB6716BFC316}"/>
-              </a:ext>
-            </a:extLst>
-          </p:cNvPr>
-          <p:cNvSpPr>
-            <a:spLocks noGrp="1"/>
-          </p:cNvSpPr>
-          <p:nvPr>
-            <p:ph type="body" orient="vert" idx="1"/>
-          </p:nvPr>
-        </p:nvSpPr>
-        <p:spPr/>
-        <p:txBody>
-          <a:bodyPr vert="eaVert"/>
-          <a:lstStyle/>
-          <a:p>
-            <a:pPr lvl="0"/>
-            <a:r>
-              <a:rPr lang="en-US"/>
-              <a:t>Click to edit Master text styles</a:t>
-            </a:r>
-          </a:p>
-          <a:p>
-            <a:pPr lvl="1"/>
-            <a:r>
-              <a:rPr lang="en-US"/>
-              <a:t>Second level</a:t>
-            </a:r>
-          </a:p>
-          <a:p>
-            <a:pPr lvl="2"/>
-            <a:r>
-              <a:rPr lang="en-US"/>
-              <a:t>Third level</a:t>
-            </a:r>
-          </a:p>
-          <a:p>
-            <a:pPr lvl="3"/>
-            <a:r>
-              <a:rPr lang="en-US"/>
-              <a:t>Fourth level</a:t>
-            </a:r>
-          </a:p>
-          <a:p>
-            <a:pPr lvl="4"/>
-            <a:r>
-              <a:rPr lang="en-US"/>
-              <a:t>Fifth level</a:t>
-            </a:r>
-          </a:p>
-        </p:txBody>
-      </p:sp>
-      <p:sp>
-        <p:nvSpPr>
-          <p:cNvPr id="4" name="Date Placeholder 3">
-            <a:extLst>
-              <a:ext uri="{FF2B5EF4-FFF2-40B4-BE49-F238E27FC236}">
-                <a16:creationId xmlns:a16="http://schemas.microsoft.com/office/drawing/2014/main" id="{8F760A63-CFC5-D965-E3F5-17B1E11A8A41}"/>
-              </a:ext>
-            </a:extLst>
-          </p:cNvPr>
-          <p:cNvSpPr>
-            <a:spLocks noGrp="1"/>
-          </p:cNvSpPr>
-          <p:nvPr>
-            <p:ph type="dt" sz="half" idx="10"/>
+            <a:fld id="{1705C18A-ADD3-4375-A699-9F4488C0E00E}" type="datetimeFigureOut">
+              <a:rPr lang="en-US" smtClean="0"/>
+              <a:t>5/1/2026</a:t>
+            </a:fld>
+            <a:endParaRPr lang="en-US"/>
+          </a:p>
+        </p:txBody>
+      </p:sp>
+      <p:sp>
+        <p:nvSpPr>
+          <p:cNvPr id="5" name="Footer Placeholder 4"/>
+          <p:cNvSpPr>
+            <a:spLocks noGrp="1"/>
+          </p:cNvSpPr>
+          <p:nvPr>
+            <p:ph type="ftr" sz="quarter" idx="11"/>
           </p:nvPr>
         </p:nvSpPr>
         <p:spPr/>
@@ -450,48 +3021,13 @@
           <a:bodyPr/>
           <a:lstStyle/>
           <a:p>
-            <a:fld id="{1705C18A-ADD3-4375-A699-9F4488C0E00E}" type="datetimeFigureOut">
-              <a:rPr lang="en-US" smtClean="0"/>
-              <a:t>4/26/2026</a:t>
-            </a:fld>
             <a:endParaRPr lang="en-US"/>
           </a:p>
         </p:txBody>
       </p:sp>
       <p:sp>
         <p:nvSpPr>
-          <p:cNvPr id="5" name="Footer Placeholder 4">
-            <a:extLst>
-              <a:ext uri="{FF2B5EF4-FFF2-40B4-BE49-F238E27FC236}">
-                <a16:creationId xmlns:a16="http://schemas.microsoft.com/office/drawing/2014/main" id="{68D60DB7-F814-9B38-8ED8-27625E06DC42}"/>
-              </a:ext>
-            </a:extLst>
-          </p:cNvPr>
-          <p:cNvSpPr>
-            <a:spLocks noGrp="1"/>
-          </p:cNvSpPr>
-          <p:nvPr>
-            <p:ph type="ftr" sz="quarter" idx="11"/>
-          </p:nvPr>
-        </p:nvSpPr>
-        <p:spPr/>
-        <p:txBody>
-          <a:bodyPr/>
-          <a:lstStyle/>
-          <a:p>
-            <a:endParaRPr lang="en-US"/>
-          </a:p>
-        </p:txBody>
-      </p:sp>
-      <p:sp>
-        <p:nvSpPr>
-          <p:cNvPr id="6" name="Slide Number Placeholder 5">
-            <a:extLst>
-              <a:ext uri="{FF2B5EF4-FFF2-40B4-BE49-F238E27FC236}">
-                <a16:creationId xmlns:a16="http://schemas.microsoft.com/office/drawing/2014/main" id="{081F8D1F-F3EC-B427-E102-E2276DACE5F6}"/>
-              </a:ext>
-            </a:extLst>
-          </p:cNvPr>
+          <p:cNvPr id="6" name="Slide Number Placeholder 5"/>
           <p:cNvSpPr>
             <a:spLocks noGrp="1"/>
           </p:cNvSpPr>
@@ -515,7 +3051,7 @@
     </p:spTree>
     <p:extLst>
       <p:ext uri="{BB962C8B-B14F-4D97-AF65-F5344CB8AC3E}">
-        <p14:creationId xmlns:p14="http://schemas.microsoft.com/office/powerpoint/2010/main" val="2764242998"/>
+        <p14:creationId xmlns:p14="http://schemas.microsoft.com/office/powerpoint/2010/main" val="3889856110"/>
       </p:ext>
     </p:extLst>
   </p:cSld>
@@ -525,7 +3061,7 @@
 </p:sldLayout>
 </file>
 
-<file path=ppt/slideLayouts/slideLayout11.xml><?xml version="1.0" encoding="utf-8"?>
+<file path=ppt/slideLayouts/slideLayout17.xml><?xml version="1.0" encoding="utf-8"?>
 <p:sldLayout xmlns:a="http://schemas.openxmlformats.org/drawingml/2006/main" xmlns:r="http://schemas.openxmlformats.org/officeDocument/2006/relationships" xmlns:p="http://schemas.openxmlformats.org/presentationml/2006/main" type="vertTitleAndTx" preserve="1">
   <p:cSld name="Vertical Title and Text">
     <p:spTree>
@@ -544,13 +3080,7 @@
       </p:grpSpPr>
       <p:sp>
         <p:nvSpPr>
-          <p:cNvPr id="2" name="Vertical Title 1">
-            <a:extLst>
-              <a:ext uri="{FF2B5EF4-FFF2-40B4-BE49-F238E27FC236}">
-                <a16:creationId xmlns:a16="http://schemas.microsoft.com/office/drawing/2014/main" id="{3904F384-1C16-B83B-F85A-FE0A1C6C6492}"/>
-              </a:ext>
-            </a:extLst>
-          </p:cNvPr>
+          <p:cNvPr id="2" name="Vertical Title 1"/>
           <p:cNvSpPr>
             <a:spLocks noGrp="1"/>
           </p:cNvSpPr>
@@ -560,8 +3090,8 @@
         </p:nvSpPr>
         <p:spPr>
           <a:xfrm>
-            <a:off x="8724900" y="365125"/>
-            <a:ext cx="2628900" cy="5811838"/>
+            <a:off x="9732655" y="685800"/>
+            <a:ext cx="1770369" cy="5105400"/>
           </a:xfrm>
         </p:spPr>
         <p:txBody>
@@ -577,13 +3107,7 @@
       </p:sp>
       <p:sp>
         <p:nvSpPr>
-          <p:cNvPr id="3" name="Vertical Text Placeholder 2">
-            <a:extLst>
-              <a:ext uri="{FF2B5EF4-FFF2-40B4-BE49-F238E27FC236}">
-                <a16:creationId xmlns:a16="http://schemas.microsoft.com/office/drawing/2014/main" id="{3CBF9137-7275-0F75-24FB-C1FE2D6CEA4D}"/>
-              </a:ext>
-            </a:extLst>
-          </p:cNvPr>
+          <p:cNvPr id="3" name="Vertical Text Placeholder 2"/>
           <p:cNvSpPr>
             <a:spLocks noGrp="1"/>
           </p:cNvSpPr>
@@ -593,12 +3117,12 @@
         </p:nvSpPr>
         <p:spPr>
           <a:xfrm>
-            <a:off x="838200" y="365125"/>
-            <a:ext cx="7734300" cy="5811838"/>
+            <a:off x="1484312" y="685800"/>
+            <a:ext cx="8019742" cy="5105400"/>
           </a:xfrm>
         </p:spPr>
         <p:txBody>
-          <a:bodyPr vert="eaVert"/>
+          <a:bodyPr vert="eaVert" anchor="t"/>
           <a:lstStyle/>
           <a:p>
             <a:pPr lvl="0"/>
@@ -639,13 +3163,7 @@
       </p:sp>
       <p:sp>
         <p:nvSpPr>
-          <p:cNvPr id="4" name="Date Placeholder 3">
-            <a:extLst>
-              <a:ext uri="{FF2B5EF4-FFF2-40B4-BE49-F238E27FC236}">
-                <a16:creationId xmlns:a16="http://schemas.microsoft.com/office/drawing/2014/main" id="{3E5DF708-B631-C067-601C-CEF697397E56}"/>
-              </a:ext>
-            </a:extLst>
-          </p:cNvPr>
+          <p:cNvPr id="4" name="Date Placeholder 3"/>
           <p:cNvSpPr>
             <a:spLocks noGrp="1"/>
           </p:cNvSpPr>
@@ -660,7 +3178,7 @@
           <a:p>
             <a:fld id="{1705C18A-ADD3-4375-A699-9F4488C0E00E}" type="datetimeFigureOut">
               <a:rPr lang="en-US" smtClean="0"/>
-              <a:t>4/26/2026</a:t>
+              <a:t>5/1/2026</a:t>
             </a:fld>
             <a:endParaRPr lang="en-US"/>
           </a:p>
@@ -668,13 +3186,7 @@
       </p:sp>
       <p:sp>
         <p:nvSpPr>
-          <p:cNvPr id="5" name="Footer Placeholder 4">
-            <a:extLst>
-              <a:ext uri="{FF2B5EF4-FFF2-40B4-BE49-F238E27FC236}">
-                <a16:creationId xmlns:a16="http://schemas.microsoft.com/office/drawing/2014/main" id="{C13C6F86-6C67-32EF-72C3-47AB805C09C6}"/>
-              </a:ext>
-            </a:extLst>
-          </p:cNvPr>
+          <p:cNvPr id="5" name="Footer Placeholder 4"/>
           <p:cNvSpPr>
             <a:spLocks noGrp="1"/>
           </p:cNvSpPr>
@@ -693,13 +3205,7 @@
       </p:sp>
       <p:sp>
         <p:nvSpPr>
-          <p:cNvPr id="6" name="Slide Number Placeholder 5">
-            <a:extLst>
-              <a:ext uri="{FF2B5EF4-FFF2-40B4-BE49-F238E27FC236}">
-                <a16:creationId xmlns:a16="http://schemas.microsoft.com/office/drawing/2014/main" id="{D48F09A6-4407-3FE4-69E8-61AFB05F7B9C}"/>
-              </a:ext>
-            </a:extLst>
-          </p:cNvPr>
+          <p:cNvPr id="6" name="Slide Number Placeholder 5"/>
           <p:cNvSpPr>
             <a:spLocks noGrp="1"/>
           </p:cNvSpPr>
@@ -723,7 +3229,7 @@
     </p:spTree>
     <p:extLst>
       <p:ext uri="{BB962C8B-B14F-4D97-AF65-F5344CB8AC3E}">
-        <p14:creationId xmlns:p14="http://schemas.microsoft.com/office/powerpoint/2010/main" val="2405847726"/>
+        <p14:creationId xmlns:p14="http://schemas.microsoft.com/office/powerpoint/2010/main" val="717263621"/>
       </p:ext>
     </p:extLst>
   </p:cSld>
@@ -752,13 +3258,7 @@
       </p:grpSpPr>
       <p:sp>
         <p:nvSpPr>
-          <p:cNvPr id="2" name="Title 1">
-            <a:extLst>
-              <a:ext uri="{FF2B5EF4-FFF2-40B4-BE49-F238E27FC236}">
-                <a16:creationId xmlns:a16="http://schemas.microsoft.com/office/drawing/2014/main" id="{DDC44937-47F5-025A-EC32-8EB38BAE9DF9}"/>
-              </a:ext>
-            </a:extLst>
-          </p:cNvPr>
+          <p:cNvPr id="2" name="Title 1"/>
           <p:cNvSpPr>
             <a:spLocks noGrp="1"/>
           </p:cNvSpPr>
@@ -780,18 +3280,63 @@
       </p:sp>
       <p:sp>
         <p:nvSpPr>
-          <p:cNvPr id="3" name="Content Placeholder 2">
-            <a:extLst>
-              <a:ext uri="{FF2B5EF4-FFF2-40B4-BE49-F238E27FC236}">
-                <a16:creationId xmlns:a16="http://schemas.microsoft.com/office/drawing/2014/main" id="{7FCF1F67-381D-B201-A4A1-CE6356CF4781}"/>
-              </a:ext>
-            </a:extLst>
-          </p:cNvPr>
+          <p:cNvPr id="3" name="Content Placeholder 2"/>
           <p:cNvSpPr>
             <a:spLocks noGrp="1"/>
           </p:cNvSpPr>
           <p:nvPr>
             <p:ph idx="1"/>
+          </p:nvPr>
+        </p:nvSpPr>
+        <p:spPr/>
+        <p:txBody>
+          <a:bodyPr anchor="ctr"/>
+          <a:lstStyle/>
+          <a:p>
+            <a:pPr lvl="0"/>
+            <a:r>
+              <a:rPr lang="en-US"/>
+              <a:t>Click to edit Master text styles</a:t>
+            </a:r>
+          </a:p>
+          <a:p>
+            <a:pPr lvl="1"/>
+            <a:r>
+              <a:rPr lang="en-US"/>
+              <a:t>Second level</a:t>
+            </a:r>
+          </a:p>
+          <a:p>
+            <a:pPr lvl="2"/>
+            <a:r>
+              <a:rPr lang="en-US"/>
+              <a:t>Third level</a:t>
+            </a:r>
+          </a:p>
+          <a:p>
+            <a:pPr lvl="3"/>
+            <a:r>
+              <a:rPr lang="en-US"/>
+              <a:t>Fourth level</a:t>
+            </a:r>
+          </a:p>
+          <a:p>
+            <a:pPr lvl="4"/>
+            <a:r>
+              <a:rPr lang="en-US"/>
+              <a:t>Fifth level</a:t>
+            </a:r>
+          </a:p>
+        </p:txBody>
+      </p:sp>
+      <p:sp>
+        <p:nvSpPr>
+          <p:cNvPr id="4" name="Date Placeholder 3"/>
+          <p:cNvSpPr>
+            <a:spLocks noGrp="1"/>
+          </p:cNvSpPr>
+          <p:nvPr>
+            <p:ph type="dt" sz="half" idx="10"/>
           </p:nvPr>
         </p:nvSpPr>
         <p:spPr/>
@@ -799,56 +3344,22 @@
           <a:bodyPr/>
           <a:lstStyle/>
           <a:p>
-            <a:pPr lvl="0"/>
-            <a:r>
-              <a:rPr lang="en-US"/>
-              <a:t>Click to edit Master text styles</a:t>
-            </a:r>
-          </a:p>
-          <a:p>
-            <a:pPr lvl="1"/>
-            <a:r>
-              <a:rPr lang="en-US"/>
-              <a:t>Second level</a:t>
-            </a:r>
-          </a:p>
-          <a:p>
-            <a:pPr lvl="2"/>
-            <a:r>
-              <a:rPr lang="en-US"/>
-              <a:t>Third level</a:t>
-            </a:r>
-          </a:p>
-          <a:p>
-            <a:pPr lvl="3"/>
-            <a:r>
-              <a:rPr lang="en-US"/>
-              <a:t>Fourth level</a:t>
-            </a:r>
-          </a:p>
-          <a:p>
-            <a:pPr lvl="4"/>
-            <a:r>
-              <a:rPr lang="en-US"/>
-              <a:t>Fifth level</a:t>
-            </a:r>
-          </a:p>
-        </p:txBody>
-      </p:sp>
-      <p:sp>
-        <p:nvSpPr>
-          <p:cNvPr id="4" name="Date Placeholder 3">
-            <a:extLst>
-              <a:ext uri="{FF2B5EF4-FFF2-40B4-BE49-F238E27FC236}">
-                <a16:creationId xmlns:a16="http://schemas.microsoft.com/office/drawing/2014/main" id="{B0C63109-5C8E-6189-7D2B-53F52660C10A}"/>
-              </a:ext>
-            </a:extLst>
-          </p:cNvPr>
-          <p:cNvSpPr>
-            <a:spLocks noGrp="1"/>
-          </p:cNvSpPr>
-          <p:nvPr>
-            <p:ph type="dt" sz="half" idx="10"/>
+            <a:fld id="{1705C18A-ADD3-4375-A699-9F4488C0E00E}" type="datetimeFigureOut">
+              <a:rPr lang="en-US" smtClean="0"/>
+              <a:t>5/1/2026</a:t>
+            </a:fld>
+            <a:endParaRPr lang="en-US"/>
+          </a:p>
+        </p:txBody>
+      </p:sp>
+      <p:sp>
+        <p:nvSpPr>
+          <p:cNvPr id="5" name="Footer Placeholder 4"/>
+          <p:cNvSpPr>
+            <a:spLocks noGrp="1"/>
+          </p:cNvSpPr>
+          <p:nvPr>
+            <p:ph type="ftr" sz="quarter" idx="11"/>
           </p:nvPr>
         </p:nvSpPr>
         <p:spPr/>
@@ -856,48 +3367,13 @@
           <a:bodyPr/>
           <a:lstStyle/>
           <a:p>
-            <a:fld id="{1705C18A-ADD3-4375-A699-9F4488C0E00E}" type="datetimeFigureOut">
-              <a:rPr lang="en-US" smtClean="0"/>
-              <a:t>4/26/2026</a:t>
-            </a:fld>
             <a:endParaRPr lang="en-US"/>
           </a:p>
         </p:txBody>
       </p:sp>
       <p:sp>
         <p:nvSpPr>
-          <p:cNvPr id="5" name="Footer Placeholder 4">
-            <a:extLst>
-              <a:ext uri="{FF2B5EF4-FFF2-40B4-BE49-F238E27FC236}">
-                <a16:creationId xmlns:a16="http://schemas.microsoft.com/office/drawing/2014/main" id="{14CA06BC-9307-46B8-222B-1396C03E4601}"/>
-              </a:ext>
-            </a:extLst>
-          </p:cNvPr>
-          <p:cNvSpPr>
-            <a:spLocks noGrp="1"/>
-          </p:cNvSpPr>
-          <p:nvPr>
-            <p:ph type="ftr" sz="quarter" idx="11"/>
-          </p:nvPr>
-        </p:nvSpPr>
-        <p:spPr/>
-        <p:txBody>
-          <a:bodyPr/>
-          <a:lstStyle/>
-          <a:p>
-            <a:endParaRPr lang="en-US"/>
-          </a:p>
-        </p:txBody>
-      </p:sp>
-      <p:sp>
-        <p:nvSpPr>
-          <p:cNvPr id="6" name="Slide Number Placeholder 5">
-            <a:extLst>
-              <a:ext uri="{FF2B5EF4-FFF2-40B4-BE49-F238E27FC236}">
-                <a16:creationId xmlns:a16="http://schemas.microsoft.com/office/drawing/2014/main" id="{ED9C48B6-F0DE-52C9-DABA-D84E400D33BB}"/>
-              </a:ext>
-            </a:extLst>
-          </p:cNvPr>
+          <p:cNvPr id="6" name="Slide Number Placeholder 5"/>
           <p:cNvSpPr>
             <a:spLocks noGrp="1"/>
           </p:cNvSpPr>
@@ -905,7 +3381,12 @@
             <p:ph type="sldNum" sz="quarter" idx="12"/>
           </p:nvPr>
         </p:nvSpPr>
-        <p:spPr/>
+        <p:spPr>
+          <a:xfrm>
+            <a:off x="10951856" y="5867131"/>
+            <a:ext cx="551167" cy="365125"/>
+          </a:xfrm>
+        </p:spPr>
         <p:txBody>
           <a:bodyPr/>
           <a:lstStyle/>
@@ -921,7 +3402,7 @@
     </p:spTree>
     <p:extLst>
       <p:ext uri="{BB962C8B-B14F-4D97-AF65-F5344CB8AC3E}">
-        <p14:creationId xmlns:p14="http://schemas.microsoft.com/office/powerpoint/2010/main" val="3653093327"/>
+        <p14:creationId xmlns:p14="http://schemas.microsoft.com/office/powerpoint/2010/main" val="1980945947"/>
       </p:ext>
     </p:extLst>
   </p:cSld>
@@ -950,13 +3431,7 @@
       </p:grpSpPr>
       <p:sp>
         <p:nvSpPr>
-          <p:cNvPr id="2" name="Title 1">
-            <a:extLst>
-              <a:ext uri="{FF2B5EF4-FFF2-40B4-BE49-F238E27FC236}">
-                <a16:creationId xmlns:a16="http://schemas.microsoft.com/office/drawing/2014/main" id="{29F21D96-1871-60C7-0712-58D95DC15E83}"/>
-              </a:ext>
-            </a:extLst>
-          </p:cNvPr>
+          <p:cNvPr id="2" name="Title 1"/>
           <p:cNvSpPr>
             <a:spLocks noGrp="1"/>
           </p:cNvSpPr>
@@ -966,15 +3441,15 @@
         </p:nvSpPr>
         <p:spPr>
           <a:xfrm>
-            <a:off x="831850" y="1709738"/>
-            <a:ext cx="10515600" cy="2852737"/>
+            <a:off x="2572279" y="2666999"/>
+            <a:ext cx="8930747" cy="2110382"/>
           </a:xfrm>
         </p:spPr>
         <p:txBody>
           <a:bodyPr anchor="b"/>
           <a:lstStyle>
-            <a:lvl1pPr>
-              <a:defRPr sz="6000"/>
+            <a:lvl1pPr algn="r">
+              <a:defRPr sz="4000" b="0" cap="none"/>
             </a:lvl1pPr>
           </a:lstStyle>
           <a:p>
@@ -987,13 +3462,7 @@
       </p:sp>
       <p:sp>
         <p:nvSpPr>
-          <p:cNvPr id="3" name="Text Placeholder 2">
-            <a:extLst>
-              <a:ext uri="{FF2B5EF4-FFF2-40B4-BE49-F238E27FC236}">
-                <a16:creationId xmlns:a16="http://schemas.microsoft.com/office/drawing/2014/main" id="{23C6DD13-2038-74C5-57DC-16D8AB2D7179}"/>
-              </a:ext>
-            </a:extLst>
-          </p:cNvPr>
+          <p:cNvPr id="3" name="Text Placeholder 2"/>
           <p:cNvSpPr>
             <a:spLocks noGrp="1"/>
           </p:cNvSpPr>
@@ -1003,99 +3472,99 @@
         </p:nvSpPr>
         <p:spPr>
           <a:xfrm>
-            <a:off x="831850" y="4589463"/>
-            <a:ext cx="10515600" cy="1500187"/>
+            <a:off x="2572278" y="4777381"/>
+            <a:ext cx="8930748" cy="860400"/>
           </a:xfrm>
         </p:spPr>
         <p:txBody>
-          <a:bodyPr/>
+          <a:bodyPr anchor="t">
+            <a:normAutofit/>
+          </a:bodyPr>
           <a:lstStyle>
-            <a:lvl1pPr marL="0" indent="0">
-              <a:buNone/>
-              <a:defRPr sz="2400">
-                <a:solidFill>
-                  <a:schemeClr val="tx1">
-                    <a:tint val="82000"/>
-                  </a:schemeClr>
+            <a:lvl1pPr marL="0" indent="0" algn="r">
+              <a:buNone/>
+              <a:defRPr sz="2000">
+                <a:solidFill>
+                  <a:schemeClr val="tx1"/>
                 </a:solidFill>
               </a:defRPr>
             </a:lvl1pPr>
             <a:lvl2pPr marL="457200" indent="0">
               <a:buNone/>
-              <a:defRPr sz="2000">
+              <a:defRPr sz="1800">
                 <a:solidFill>
                   <a:schemeClr val="tx1">
-                    <a:tint val="82000"/>
+                    <a:tint val="75000"/>
                   </a:schemeClr>
                 </a:solidFill>
               </a:defRPr>
             </a:lvl2pPr>
             <a:lvl3pPr marL="914400" indent="0">
               <a:buNone/>
-              <a:defRPr sz="1800">
+              <a:defRPr sz="1600">
                 <a:solidFill>
                   <a:schemeClr val="tx1">
-                    <a:tint val="82000"/>
+                    <a:tint val="75000"/>
                   </a:schemeClr>
                 </a:solidFill>
               </a:defRPr>
             </a:lvl3pPr>
             <a:lvl4pPr marL="1371600" indent="0">
               <a:buNone/>
-              <a:defRPr sz="1600">
+              <a:defRPr sz="1400">
                 <a:solidFill>
                   <a:schemeClr val="tx1">
-                    <a:tint val="82000"/>
+                    <a:tint val="75000"/>
                   </a:schemeClr>
                 </a:solidFill>
               </a:defRPr>
             </a:lvl4pPr>
             <a:lvl5pPr marL="1828800" indent="0">
               <a:buNone/>
-              <a:defRPr sz="1600">
+              <a:defRPr sz="1400">
                 <a:solidFill>
                   <a:schemeClr val="tx1">
-                    <a:tint val="82000"/>
+                    <a:tint val="75000"/>
                   </a:schemeClr>
                 </a:solidFill>
               </a:defRPr>
             </a:lvl5pPr>
             <a:lvl6pPr marL="2286000" indent="0">
               <a:buNone/>
-              <a:defRPr sz="1600">
+              <a:defRPr sz="1400">
                 <a:solidFill>
                   <a:schemeClr val="tx1">
-                    <a:tint val="82000"/>
+                    <a:tint val="75000"/>
                   </a:schemeClr>
                 </a:solidFill>
               </a:defRPr>
             </a:lvl6pPr>
             <a:lvl7pPr marL="2743200" indent="0">
               <a:buNone/>
-              <a:defRPr sz="1600">
+              <a:defRPr sz="1400">
                 <a:solidFill>
                   <a:schemeClr val="tx1">
-                    <a:tint val="82000"/>
+                    <a:tint val="75000"/>
                   </a:schemeClr>
                 </a:solidFill>
               </a:defRPr>
             </a:lvl7pPr>
             <a:lvl8pPr marL="3200400" indent="0">
               <a:buNone/>
-              <a:defRPr sz="1600">
+              <a:defRPr sz="1400">
                 <a:solidFill>
                   <a:schemeClr val="tx1">
-                    <a:tint val="82000"/>
+                    <a:tint val="75000"/>
                   </a:schemeClr>
                 </a:solidFill>
               </a:defRPr>
             </a:lvl8pPr>
             <a:lvl9pPr marL="3657600" indent="0">
               <a:buNone/>
-              <a:defRPr sz="1600">
+              <a:defRPr sz="1400">
                 <a:solidFill>
                   <a:schemeClr val="tx1">
-                    <a:tint val="82000"/>
+                    <a:tint val="75000"/>
                   </a:schemeClr>
                 </a:solidFill>
               </a:defRPr>
@@ -1112,13 +3581,7 @@
       </p:sp>
       <p:sp>
         <p:nvSpPr>
-          <p:cNvPr id="4" name="Date Placeholder 3">
-            <a:extLst>
-              <a:ext uri="{FF2B5EF4-FFF2-40B4-BE49-F238E27FC236}">
-                <a16:creationId xmlns:a16="http://schemas.microsoft.com/office/drawing/2014/main" id="{F43F3602-1589-FD3F-F0CC-B471781D37CA}"/>
-              </a:ext>
-            </a:extLst>
-          </p:cNvPr>
+          <p:cNvPr id="4" name="Date Placeholder 3"/>
           <p:cNvSpPr>
             <a:spLocks noGrp="1"/>
           </p:cNvSpPr>
@@ -1133,7 +3596,7 @@
           <a:p>
             <a:fld id="{1705C18A-ADD3-4375-A699-9F4488C0E00E}" type="datetimeFigureOut">
               <a:rPr lang="en-US" smtClean="0"/>
-              <a:t>4/26/2026</a:t>
+              <a:t>5/1/2026</a:t>
             </a:fld>
             <a:endParaRPr lang="en-US"/>
           </a:p>
@@ -1141,13 +3604,7 @@
       </p:sp>
       <p:sp>
         <p:nvSpPr>
-          <p:cNvPr id="5" name="Footer Placeholder 4">
-            <a:extLst>
-              <a:ext uri="{FF2B5EF4-FFF2-40B4-BE49-F238E27FC236}">
-                <a16:creationId xmlns:a16="http://schemas.microsoft.com/office/drawing/2014/main" id="{A69584AE-291D-B33E-F987-59E65C551EA1}"/>
-              </a:ext>
-            </a:extLst>
-          </p:cNvPr>
+          <p:cNvPr id="5" name="Footer Placeholder 4"/>
           <p:cNvSpPr>
             <a:spLocks noGrp="1"/>
           </p:cNvSpPr>
@@ -1166,13 +3623,7 @@
       </p:sp>
       <p:sp>
         <p:nvSpPr>
-          <p:cNvPr id="6" name="Slide Number Placeholder 5">
-            <a:extLst>
-              <a:ext uri="{FF2B5EF4-FFF2-40B4-BE49-F238E27FC236}">
-                <a16:creationId xmlns:a16="http://schemas.microsoft.com/office/drawing/2014/main" id="{60A372D9-D0A2-45D3-30B6-375258A6E59E}"/>
-              </a:ext>
-            </a:extLst>
-          </p:cNvPr>
+          <p:cNvPr id="6" name="Slide Number Placeholder 5"/>
           <p:cNvSpPr>
             <a:spLocks noGrp="1"/>
           </p:cNvSpPr>
@@ -1196,7 +3647,7 @@
     </p:spTree>
     <p:extLst>
       <p:ext uri="{BB962C8B-B14F-4D97-AF65-F5344CB8AC3E}">
-        <p14:creationId xmlns:p14="http://schemas.microsoft.com/office/powerpoint/2010/main" val="3506752206"/>
+        <p14:creationId xmlns:p14="http://schemas.microsoft.com/office/powerpoint/2010/main" val="1207435187"/>
       </p:ext>
     </p:extLst>
   </p:cSld>
@@ -1225,13 +3676,7 @@
       </p:grpSpPr>
       <p:sp>
         <p:nvSpPr>
-          <p:cNvPr id="2" name="Title 1">
-            <a:extLst>
-              <a:ext uri="{FF2B5EF4-FFF2-40B4-BE49-F238E27FC236}">
-                <a16:creationId xmlns:a16="http://schemas.microsoft.com/office/drawing/2014/main" id="{931CE5ED-0F1E-F96E-8EA1-0DFAD1B35806}"/>
-              </a:ext>
-            </a:extLst>
-          </p:cNvPr>
+          <p:cNvPr id="2" name="Title 1"/>
           <p:cNvSpPr>
             <a:spLocks noGrp="1"/>
           </p:cNvSpPr>
@@ -1239,7 +3684,12 @@
             <p:ph type="title"/>
           </p:nvPr>
         </p:nvSpPr>
-        <p:spPr/>
+        <p:spPr>
+          <a:xfrm>
+            <a:off x="1484311" y="685800"/>
+            <a:ext cx="10018713" cy="1752599"/>
+          </a:xfrm>
+        </p:spPr>
         <p:txBody>
           <a:bodyPr/>
           <a:lstStyle/>
@@ -1253,13 +3703,7 @@
       </p:sp>
       <p:sp>
         <p:nvSpPr>
-          <p:cNvPr id="3" name="Content Placeholder 2">
-            <a:extLst>
-              <a:ext uri="{FF2B5EF4-FFF2-40B4-BE49-F238E27FC236}">
-                <a16:creationId xmlns:a16="http://schemas.microsoft.com/office/drawing/2014/main" id="{97F54577-143A-6A6A-D324-245B729D1414}"/>
-              </a:ext>
-            </a:extLst>
-          </p:cNvPr>
+          <p:cNvPr id="3" name="Content Placeholder 2"/>
           <p:cNvSpPr>
             <a:spLocks noGrp="1"/>
           </p:cNvSpPr>
@@ -1269,175 +3713,211 @@
         </p:nvSpPr>
         <p:spPr>
           <a:xfrm>
-            <a:off x="838200" y="1825625"/>
-            <a:ext cx="5181600" cy="4351338"/>
+            <a:off x="1484312" y="2666999"/>
+            <a:ext cx="4895055" cy="3124201"/>
           </a:xfrm>
         </p:spPr>
         <p:txBody>
+          <a:bodyPr>
+            <a:normAutofit/>
+          </a:bodyPr>
+          <a:lstStyle>
+            <a:lvl1pPr>
+              <a:defRPr sz="1800"/>
+            </a:lvl1pPr>
+            <a:lvl2pPr>
+              <a:defRPr sz="1600"/>
+            </a:lvl2pPr>
+            <a:lvl3pPr>
+              <a:defRPr sz="1400"/>
+            </a:lvl3pPr>
+            <a:lvl4pPr>
+              <a:defRPr sz="1200"/>
+            </a:lvl4pPr>
+            <a:lvl5pPr>
+              <a:defRPr sz="1200"/>
+            </a:lvl5pPr>
+            <a:lvl6pPr>
+              <a:defRPr sz="1200"/>
+            </a:lvl6pPr>
+            <a:lvl7pPr>
+              <a:defRPr sz="1200"/>
+            </a:lvl7pPr>
+            <a:lvl8pPr>
+              <a:defRPr sz="1200"/>
+            </a:lvl8pPr>
+            <a:lvl9pPr>
+              <a:defRPr sz="1200"/>
+            </a:lvl9pPr>
+          </a:lstStyle>
+          <a:p>
+            <a:pPr lvl="0"/>
+            <a:r>
+              <a:rPr lang="en-US"/>
+              <a:t>Click to edit Master text styles</a:t>
+            </a:r>
+          </a:p>
+          <a:p>
+            <a:pPr lvl="1"/>
+            <a:r>
+              <a:rPr lang="en-US"/>
+              <a:t>Second level</a:t>
+            </a:r>
+          </a:p>
+          <a:p>
+            <a:pPr lvl="2"/>
+            <a:r>
+              <a:rPr lang="en-US"/>
+              <a:t>Third level</a:t>
+            </a:r>
+          </a:p>
+          <a:p>
+            <a:pPr lvl="3"/>
+            <a:r>
+              <a:rPr lang="en-US"/>
+              <a:t>Fourth level</a:t>
+            </a:r>
+          </a:p>
+          <a:p>
+            <a:pPr lvl="4"/>
+            <a:r>
+              <a:rPr lang="en-US"/>
+              <a:t>Fifth level</a:t>
+            </a:r>
+          </a:p>
+        </p:txBody>
+      </p:sp>
+      <p:sp>
+        <p:nvSpPr>
+          <p:cNvPr id="4" name="Content Placeholder 3"/>
+          <p:cNvSpPr>
+            <a:spLocks noGrp="1"/>
+          </p:cNvSpPr>
+          <p:nvPr>
+            <p:ph sz="half" idx="2"/>
+          </p:nvPr>
+        </p:nvSpPr>
+        <p:spPr>
+          <a:xfrm>
+            <a:off x="6607967" y="2667000"/>
+            <a:ext cx="4895056" cy="3124200"/>
+          </a:xfrm>
+        </p:spPr>
+        <p:txBody>
+          <a:bodyPr>
+            <a:normAutofit/>
+          </a:bodyPr>
+          <a:lstStyle>
+            <a:lvl1pPr>
+              <a:defRPr sz="1800"/>
+            </a:lvl1pPr>
+            <a:lvl2pPr>
+              <a:defRPr sz="1600"/>
+            </a:lvl2pPr>
+            <a:lvl3pPr>
+              <a:defRPr sz="1400"/>
+            </a:lvl3pPr>
+            <a:lvl4pPr>
+              <a:defRPr sz="1200"/>
+            </a:lvl4pPr>
+            <a:lvl5pPr>
+              <a:defRPr sz="1200"/>
+            </a:lvl5pPr>
+            <a:lvl6pPr>
+              <a:defRPr sz="1200"/>
+            </a:lvl6pPr>
+            <a:lvl7pPr>
+              <a:defRPr sz="1200"/>
+            </a:lvl7pPr>
+            <a:lvl8pPr>
+              <a:defRPr sz="1200"/>
+            </a:lvl8pPr>
+            <a:lvl9pPr>
+              <a:defRPr sz="1200"/>
+            </a:lvl9pPr>
+          </a:lstStyle>
+          <a:p>
+            <a:pPr lvl="0"/>
+            <a:r>
+              <a:rPr lang="en-US"/>
+              <a:t>Click to edit Master text styles</a:t>
+            </a:r>
+          </a:p>
+          <a:p>
+            <a:pPr lvl="1"/>
+            <a:r>
+              <a:rPr lang="en-US"/>
+              <a:t>Second level</a:t>
+            </a:r>
+          </a:p>
+          <a:p>
+            <a:pPr lvl="2"/>
+            <a:r>
+              <a:rPr lang="en-US"/>
+              <a:t>Third level</a:t>
+            </a:r>
+          </a:p>
+          <a:p>
+            <a:pPr lvl="3"/>
+            <a:r>
+              <a:rPr lang="en-US"/>
+              <a:t>Fourth level</a:t>
+            </a:r>
+          </a:p>
+          <a:p>
+            <a:pPr lvl="4"/>
+            <a:r>
+              <a:rPr lang="en-US"/>
+              <a:t>Fifth level</a:t>
+            </a:r>
+          </a:p>
+        </p:txBody>
+      </p:sp>
+      <p:sp>
+        <p:nvSpPr>
+          <p:cNvPr id="5" name="Date Placeholder 4"/>
+          <p:cNvSpPr>
+            <a:spLocks noGrp="1"/>
+          </p:cNvSpPr>
+          <p:nvPr>
+            <p:ph type="dt" sz="half" idx="10"/>
+          </p:nvPr>
+        </p:nvSpPr>
+        <p:spPr/>
+        <p:txBody>
           <a:bodyPr/>
           <a:lstStyle/>
           <a:p>
-            <a:pPr lvl="0"/>
-            <a:r>
-              <a:rPr lang="en-US"/>
-              <a:t>Click to edit Master text styles</a:t>
-            </a:r>
-          </a:p>
-          <a:p>
-            <a:pPr lvl="1"/>
-            <a:r>
-              <a:rPr lang="en-US"/>
-              <a:t>Second level</a:t>
-            </a:r>
-          </a:p>
-          <a:p>
-            <a:pPr lvl="2"/>
-            <a:r>
-              <a:rPr lang="en-US"/>
-              <a:t>Third level</a:t>
-            </a:r>
-          </a:p>
-          <a:p>
-            <a:pPr lvl="3"/>
-            <a:r>
-              <a:rPr lang="en-US"/>
-              <a:t>Fourth level</a:t>
-            </a:r>
-          </a:p>
-          <a:p>
-            <a:pPr lvl="4"/>
-            <a:r>
-              <a:rPr lang="en-US"/>
-              <a:t>Fifth level</a:t>
-            </a:r>
-          </a:p>
-        </p:txBody>
-      </p:sp>
-      <p:sp>
-        <p:nvSpPr>
-          <p:cNvPr id="4" name="Content Placeholder 3">
-            <a:extLst>
-              <a:ext uri="{FF2B5EF4-FFF2-40B4-BE49-F238E27FC236}">
-                <a16:creationId xmlns:a16="http://schemas.microsoft.com/office/drawing/2014/main" id="{BCE02FB3-FFBF-0F7A-F797-33CED294359C}"/>
-              </a:ext>
-            </a:extLst>
-          </p:cNvPr>
-          <p:cNvSpPr>
-            <a:spLocks noGrp="1"/>
-          </p:cNvSpPr>
-          <p:nvPr>
-            <p:ph sz="half" idx="2"/>
-          </p:nvPr>
-        </p:nvSpPr>
-        <p:spPr>
-          <a:xfrm>
-            <a:off x="6172200" y="1825625"/>
-            <a:ext cx="5181600" cy="4351338"/>
-          </a:xfrm>
-        </p:spPr>
+            <a:fld id="{1705C18A-ADD3-4375-A699-9F4488C0E00E}" type="datetimeFigureOut">
+              <a:rPr lang="en-US" smtClean="0"/>
+              <a:t>5/1/2026</a:t>
+            </a:fld>
+            <a:endParaRPr lang="en-US"/>
+          </a:p>
+        </p:txBody>
+      </p:sp>
+      <p:sp>
+        <p:nvSpPr>
+          <p:cNvPr id="6" name="Footer Placeholder 5"/>
+          <p:cNvSpPr>
+            <a:spLocks noGrp="1"/>
+          </p:cNvSpPr>
+          <p:nvPr>
+            <p:ph type="ftr" sz="quarter" idx="11"/>
+          </p:nvPr>
+        </p:nvSpPr>
+        <p:spPr/>
         <p:txBody>
           <a:bodyPr/>
           <a:lstStyle/>
           <a:p>
-            <a:pPr lvl="0"/>
-            <a:r>
-              <a:rPr lang="en-US"/>
-              <a:t>Click to edit Master text styles</a:t>
-            </a:r>
-          </a:p>
-          <a:p>
-            <a:pPr lvl="1"/>
-            <a:r>
-              <a:rPr lang="en-US"/>
-              <a:t>Second level</a:t>
-            </a:r>
-          </a:p>
-          <a:p>
-            <a:pPr lvl="2"/>
-            <a:r>
-              <a:rPr lang="en-US"/>
-              <a:t>Third level</a:t>
-            </a:r>
-          </a:p>
-          <a:p>
-            <a:pPr lvl="3"/>
-            <a:r>
-              <a:rPr lang="en-US"/>
-              <a:t>Fourth level</a:t>
-            </a:r>
-          </a:p>
-          <a:p>
-            <a:pPr lvl="4"/>
-            <a:r>
-              <a:rPr lang="en-US"/>
-              <a:t>Fifth level</a:t>
-            </a:r>
-          </a:p>
-        </p:txBody>
-      </p:sp>
-      <p:sp>
-        <p:nvSpPr>
-          <p:cNvPr id="5" name="Date Placeholder 4">
-            <a:extLst>
-              <a:ext uri="{FF2B5EF4-FFF2-40B4-BE49-F238E27FC236}">
-                <a16:creationId xmlns:a16="http://schemas.microsoft.com/office/drawing/2014/main" id="{5DCD6A6C-927B-1C4E-1030-B979CB80B6DC}"/>
-              </a:ext>
-            </a:extLst>
-          </p:cNvPr>
-          <p:cNvSpPr>
-            <a:spLocks noGrp="1"/>
-          </p:cNvSpPr>
-          <p:nvPr>
-            <p:ph type="dt" sz="half" idx="10"/>
-          </p:nvPr>
-        </p:nvSpPr>
-        <p:spPr/>
-        <p:txBody>
-          <a:bodyPr/>
-          <a:lstStyle/>
-          <a:p>
-            <a:fld id="{1705C18A-ADD3-4375-A699-9F4488C0E00E}" type="datetimeFigureOut">
-              <a:rPr lang="en-US" smtClean="0"/>
-              <a:t>4/26/2026</a:t>
-            </a:fld>
             <a:endParaRPr lang="en-US"/>
           </a:p>
         </p:txBody>
       </p:sp>
       <p:sp>
         <p:nvSpPr>
-          <p:cNvPr id="6" name="Footer Placeholder 5">
-            <a:extLst>
-              <a:ext uri="{FF2B5EF4-FFF2-40B4-BE49-F238E27FC236}">
-                <a16:creationId xmlns:a16="http://schemas.microsoft.com/office/drawing/2014/main" id="{A848B9A0-188D-E0F5-D9E7-EDD2753BD4DF}"/>
-              </a:ext>
-            </a:extLst>
-          </p:cNvPr>
-          <p:cNvSpPr>
-            <a:spLocks noGrp="1"/>
-          </p:cNvSpPr>
-          <p:nvPr>
-            <p:ph type="ftr" sz="quarter" idx="11"/>
-          </p:nvPr>
-        </p:nvSpPr>
-        <p:spPr/>
-        <p:txBody>
-          <a:bodyPr/>
-          <a:lstStyle/>
-          <a:p>
-            <a:endParaRPr lang="en-US"/>
-          </a:p>
-        </p:txBody>
-      </p:sp>
-      <p:sp>
-        <p:nvSpPr>
-          <p:cNvPr id="7" name="Slide Number Placeholder 6">
-            <a:extLst>
-              <a:ext uri="{FF2B5EF4-FFF2-40B4-BE49-F238E27FC236}">
-                <a16:creationId xmlns:a16="http://schemas.microsoft.com/office/drawing/2014/main" id="{65F1F104-A50B-EB1A-9DD7-B9582D9F3F9A}"/>
-              </a:ext>
-            </a:extLst>
-          </p:cNvPr>
+          <p:cNvPr id="7" name="Slide Number Placeholder 6"/>
           <p:cNvSpPr>
             <a:spLocks noGrp="1"/>
           </p:cNvSpPr>
@@ -1461,7 +3941,7 @@
     </p:spTree>
     <p:extLst>
       <p:ext uri="{BB962C8B-B14F-4D97-AF65-F5344CB8AC3E}">
-        <p14:creationId xmlns:p14="http://schemas.microsoft.com/office/powerpoint/2010/main" val="3422852915"/>
+        <p14:creationId xmlns:p14="http://schemas.microsoft.com/office/powerpoint/2010/main" val="1130195336"/>
       </p:ext>
     </p:extLst>
   </p:cSld>
@@ -1490,65 +3970,60 @@
       </p:grpSpPr>
       <p:sp>
         <p:nvSpPr>
-          <p:cNvPr id="2" name="Title 1">
-            <a:extLst>
-              <a:ext uri="{FF2B5EF4-FFF2-40B4-BE49-F238E27FC236}">
-                <a16:creationId xmlns:a16="http://schemas.microsoft.com/office/drawing/2014/main" id="{EBA699E2-BDAB-1C5A-A42A-F726E50B8103}"/>
-              </a:ext>
-            </a:extLst>
-          </p:cNvPr>
+          <p:cNvPr id="2" name="Title 1"/>
           <p:cNvSpPr>
             <a:spLocks noGrp="1"/>
           </p:cNvSpPr>
           <p:nvPr>
             <p:ph type="title"/>
+          </p:nvPr>
+        </p:nvSpPr>
+        <p:spPr/>
+        <p:txBody>
+          <a:bodyPr/>
+          <a:lstStyle>
+            <a:lvl1pPr>
+              <a:defRPr/>
+            </a:lvl1pPr>
+          </a:lstStyle>
+          <a:p>
+            <a:r>
+              <a:rPr lang="en-US"/>
+              <a:t>Click to edit Master title style</a:t>
+            </a:r>
+          </a:p>
+        </p:txBody>
+      </p:sp>
+      <p:sp>
+        <p:nvSpPr>
+          <p:cNvPr id="3" name="Text Placeholder 2"/>
+          <p:cNvSpPr>
+            <a:spLocks noGrp="1"/>
+          </p:cNvSpPr>
+          <p:nvPr>
+            <p:ph type="body" idx="1"/>
           </p:nvPr>
         </p:nvSpPr>
         <p:spPr>
           <a:xfrm>
-            <a:off x="839788" y="365125"/>
-            <a:ext cx="10515600" cy="1325563"/>
+            <a:off x="1772179" y="2658533"/>
+            <a:ext cx="4607188" cy="576262"/>
           </a:xfrm>
         </p:spPr>
         <p:txBody>
-          <a:bodyPr/>
-          <a:lstStyle/>
-          <a:p>
-            <a:r>
-              <a:rPr lang="en-US"/>
-              <a:t>Click to edit Master title style</a:t>
-            </a:r>
-          </a:p>
-        </p:txBody>
-      </p:sp>
-      <p:sp>
-        <p:nvSpPr>
-          <p:cNvPr id="3" name="Text Placeholder 2">
-            <a:extLst>
-              <a:ext uri="{FF2B5EF4-FFF2-40B4-BE49-F238E27FC236}">
-                <a16:creationId xmlns:a16="http://schemas.microsoft.com/office/drawing/2014/main" id="{6021BF07-2297-75E4-EB7A-205A1A57211C}"/>
-              </a:ext>
-            </a:extLst>
-          </p:cNvPr>
-          <p:cNvSpPr>
-            <a:spLocks noGrp="1"/>
-          </p:cNvSpPr>
-          <p:nvPr>
-            <p:ph type="body" idx="1"/>
-          </p:nvPr>
-        </p:nvSpPr>
-        <p:spPr>
-          <a:xfrm>
-            <a:off x="839788" y="1681163"/>
-            <a:ext cx="5157787" cy="823912"/>
-          </a:xfrm>
-        </p:spPr>
-        <p:txBody>
-          <a:bodyPr anchor="b"/>
+          <a:bodyPr anchor="b">
+            <a:noAutofit/>
+          </a:bodyPr>
           <a:lstStyle>
             <a:lvl1pPr marL="0" indent="0">
               <a:buNone/>
-              <a:defRPr sz="2400" b="1"/>
+              <a:defRPr sz="2800" b="0">
+                <a:solidFill>
+                  <a:schemeClr val="accent1">
+                    <a:lumMod val="75000"/>
+                  </a:schemeClr>
+                </a:solidFill>
+              </a:defRPr>
             </a:lvl1pPr>
             <a:lvl2pPr marL="457200" indent="0">
               <a:buNone/>
@@ -1594,13 +4069,7 @@
       </p:sp>
       <p:sp>
         <p:nvSpPr>
-          <p:cNvPr id="4" name="Content Placeholder 3">
-            <a:extLst>
-              <a:ext uri="{FF2B5EF4-FFF2-40B4-BE49-F238E27FC236}">
-                <a16:creationId xmlns:a16="http://schemas.microsoft.com/office/drawing/2014/main" id="{B7681C39-05FA-EF84-EE4C-1FC44AA05F91}"/>
-              </a:ext>
-            </a:extLst>
-          </p:cNvPr>
+          <p:cNvPr id="4" name="Content Placeholder 3"/>
           <p:cNvSpPr>
             <a:spLocks noGrp="1"/>
           </p:cNvSpPr>
@@ -1610,13 +4079,43 @@
         </p:nvSpPr>
         <p:spPr>
           <a:xfrm>
-            <a:off x="839788" y="2505075"/>
-            <a:ext cx="5157787" cy="3684588"/>
+            <a:off x="1484311" y="3335337"/>
+            <a:ext cx="4895056" cy="2455862"/>
           </a:xfrm>
         </p:spPr>
         <p:txBody>
-          <a:bodyPr/>
-          <a:lstStyle/>
+          <a:bodyPr anchor="t">
+            <a:normAutofit/>
+          </a:bodyPr>
+          <a:lstStyle>
+            <a:lvl1pPr>
+              <a:defRPr sz="1800"/>
+            </a:lvl1pPr>
+            <a:lvl2pPr>
+              <a:defRPr sz="1600"/>
+            </a:lvl2pPr>
+            <a:lvl3pPr>
+              <a:defRPr sz="1400"/>
+            </a:lvl3pPr>
+            <a:lvl4pPr>
+              <a:defRPr sz="1200"/>
+            </a:lvl4pPr>
+            <a:lvl5pPr>
+              <a:defRPr sz="1200"/>
+            </a:lvl5pPr>
+            <a:lvl6pPr>
+              <a:defRPr sz="1200"/>
+            </a:lvl6pPr>
+            <a:lvl7pPr>
+              <a:defRPr sz="1200"/>
+            </a:lvl7pPr>
+            <a:lvl8pPr>
+              <a:defRPr sz="1200"/>
+            </a:lvl8pPr>
+            <a:lvl9pPr>
+              <a:defRPr sz="1200"/>
+            </a:lvl9pPr>
+          </a:lstStyle>
           <a:p>
             <a:pPr lvl="0"/>
             <a:r>
@@ -1656,13 +4155,7 @@
       </p:sp>
       <p:sp>
         <p:nvSpPr>
-          <p:cNvPr id="5" name="Text Placeholder 4">
-            <a:extLst>
-              <a:ext uri="{FF2B5EF4-FFF2-40B4-BE49-F238E27FC236}">
-                <a16:creationId xmlns:a16="http://schemas.microsoft.com/office/drawing/2014/main" id="{A2E824C3-8B5A-23C9-76B0-272976876CD9}"/>
-              </a:ext>
-            </a:extLst>
-          </p:cNvPr>
+          <p:cNvPr id="5" name="Text Placeholder 4"/>
           <p:cNvSpPr>
             <a:spLocks noGrp="1"/>
           </p:cNvSpPr>
@@ -1672,16 +4165,24 @@
         </p:nvSpPr>
         <p:spPr>
           <a:xfrm>
-            <a:off x="6172200" y="1681163"/>
-            <a:ext cx="5183188" cy="823912"/>
+            <a:off x="6880487" y="2667000"/>
+            <a:ext cx="4622537" cy="576262"/>
           </a:xfrm>
         </p:spPr>
         <p:txBody>
-          <a:bodyPr anchor="b"/>
+          <a:bodyPr anchor="b">
+            <a:noAutofit/>
+          </a:bodyPr>
           <a:lstStyle>
             <a:lvl1pPr marL="0" indent="0">
               <a:buNone/>
-              <a:defRPr sz="2400" b="1"/>
+              <a:defRPr sz="2800" b="0">
+                <a:solidFill>
+                  <a:schemeClr val="accent1">
+                    <a:lumMod val="75000"/>
+                  </a:schemeClr>
+                </a:solidFill>
+              </a:defRPr>
             </a:lvl1pPr>
             <a:lvl2pPr marL="457200" indent="0">
               <a:buNone/>
@@ -1727,13 +4228,7 @@
       </p:sp>
       <p:sp>
         <p:nvSpPr>
-          <p:cNvPr id="6" name="Content Placeholder 5">
-            <a:extLst>
-              <a:ext uri="{FF2B5EF4-FFF2-40B4-BE49-F238E27FC236}">
-                <a16:creationId xmlns:a16="http://schemas.microsoft.com/office/drawing/2014/main" id="{182A8B74-9E4E-5E2B-3F63-EBB02F74C7F2}"/>
-              </a:ext>
-            </a:extLst>
-          </p:cNvPr>
+          <p:cNvPr id="6" name="Content Placeholder 5"/>
           <p:cNvSpPr>
             <a:spLocks noGrp="1"/>
           </p:cNvSpPr>
@@ -1743,64 +4238,111 @@
         </p:nvSpPr>
         <p:spPr>
           <a:xfrm>
-            <a:off x="6172200" y="2505075"/>
-            <a:ext cx="5183188" cy="3684588"/>
+            <a:off x="6607967" y="3335337"/>
+            <a:ext cx="4895056" cy="2455862"/>
           </a:xfrm>
         </p:spPr>
         <p:txBody>
+          <a:bodyPr anchor="t">
+            <a:normAutofit/>
+          </a:bodyPr>
+          <a:lstStyle>
+            <a:lvl1pPr>
+              <a:defRPr sz="1800"/>
+            </a:lvl1pPr>
+            <a:lvl2pPr>
+              <a:defRPr sz="1600"/>
+            </a:lvl2pPr>
+            <a:lvl3pPr>
+              <a:defRPr sz="1400"/>
+            </a:lvl3pPr>
+            <a:lvl4pPr>
+              <a:defRPr sz="1200"/>
+            </a:lvl4pPr>
+            <a:lvl5pPr>
+              <a:defRPr sz="1200"/>
+            </a:lvl5pPr>
+            <a:lvl6pPr>
+              <a:defRPr sz="1200"/>
+            </a:lvl6pPr>
+            <a:lvl7pPr>
+              <a:defRPr sz="1200"/>
+            </a:lvl7pPr>
+            <a:lvl8pPr>
+              <a:defRPr sz="1200"/>
+            </a:lvl8pPr>
+            <a:lvl9pPr>
+              <a:defRPr sz="1200"/>
+            </a:lvl9pPr>
+          </a:lstStyle>
+          <a:p>
+            <a:pPr lvl="0"/>
+            <a:r>
+              <a:rPr lang="en-US"/>
+              <a:t>Click to edit Master text styles</a:t>
+            </a:r>
+          </a:p>
+          <a:p>
+            <a:pPr lvl="1"/>
+            <a:r>
+              <a:rPr lang="en-US"/>
+              <a:t>Second level</a:t>
+            </a:r>
+          </a:p>
+          <a:p>
+            <a:pPr lvl="2"/>
+            <a:r>
+              <a:rPr lang="en-US"/>
+              <a:t>Third level</a:t>
+            </a:r>
+          </a:p>
+          <a:p>
+            <a:pPr lvl="3"/>
+            <a:r>
+              <a:rPr lang="en-US"/>
+              <a:t>Fourth level</a:t>
+            </a:r>
+          </a:p>
+          <a:p>
+            <a:pPr lvl="4"/>
+            <a:r>
+              <a:rPr lang="en-US"/>
+              <a:t>Fifth level</a:t>
+            </a:r>
+          </a:p>
+        </p:txBody>
+      </p:sp>
+      <p:sp>
+        <p:nvSpPr>
+          <p:cNvPr id="7" name="Date Placeholder 6"/>
+          <p:cNvSpPr>
+            <a:spLocks noGrp="1"/>
+          </p:cNvSpPr>
+          <p:nvPr>
+            <p:ph type="dt" sz="half" idx="10"/>
+          </p:nvPr>
+        </p:nvSpPr>
+        <p:spPr/>
+        <p:txBody>
           <a:bodyPr/>
           <a:lstStyle/>
           <a:p>
-            <a:pPr lvl="0"/>
-            <a:r>
-              <a:rPr lang="en-US"/>
-              <a:t>Click to edit Master text styles</a:t>
-            </a:r>
-          </a:p>
-          <a:p>
-            <a:pPr lvl="1"/>
-            <a:r>
-              <a:rPr lang="en-US"/>
-              <a:t>Second level</a:t>
-            </a:r>
-          </a:p>
-          <a:p>
-            <a:pPr lvl="2"/>
-            <a:r>
-              <a:rPr lang="en-US"/>
-              <a:t>Third level</a:t>
-            </a:r>
-          </a:p>
-          <a:p>
-            <a:pPr lvl="3"/>
-            <a:r>
-              <a:rPr lang="en-US"/>
-              <a:t>Fourth level</a:t>
-            </a:r>
-          </a:p>
-          <a:p>
-            <a:pPr lvl="4"/>
-            <a:r>
-              <a:rPr lang="en-US"/>
-              <a:t>Fifth level</a:t>
-            </a:r>
-          </a:p>
-        </p:txBody>
-      </p:sp>
-      <p:sp>
-        <p:nvSpPr>
-          <p:cNvPr id="7" name="Date Placeholder 6">
-            <a:extLst>
-              <a:ext uri="{FF2B5EF4-FFF2-40B4-BE49-F238E27FC236}">
-                <a16:creationId xmlns:a16="http://schemas.microsoft.com/office/drawing/2014/main" id="{434AD1F8-544E-1F74-ACBD-DE206B5C7DD7}"/>
-              </a:ext>
-            </a:extLst>
-          </p:cNvPr>
-          <p:cNvSpPr>
-            <a:spLocks noGrp="1"/>
-          </p:cNvSpPr>
-          <p:nvPr>
-            <p:ph type="dt" sz="half" idx="10"/>
+            <a:fld id="{1705C18A-ADD3-4375-A699-9F4488C0E00E}" type="datetimeFigureOut">
+              <a:rPr lang="en-US" smtClean="0"/>
+              <a:t>5/1/2026</a:t>
+            </a:fld>
+            <a:endParaRPr lang="en-US"/>
+          </a:p>
+        </p:txBody>
+      </p:sp>
+      <p:sp>
+        <p:nvSpPr>
+          <p:cNvPr id="8" name="Footer Placeholder 7"/>
+          <p:cNvSpPr>
+            <a:spLocks noGrp="1"/>
+          </p:cNvSpPr>
+          <p:nvPr>
+            <p:ph type="ftr" sz="quarter" idx="11"/>
           </p:nvPr>
         </p:nvSpPr>
         <p:spPr/>
@@ -1808,48 +4350,13 @@
           <a:bodyPr/>
           <a:lstStyle/>
           <a:p>
-            <a:fld id="{1705C18A-ADD3-4375-A699-9F4488C0E00E}" type="datetimeFigureOut">
-              <a:rPr lang="en-US" smtClean="0"/>
-              <a:t>4/26/2026</a:t>
-            </a:fld>
             <a:endParaRPr lang="en-US"/>
           </a:p>
         </p:txBody>
       </p:sp>
       <p:sp>
         <p:nvSpPr>
-          <p:cNvPr id="8" name="Footer Placeholder 7">
-            <a:extLst>
-              <a:ext uri="{FF2B5EF4-FFF2-40B4-BE49-F238E27FC236}">
-                <a16:creationId xmlns:a16="http://schemas.microsoft.com/office/drawing/2014/main" id="{20476D4E-CFEF-2905-7D32-D34B13C11268}"/>
-              </a:ext>
-            </a:extLst>
-          </p:cNvPr>
-          <p:cNvSpPr>
-            <a:spLocks noGrp="1"/>
-          </p:cNvSpPr>
-          <p:nvPr>
-            <p:ph type="ftr" sz="quarter" idx="11"/>
-          </p:nvPr>
-        </p:nvSpPr>
-        <p:spPr/>
-        <p:txBody>
-          <a:bodyPr/>
-          <a:lstStyle/>
-          <a:p>
-            <a:endParaRPr lang="en-US"/>
-          </a:p>
-        </p:txBody>
-      </p:sp>
-      <p:sp>
-        <p:nvSpPr>
-          <p:cNvPr id="9" name="Slide Number Placeholder 8">
-            <a:extLst>
-              <a:ext uri="{FF2B5EF4-FFF2-40B4-BE49-F238E27FC236}">
-                <a16:creationId xmlns:a16="http://schemas.microsoft.com/office/drawing/2014/main" id="{1008D1BB-12EA-2AC0-5A55-599FE902CD1E}"/>
-              </a:ext>
-            </a:extLst>
-          </p:cNvPr>
+          <p:cNvPr id="9" name="Slide Number Placeholder 8"/>
           <p:cNvSpPr>
             <a:spLocks noGrp="1"/>
           </p:cNvSpPr>
@@ -1873,7 +4380,7 @@
     </p:spTree>
     <p:extLst>
       <p:ext uri="{BB962C8B-B14F-4D97-AF65-F5344CB8AC3E}">
-        <p14:creationId xmlns:p14="http://schemas.microsoft.com/office/powerpoint/2010/main" val="172483150"/>
+        <p14:creationId xmlns:p14="http://schemas.microsoft.com/office/powerpoint/2010/main" val="3945113234"/>
       </p:ext>
     </p:extLst>
   </p:cSld>
@@ -1902,13 +4409,7 @@
       </p:grpSpPr>
       <p:sp>
         <p:nvSpPr>
-          <p:cNvPr id="2" name="Title 1">
-            <a:extLst>
-              <a:ext uri="{FF2B5EF4-FFF2-40B4-BE49-F238E27FC236}">
-                <a16:creationId xmlns:a16="http://schemas.microsoft.com/office/drawing/2014/main" id="{9173B403-3B0F-81E6-7489-7BB7B06CA227}"/>
-              </a:ext>
-            </a:extLst>
-          </p:cNvPr>
+          <p:cNvPr id="2" name="Title 1"/>
           <p:cNvSpPr>
             <a:spLocks noGrp="1"/>
           </p:cNvSpPr>
@@ -1930,13 +4431,7 @@
       </p:sp>
       <p:sp>
         <p:nvSpPr>
-          <p:cNvPr id="3" name="Date Placeholder 2">
-            <a:extLst>
-              <a:ext uri="{FF2B5EF4-FFF2-40B4-BE49-F238E27FC236}">
-                <a16:creationId xmlns:a16="http://schemas.microsoft.com/office/drawing/2014/main" id="{976C7A25-5F4A-00FC-29D8-1676148E7708}"/>
-              </a:ext>
-            </a:extLst>
-          </p:cNvPr>
+          <p:cNvPr id="3" name="Date Placeholder 2"/>
           <p:cNvSpPr>
             <a:spLocks noGrp="1"/>
           </p:cNvSpPr>
@@ -1951,7 +4446,7 @@
           <a:p>
             <a:fld id="{1705C18A-ADD3-4375-A699-9F4488C0E00E}" type="datetimeFigureOut">
               <a:rPr lang="en-US" smtClean="0"/>
-              <a:t>4/26/2026</a:t>
+              <a:t>5/1/2026</a:t>
             </a:fld>
             <a:endParaRPr lang="en-US"/>
           </a:p>
@@ -1959,13 +4454,7 @@
       </p:sp>
       <p:sp>
         <p:nvSpPr>
-          <p:cNvPr id="4" name="Footer Placeholder 3">
-            <a:extLst>
-              <a:ext uri="{FF2B5EF4-FFF2-40B4-BE49-F238E27FC236}">
-                <a16:creationId xmlns:a16="http://schemas.microsoft.com/office/drawing/2014/main" id="{ED9DFBAB-F3BA-4AF3-BD9B-BAA03DE2309A}"/>
-              </a:ext>
-            </a:extLst>
-          </p:cNvPr>
+          <p:cNvPr id="4" name="Footer Placeholder 3"/>
           <p:cNvSpPr>
             <a:spLocks noGrp="1"/>
           </p:cNvSpPr>
@@ -1984,13 +4473,7 @@
       </p:sp>
       <p:sp>
         <p:nvSpPr>
-          <p:cNvPr id="5" name="Slide Number Placeholder 4">
-            <a:extLst>
-              <a:ext uri="{FF2B5EF4-FFF2-40B4-BE49-F238E27FC236}">
-                <a16:creationId xmlns:a16="http://schemas.microsoft.com/office/drawing/2014/main" id="{ADF526D8-D80B-981B-052B-44A4DE32F0F8}"/>
-              </a:ext>
-            </a:extLst>
-          </p:cNvPr>
+          <p:cNvPr id="5" name="Slide Number Placeholder 4"/>
           <p:cNvSpPr>
             <a:spLocks noGrp="1"/>
           </p:cNvSpPr>
@@ -2014,7 +4497,7 @@
     </p:spTree>
     <p:extLst>
       <p:ext uri="{BB962C8B-B14F-4D97-AF65-F5344CB8AC3E}">
-        <p14:creationId xmlns:p14="http://schemas.microsoft.com/office/powerpoint/2010/main" val="3723759454"/>
+        <p14:creationId xmlns:p14="http://schemas.microsoft.com/office/powerpoint/2010/main" val="909876831"/>
       </p:ext>
     </p:extLst>
   </p:cSld>
@@ -2043,13 +4526,7 @@
       </p:grpSpPr>
       <p:sp>
         <p:nvSpPr>
-          <p:cNvPr id="2" name="Date Placeholder 1">
-            <a:extLst>
-              <a:ext uri="{FF2B5EF4-FFF2-40B4-BE49-F238E27FC236}">
-                <a16:creationId xmlns:a16="http://schemas.microsoft.com/office/drawing/2014/main" id="{9F64EAE9-E6B8-8369-6B14-5A329751408B}"/>
-              </a:ext>
-            </a:extLst>
-          </p:cNvPr>
+          <p:cNvPr id="2" name="Date Placeholder 1"/>
           <p:cNvSpPr>
             <a:spLocks noGrp="1"/>
           </p:cNvSpPr>
@@ -2064,7 +4541,7 @@
           <a:p>
             <a:fld id="{1705C18A-ADD3-4375-A699-9F4488C0E00E}" type="datetimeFigureOut">
               <a:rPr lang="en-US" smtClean="0"/>
-              <a:t>4/26/2026</a:t>
+              <a:t>5/1/2026</a:t>
             </a:fld>
             <a:endParaRPr lang="en-US"/>
           </a:p>
@@ -2072,13 +4549,7 @@
       </p:sp>
       <p:sp>
         <p:nvSpPr>
-          <p:cNvPr id="3" name="Footer Placeholder 2">
-            <a:extLst>
-              <a:ext uri="{FF2B5EF4-FFF2-40B4-BE49-F238E27FC236}">
-                <a16:creationId xmlns:a16="http://schemas.microsoft.com/office/drawing/2014/main" id="{51F9583D-4CD8-E9C0-0220-E703B2C8A0A9}"/>
-              </a:ext>
-            </a:extLst>
-          </p:cNvPr>
+          <p:cNvPr id="3" name="Footer Placeholder 2"/>
           <p:cNvSpPr>
             <a:spLocks noGrp="1"/>
           </p:cNvSpPr>
@@ -2097,13 +4568,7 @@
       </p:sp>
       <p:sp>
         <p:nvSpPr>
-          <p:cNvPr id="4" name="Slide Number Placeholder 3">
-            <a:extLst>
-              <a:ext uri="{FF2B5EF4-FFF2-40B4-BE49-F238E27FC236}">
-                <a16:creationId xmlns:a16="http://schemas.microsoft.com/office/drawing/2014/main" id="{AE9CEB60-3F41-436B-810C-C694D25FC967}"/>
-              </a:ext>
-            </a:extLst>
-          </p:cNvPr>
+          <p:cNvPr id="4" name="Slide Number Placeholder 3"/>
           <p:cNvSpPr>
             <a:spLocks noGrp="1"/>
           </p:cNvSpPr>
@@ -2127,7 +4592,7 @@
     </p:spTree>
     <p:extLst>
       <p:ext uri="{BB962C8B-B14F-4D97-AF65-F5344CB8AC3E}">
-        <p14:creationId xmlns:p14="http://schemas.microsoft.com/office/powerpoint/2010/main" val="624210097"/>
+        <p14:creationId xmlns:p14="http://schemas.microsoft.com/office/powerpoint/2010/main" val="4209829618"/>
       </p:ext>
     </p:extLst>
   </p:cSld>
@@ -2156,13 +4621,7 @@
       </p:grpSpPr>
       <p:sp>
         <p:nvSpPr>
-          <p:cNvPr id="2" name="Title 1">
-            <a:extLst>
-              <a:ext uri="{FF2B5EF4-FFF2-40B4-BE49-F238E27FC236}">
-                <a16:creationId xmlns:a16="http://schemas.microsoft.com/office/drawing/2014/main" id="{089C6B26-2B50-B59A-64BE-DFE5DEDC1889}"/>
-              </a:ext>
-            </a:extLst>
-          </p:cNvPr>
+          <p:cNvPr id="2" name="Title 1"/>
           <p:cNvSpPr>
             <a:spLocks noGrp="1"/>
           </p:cNvSpPr>
@@ -2172,175 +4631,169 @@
         </p:nvSpPr>
         <p:spPr>
           <a:xfrm>
-            <a:off x="839788" y="457200"/>
-            <a:ext cx="3932237" cy="1600200"/>
+            <a:off x="1484312" y="1600200"/>
+            <a:ext cx="3549121" cy="1371600"/>
           </a:xfrm>
         </p:spPr>
         <p:txBody>
-          <a:bodyPr anchor="b"/>
+          <a:bodyPr anchor="b">
+            <a:normAutofit/>
+          </a:bodyPr>
+          <a:lstStyle>
+            <a:lvl1pPr algn="ctr">
+              <a:defRPr sz="2400" b="0"/>
+            </a:lvl1pPr>
+          </a:lstStyle>
+          <a:p>
+            <a:r>
+              <a:rPr lang="en-US"/>
+              <a:t>Click to edit Master title style</a:t>
+            </a:r>
+          </a:p>
+        </p:txBody>
+      </p:sp>
+      <p:sp>
+        <p:nvSpPr>
+          <p:cNvPr id="3" name="Content Placeholder 2"/>
+          <p:cNvSpPr>
+            <a:spLocks noGrp="1"/>
+          </p:cNvSpPr>
+          <p:nvPr>
+            <p:ph idx="1"/>
+          </p:nvPr>
+        </p:nvSpPr>
+        <p:spPr>
+          <a:xfrm>
+            <a:off x="5262033" y="685799"/>
+            <a:ext cx="6240990" cy="5105401"/>
+          </a:xfrm>
+        </p:spPr>
+        <p:txBody>
+          <a:bodyPr anchor="ctr">
+            <a:normAutofit/>
+          </a:bodyPr>
           <a:lstStyle>
             <a:lvl1pPr>
-              <a:defRPr sz="3200"/>
+              <a:defRPr sz="2000"/>
             </a:lvl1pPr>
+            <a:lvl2pPr>
+              <a:defRPr sz="1800"/>
+            </a:lvl2pPr>
+            <a:lvl3pPr>
+              <a:defRPr sz="1600"/>
+            </a:lvl3pPr>
+            <a:lvl4pPr>
+              <a:defRPr sz="1400"/>
+            </a:lvl4pPr>
+            <a:lvl5pPr>
+              <a:defRPr sz="1400"/>
+            </a:lvl5pPr>
+            <a:lvl6pPr>
+              <a:defRPr sz="1400"/>
+            </a:lvl6pPr>
+            <a:lvl7pPr>
+              <a:defRPr sz="1400"/>
+            </a:lvl7pPr>
+            <a:lvl8pPr>
+              <a:defRPr sz="1400"/>
+            </a:lvl8pPr>
+            <a:lvl9pPr>
+              <a:defRPr sz="1400"/>
+            </a:lvl9pPr>
           </a:lstStyle>
           <a:p>
-            <a:r>
-              <a:rPr lang="en-US"/>
-              <a:t>Click to edit Master title style</a:t>
-            </a:r>
-          </a:p>
-        </p:txBody>
-      </p:sp>
-      <p:sp>
-        <p:nvSpPr>
-          <p:cNvPr id="3" name="Content Placeholder 2">
-            <a:extLst>
-              <a:ext uri="{FF2B5EF4-FFF2-40B4-BE49-F238E27FC236}">
-                <a16:creationId xmlns:a16="http://schemas.microsoft.com/office/drawing/2014/main" id="{4A21099E-C881-DFF8-54B8-AFF818F4A324}"/>
-              </a:ext>
-            </a:extLst>
-          </p:cNvPr>
-          <p:cNvSpPr>
-            <a:spLocks noGrp="1"/>
-          </p:cNvSpPr>
-          <p:nvPr>
-            <p:ph idx="1"/>
+            <a:pPr lvl="0"/>
+            <a:r>
+              <a:rPr lang="en-US"/>
+              <a:t>Click to edit Master text styles</a:t>
+            </a:r>
+          </a:p>
+          <a:p>
+            <a:pPr lvl="1"/>
+            <a:r>
+              <a:rPr lang="en-US"/>
+              <a:t>Second level</a:t>
+            </a:r>
+          </a:p>
+          <a:p>
+            <a:pPr lvl="2"/>
+            <a:r>
+              <a:rPr lang="en-US"/>
+              <a:t>Third level</a:t>
+            </a:r>
+          </a:p>
+          <a:p>
+            <a:pPr lvl="3"/>
+            <a:r>
+              <a:rPr lang="en-US"/>
+              <a:t>Fourth level</a:t>
+            </a:r>
+          </a:p>
+          <a:p>
+            <a:pPr lvl="4"/>
+            <a:r>
+              <a:rPr lang="en-US"/>
+              <a:t>Fifth level</a:t>
+            </a:r>
+          </a:p>
+        </p:txBody>
+      </p:sp>
+      <p:sp>
+        <p:nvSpPr>
+          <p:cNvPr id="4" name="Text Placeholder 3"/>
+          <p:cNvSpPr>
+            <a:spLocks noGrp="1"/>
+          </p:cNvSpPr>
+          <p:nvPr>
+            <p:ph type="body" sz="half" idx="2"/>
           </p:nvPr>
         </p:nvSpPr>
         <p:spPr>
           <a:xfrm>
-            <a:off x="5183188" y="987425"/>
-            <a:ext cx="6172200" cy="4873625"/>
+            <a:off x="1484312" y="2971800"/>
+            <a:ext cx="3549121" cy="1828800"/>
           </a:xfrm>
         </p:spPr>
         <p:txBody>
-          <a:bodyPr/>
+          <a:bodyPr>
+            <a:normAutofit/>
+          </a:bodyPr>
           <a:lstStyle>
-            <a:lvl1pPr>
-              <a:defRPr sz="3200"/>
-            </a:lvl1pPr>
-            <a:lvl2pPr>
-              <a:defRPr sz="2800"/>
-            </a:lvl2pPr>
-            <a:lvl3pPr>
-              <a:defRPr sz="2400"/>
-            </a:lvl3pPr>
-            <a:lvl4pPr>
-              <a:defRPr sz="2000"/>
-            </a:lvl4pPr>
-            <a:lvl5pPr>
-              <a:defRPr sz="2000"/>
-            </a:lvl5pPr>
-            <a:lvl6pPr>
-              <a:defRPr sz="2000"/>
-            </a:lvl6pPr>
-            <a:lvl7pPr>
-              <a:defRPr sz="2000"/>
-            </a:lvl7pPr>
-            <a:lvl8pPr>
-              <a:defRPr sz="2000"/>
-            </a:lvl8pPr>
-            <a:lvl9pPr>
-              <a:defRPr sz="2000"/>
-            </a:lvl9pPr>
-          </a:lstStyle>
-          <a:p>
-            <a:pPr lvl="0"/>
-            <a:r>
-              <a:rPr lang="en-US"/>
-              <a:t>Click to edit Master text styles</a:t>
-            </a:r>
-          </a:p>
-          <a:p>
-            <a:pPr lvl="1"/>
-            <a:r>
-              <a:rPr lang="en-US"/>
-              <a:t>Second level</a:t>
-            </a:r>
-          </a:p>
-          <a:p>
-            <a:pPr lvl="2"/>
-            <a:r>
-              <a:rPr lang="en-US"/>
-              <a:t>Third level</a:t>
-            </a:r>
-          </a:p>
-          <a:p>
-            <a:pPr lvl="3"/>
-            <a:r>
-              <a:rPr lang="en-US"/>
-              <a:t>Fourth level</a:t>
-            </a:r>
-          </a:p>
-          <a:p>
-            <a:pPr lvl="4"/>
-            <a:r>
-              <a:rPr lang="en-US"/>
-              <a:t>Fifth level</a:t>
-            </a:r>
-          </a:p>
-        </p:txBody>
-      </p:sp>
-      <p:sp>
-        <p:nvSpPr>
-          <p:cNvPr id="4" name="Text Placeholder 3">
-            <a:extLst>
-              <a:ext uri="{FF2B5EF4-FFF2-40B4-BE49-F238E27FC236}">
-                <a16:creationId xmlns:a16="http://schemas.microsoft.com/office/drawing/2014/main" id="{3857CA4B-224C-587D-E449-08DBE44CC328}"/>
-              </a:ext>
-            </a:extLst>
-          </p:cNvPr>
-          <p:cNvSpPr>
-            <a:spLocks noGrp="1"/>
-          </p:cNvSpPr>
-          <p:nvPr>
-            <p:ph type="body" sz="half" idx="2"/>
-          </p:nvPr>
-        </p:nvSpPr>
-        <p:spPr>
-          <a:xfrm>
-            <a:off x="839788" y="2057400"/>
-            <a:ext cx="3932237" cy="3811588"/>
-          </a:xfrm>
-        </p:spPr>
-        <p:txBody>
-          <a:bodyPr/>
-          <a:lstStyle>
-            <a:lvl1pPr marL="0" indent="0">
+            <a:lvl1pPr marL="0" indent="0" algn="ctr">
               <a:buNone/>
               <a:defRPr sz="1600"/>
             </a:lvl1pPr>
             <a:lvl2pPr marL="457200" indent="0">
               <a:buNone/>
-              <a:defRPr sz="1400"/>
+              <a:defRPr sz="1200"/>
             </a:lvl2pPr>
             <a:lvl3pPr marL="914400" indent="0">
               <a:buNone/>
-              <a:defRPr sz="1200"/>
+              <a:defRPr sz="1000"/>
             </a:lvl3pPr>
             <a:lvl4pPr marL="1371600" indent="0">
               <a:buNone/>
-              <a:defRPr sz="1000"/>
+              <a:defRPr sz="900"/>
             </a:lvl4pPr>
             <a:lvl5pPr marL="1828800" indent="0">
               <a:buNone/>
-              <a:defRPr sz="1000"/>
+              <a:defRPr sz="900"/>
             </a:lvl5pPr>
             <a:lvl6pPr marL="2286000" indent="0">
               <a:buNone/>
-              <a:defRPr sz="1000"/>
+              <a:defRPr sz="900"/>
             </a:lvl6pPr>
             <a:lvl7pPr marL="2743200" indent="0">
               <a:buNone/>
-              <a:defRPr sz="1000"/>
+              <a:defRPr sz="900"/>
             </a:lvl7pPr>
             <a:lvl8pPr marL="3200400" indent="0">
               <a:buNone/>
-              <a:defRPr sz="1000"/>
+              <a:defRPr sz="900"/>
             </a:lvl8pPr>
             <a:lvl9pPr marL="3657600" indent="0">
               <a:buNone/>
-              <a:defRPr sz="1000"/>
+              <a:defRPr sz="900"/>
             </a:lvl9pPr>
           </a:lstStyle>
           <a:p>
@@ -2354,13 +4807,7 @@
       </p:sp>
       <p:sp>
         <p:nvSpPr>
-          <p:cNvPr id="5" name="Date Placeholder 4">
-            <a:extLst>
-              <a:ext uri="{FF2B5EF4-FFF2-40B4-BE49-F238E27FC236}">
-                <a16:creationId xmlns:a16="http://schemas.microsoft.com/office/drawing/2014/main" id="{19032002-EDFF-FAA3-DB36-F318A50E9F90}"/>
-              </a:ext>
-            </a:extLst>
-          </p:cNvPr>
+          <p:cNvPr id="5" name="Date Placeholder 4"/>
           <p:cNvSpPr>
             <a:spLocks noGrp="1"/>
           </p:cNvSpPr>
@@ -2375,7 +4822,7 @@
           <a:p>
             <a:fld id="{1705C18A-ADD3-4375-A699-9F4488C0E00E}" type="datetimeFigureOut">
               <a:rPr lang="en-US" smtClean="0"/>
-              <a:t>4/26/2026</a:t>
+              <a:t>5/1/2026</a:t>
             </a:fld>
             <a:endParaRPr lang="en-US"/>
           </a:p>
@@ -2383,13 +4830,7 @@
       </p:sp>
       <p:sp>
         <p:nvSpPr>
-          <p:cNvPr id="6" name="Footer Placeholder 5">
-            <a:extLst>
-              <a:ext uri="{FF2B5EF4-FFF2-40B4-BE49-F238E27FC236}">
-                <a16:creationId xmlns:a16="http://schemas.microsoft.com/office/drawing/2014/main" id="{D1E15184-50E3-7CFB-AAFE-2103B4114DAD}"/>
-              </a:ext>
-            </a:extLst>
-          </p:cNvPr>
+          <p:cNvPr id="6" name="Footer Placeholder 5"/>
           <p:cNvSpPr>
             <a:spLocks noGrp="1"/>
           </p:cNvSpPr>
@@ -2408,13 +4849,7 @@
       </p:sp>
       <p:sp>
         <p:nvSpPr>
-          <p:cNvPr id="7" name="Slide Number Placeholder 6">
-            <a:extLst>
-              <a:ext uri="{FF2B5EF4-FFF2-40B4-BE49-F238E27FC236}">
-                <a16:creationId xmlns:a16="http://schemas.microsoft.com/office/drawing/2014/main" id="{003D7E59-B956-718D-2FC0-FF9C6203C506}"/>
-              </a:ext>
-            </a:extLst>
-          </p:cNvPr>
+          <p:cNvPr id="7" name="Slide Number Placeholder 6"/>
           <p:cNvSpPr>
             <a:spLocks noGrp="1"/>
           </p:cNvSpPr>
@@ -2438,7 +4873,7 @@
     </p:spTree>
     <p:extLst>
       <p:ext uri="{BB962C8B-B14F-4D97-AF65-F5344CB8AC3E}">
-        <p14:creationId xmlns:p14="http://schemas.microsoft.com/office/powerpoint/2010/main" val="271753143"/>
+        <p14:creationId xmlns:p14="http://schemas.microsoft.com/office/powerpoint/2010/main" val="3564931594"/>
       </p:ext>
     </p:extLst>
   </p:cSld>
@@ -2467,13 +4902,7 @@
       </p:grpSpPr>
       <p:sp>
         <p:nvSpPr>
-          <p:cNvPr id="2" name="Title 1">
-            <a:extLst>
-              <a:ext uri="{FF2B5EF4-FFF2-40B4-BE49-F238E27FC236}">
-                <a16:creationId xmlns:a16="http://schemas.microsoft.com/office/drawing/2014/main" id="{7997EADD-24B5-F4EA-FCD3-79F417568FE9}"/>
-              </a:ext>
-            </a:extLst>
-          </p:cNvPr>
+          <p:cNvPr id="2" name="Title 1"/>
           <p:cNvSpPr>
             <a:spLocks noGrp="1"/>
           </p:cNvSpPr>
@@ -2483,15 +4912,17 @@
         </p:nvSpPr>
         <p:spPr>
           <a:xfrm>
-            <a:off x="839788" y="457200"/>
-            <a:ext cx="3932237" cy="1600200"/>
+            <a:off x="1482724" y="1752599"/>
+            <a:ext cx="5426158" cy="1371600"/>
           </a:xfrm>
         </p:spPr>
         <p:txBody>
-          <a:bodyPr anchor="b"/>
+          <a:bodyPr anchor="b">
+            <a:normAutofit/>
+          </a:bodyPr>
           <a:lstStyle>
-            <a:lvl1pPr>
-              <a:defRPr sz="3200"/>
+            <a:lvl1pPr algn="ctr">
+              <a:defRPr sz="2800" b="0"/>
             </a:lvl1pPr>
           </a:lstStyle>
           <a:p>
@@ -2504,15 +4935,9 @@
       </p:sp>
       <p:sp>
         <p:nvSpPr>
-          <p:cNvPr id="3" name="Picture Placeholder 2">
-            <a:extLst>
-              <a:ext uri="{FF2B5EF4-FFF2-40B4-BE49-F238E27FC236}">
-                <a16:creationId xmlns:a16="http://schemas.microsoft.com/office/drawing/2014/main" id="{CEABC13B-5994-0E0C-CB6E-279147D32DE8}"/>
-              </a:ext>
-            </a:extLst>
-          </p:cNvPr>
-          <p:cNvSpPr>
-            <a:spLocks noGrp="1"/>
+          <p:cNvPr id="14" name="Picture Placeholder 2"/>
+          <p:cNvSpPr>
+            <a:spLocks noGrp="1" noChangeAspect="1"/>
           </p:cNvSpPr>
           <p:nvPr>
             <p:ph type="pic" idx="1"/>
@@ -2520,118 +4945,147 @@
         </p:nvSpPr>
         <p:spPr>
           <a:xfrm>
-            <a:off x="5183188" y="987425"/>
-            <a:ext cx="6172200" cy="4873625"/>
+            <a:off x="7594682" y="914400"/>
+            <a:ext cx="3280974" cy="4572000"/>
           </a:xfrm>
+          <a:prstGeom prst="roundRect">
+            <a:avLst>
+              <a:gd name="adj" fmla="val 4280"/>
+            </a:avLst>
+          </a:prstGeom>
+          <a:ln w="38100">
+            <a:gradFill flip="none" rotWithShape="1">
+              <a:gsLst>
+                <a:gs pos="0">
+                  <a:schemeClr val="bg2"/>
+                </a:gs>
+                <a:gs pos="100000">
+                  <a:schemeClr val="bg2">
+                    <a:lumMod val="75000"/>
+                  </a:schemeClr>
+                </a:gs>
+              </a:gsLst>
+              <a:lin ang="5400000" scaled="0"/>
+              <a:tileRect/>
+            </a:gradFill>
+          </a:ln>
+          <a:effectLst>
+            <a:innerShdw blurRad="57150" dist="38100" dir="14460000">
+              <a:srgbClr val="000000">
+                <a:alpha val="70000"/>
+              </a:srgbClr>
+            </a:innerShdw>
+          </a:effectLst>
         </p:spPr>
         <p:txBody>
-          <a:bodyPr/>
+          <a:bodyPr anchor="t">
+            <a:normAutofit/>
+          </a:bodyPr>
           <a:lstStyle>
-            <a:lvl1pPr marL="0" indent="0">
-              <a:buNone/>
-              <a:defRPr sz="3200"/>
-            </a:lvl1pPr>
-            <a:lvl2pPr marL="457200" indent="0">
-              <a:buNone/>
-              <a:defRPr sz="2800"/>
-            </a:lvl2pPr>
-            <a:lvl3pPr marL="914400" indent="0">
-              <a:buNone/>
-              <a:defRPr sz="2400"/>
-            </a:lvl3pPr>
-            <a:lvl4pPr marL="1371600" indent="0">
-              <a:buNone/>
-              <a:defRPr sz="2000"/>
-            </a:lvl4pPr>
-            <a:lvl5pPr marL="1828800" indent="0">
-              <a:buNone/>
-              <a:defRPr sz="2000"/>
-            </a:lvl5pPr>
-            <a:lvl6pPr marL="2286000" indent="0">
-              <a:buNone/>
-              <a:defRPr sz="2000"/>
-            </a:lvl6pPr>
-            <a:lvl7pPr marL="2743200" indent="0">
-              <a:buNone/>
-              <a:defRPr sz="2000"/>
-            </a:lvl7pPr>
-            <a:lvl8pPr marL="3200400" indent="0">
-              <a:buNone/>
-              <a:defRPr sz="2000"/>
-            </a:lvl8pPr>
-            <a:lvl9pPr marL="3657600" indent="0">
-              <a:buNone/>
-              <a:defRPr sz="2000"/>
-            </a:lvl9pPr>
-          </a:lstStyle>
-          <a:p>
-            <a:endParaRPr lang="en-US"/>
-          </a:p>
-        </p:txBody>
-      </p:sp>
-      <p:sp>
-        <p:nvSpPr>
-          <p:cNvPr id="4" name="Text Placeholder 3">
-            <a:extLst>
-              <a:ext uri="{FF2B5EF4-FFF2-40B4-BE49-F238E27FC236}">
-                <a16:creationId xmlns:a16="http://schemas.microsoft.com/office/drawing/2014/main" id="{C32F6C55-2AAE-26C1-0BF6-EDE7B08F2422}"/>
-              </a:ext>
-            </a:extLst>
-          </p:cNvPr>
-          <p:cNvSpPr>
-            <a:spLocks noGrp="1"/>
-          </p:cNvSpPr>
-          <p:nvPr>
-            <p:ph type="body" sz="half" idx="2"/>
-          </p:nvPr>
-        </p:nvSpPr>
-        <p:spPr>
-          <a:xfrm>
-            <a:off x="839788" y="2057400"/>
-            <a:ext cx="3932237" cy="3811588"/>
-          </a:xfrm>
-        </p:spPr>
-        <p:txBody>
-          <a:bodyPr/>
-          <a:lstStyle>
-            <a:lvl1pPr marL="0" indent="0">
+            <a:lvl1pPr marL="0" indent="0" algn="ctr">
               <a:buNone/>
               <a:defRPr sz="1600"/>
             </a:lvl1pPr>
             <a:lvl2pPr marL="457200" indent="0">
               <a:buNone/>
-              <a:defRPr sz="1400"/>
+              <a:defRPr sz="1600"/>
             </a:lvl2pPr>
             <a:lvl3pPr marL="914400" indent="0">
               <a:buNone/>
-              <a:defRPr sz="1200"/>
+              <a:defRPr sz="1600"/>
             </a:lvl3pPr>
             <a:lvl4pPr marL="1371600" indent="0">
               <a:buNone/>
-              <a:defRPr sz="1000"/>
+              <a:defRPr sz="1600"/>
             </a:lvl4pPr>
             <a:lvl5pPr marL="1828800" indent="0">
               <a:buNone/>
-              <a:defRPr sz="1000"/>
+              <a:defRPr sz="1600"/>
             </a:lvl5pPr>
             <a:lvl6pPr marL="2286000" indent="0">
               <a:buNone/>
-              <a:defRPr sz="1000"/>
+              <a:defRPr sz="1600"/>
             </a:lvl6pPr>
             <a:lvl7pPr marL="2743200" indent="0">
               <a:buNone/>
-              <a:defRPr sz="1000"/>
+              <a:defRPr sz="1600"/>
             </a:lvl7pPr>
             <a:lvl8pPr marL="3200400" indent="0">
               <a:buNone/>
-              <a:defRPr sz="1000"/>
+              <a:defRPr sz="1600"/>
             </a:lvl8pPr>
             <a:lvl9pPr marL="3657600" indent="0">
               <a:buNone/>
-              <a:defRPr sz="1000"/>
+              <a:defRPr sz="1600"/>
             </a:lvl9pPr>
           </a:lstStyle>
           <a:p>
+            <a:r>
+              <a:rPr lang="en-US"/>
+              <a:t>Click icon to add picture</a:t>
+            </a:r>
+          </a:p>
+        </p:txBody>
+      </p:sp>
+      <p:sp>
+        <p:nvSpPr>
+          <p:cNvPr id="4" name="Text Placeholder 3"/>
+          <p:cNvSpPr>
+            <a:spLocks noGrp="1"/>
+          </p:cNvSpPr>
+          <p:nvPr>
+            <p:ph type="body" sz="half" idx="2"/>
+          </p:nvPr>
+        </p:nvSpPr>
+        <p:spPr>
+          <a:xfrm>
+            <a:off x="1482724" y="3124199"/>
+            <a:ext cx="5426158" cy="1828800"/>
+          </a:xfrm>
+        </p:spPr>
+        <p:txBody>
+          <a:bodyPr>
+            <a:normAutofit/>
+          </a:bodyPr>
+          <a:lstStyle>
+            <a:lvl1pPr marL="0" indent="0" algn="ctr">
+              <a:buNone/>
+              <a:defRPr sz="1800"/>
+            </a:lvl1pPr>
+            <a:lvl2pPr marL="457200" indent="0">
+              <a:buNone/>
+              <a:defRPr sz="1200"/>
+            </a:lvl2pPr>
+            <a:lvl3pPr marL="914400" indent="0">
+              <a:buNone/>
+              <a:defRPr sz="1000"/>
+            </a:lvl3pPr>
+            <a:lvl4pPr marL="1371600" indent="0">
+              <a:buNone/>
+              <a:defRPr sz="900"/>
+            </a:lvl4pPr>
+            <a:lvl5pPr marL="1828800" indent="0">
+              <a:buNone/>
+              <a:defRPr sz="900"/>
+            </a:lvl5pPr>
+            <a:lvl6pPr marL="2286000" indent="0">
+              <a:buNone/>
+              <a:defRPr sz="900"/>
+            </a:lvl6pPr>
+            <a:lvl7pPr marL="2743200" indent="0">
+              <a:buNone/>
+              <a:defRPr sz="900"/>
+            </a:lvl7pPr>
+            <a:lvl8pPr marL="3200400" indent="0">
+              <a:buNone/>
+              <a:defRPr sz="900"/>
+            </a:lvl8pPr>
+            <a:lvl9pPr marL="3657600" indent="0">
+              <a:buNone/>
+              <a:defRPr sz="900"/>
+            </a:lvl9pPr>
+          </a:lstStyle>
+          <a:p>
             <a:pPr lvl="0"/>
             <a:r>
               <a:rPr lang="en-US"/>
@@ -2642,13 +5096,7 @@
       </p:sp>
       <p:sp>
         <p:nvSpPr>
-          <p:cNvPr id="5" name="Date Placeholder 4">
-            <a:extLst>
-              <a:ext uri="{FF2B5EF4-FFF2-40B4-BE49-F238E27FC236}">
-                <a16:creationId xmlns:a16="http://schemas.microsoft.com/office/drawing/2014/main" id="{601A2429-F9D3-3E78-7981-401D14ED88E2}"/>
-              </a:ext>
-            </a:extLst>
-          </p:cNvPr>
+          <p:cNvPr id="5" name="Date Placeholder 4"/>
           <p:cNvSpPr>
             <a:spLocks noGrp="1"/>
           </p:cNvSpPr>
@@ -2663,7 +5111,7 @@
           <a:p>
             <a:fld id="{1705C18A-ADD3-4375-A699-9F4488C0E00E}" type="datetimeFigureOut">
               <a:rPr lang="en-US" smtClean="0"/>
-              <a:t>4/26/2026</a:t>
+              <a:t>5/1/2026</a:t>
             </a:fld>
             <a:endParaRPr lang="en-US"/>
           </a:p>
@@ -2671,13 +5119,7 @@
       </p:sp>
       <p:sp>
         <p:nvSpPr>
-          <p:cNvPr id="6" name="Footer Placeholder 5">
-            <a:extLst>
-              <a:ext uri="{FF2B5EF4-FFF2-40B4-BE49-F238E27FC236}">
-                <a16:creationId xmlns:a16="http://schemas.microsoft.com/office/drawing/2014/main" id="{A8C0E494-2B06-7490-75CD-D34482995EA0}"/>
-              </a:ext>
-            </a:extLst>
-          </p:cNvPr>
+          <p:cNvPr id="6" name="Footer Placeholder 5"/>
           <p:cNvSpPr>
             <a:spLocks noGrp="1"/>
           </p:cNvSpPr>
@@ -2696,13 +5138,7 @@
       </p:sp>
       <p:sp>
         <p:nvSpPr>
-          <p:cNvPr id="7" name="Slide Number Placeholder 6">
-            <a:extLst>
-              <a:ext uri="{FF2B5EF4-FFF2-40B4-BE49-F238E27FC236}">
-                <a16:creationId xmlns:a16="http://schemas.microsoft.com/office/drawing/2014/main" id="{00D05A44-4C88-60C8-3960-9053A9314705}"/>
-              </a:ext>
-            </a:extLst>
-          </p:cNvPr>
+          <p:cNvPr id="7" name="Slide Number Placeholder 6"/>
           <p:cNvSpPr>
             <a:spLocks noGrp="1"/>
           </p:cNvSpPr>
@@ -2726,7 +5162,7 @@
     </p:spTree>
     <p:extLst>
       <p:ext uri="{BB962C8B-B14F-4D97-AF65-F5344CB8AC3E}">
-        <p14:creationId xmlns:p14="http://schemas.microsoft.com/office/powerpoint/2010/main" val="512109746"/>
+        <p14:creationId xmlns:p14="http://schemas.microsoft.com/office/powerpoint/2010/main" val="3664590209"/>
       </p:ext>
     </p:extLst>
   </p:cSld>
@@ -2740,8 +5176,8 @@
 <p:sldMaster xmlns:a="http://schemas.openxmlformats.org/drawingml/2006/main" xmlns:r="http://schemas.openxmlformats.org/officeDocument/2006/relationships" xmlns:p="http://schemas.openxmlformats.org/presentationml/2006/main">
   <p:cSld>
     <p:bg>
-      <p:bgRef idx="1001">
-        <a:schemeClr val="bg1"/>
+      <p:bgRef idx="1003">
+        <a:schemeClr val="bg2"/>
       </p:bgRef>
     </p:bg>
     <p:spTree>
@@ -2758,15 +5194,367 @@
           <a:chExt cx="0" cy="0"/>
         </a:xfrm>
       </p:grpSpPr>
-      <p:sp>
-        <p:nvSpPr>
-          <p:cNvPr id="2" name="Title Placeholder 1">
-            <a:extLst>
-              <a:ext uri="{FF2B5EF4-FFF2-40B4-BE49-F238E27FC236}">
-                <a16:creationId xmlns:a16="http://schemas.microsoft.com/office/drawing/2014/main" id="{E729D442-BAA8-6CC8-33B4-A40A1A47B424}"/>
-              </a:ext>
-            </a:extLst>
-          </p:cNvPr>
+      <p:grpSp>
+        <p:nvGrpSpPr>
+          <p:cNvPr id="7" name="Group 6"/>
+          <p:cNvGrpSpPr/>
+          <p:nvPr/>
+        </p:nvGrpSpPr>
+        <p:grpSpPr>
+          <a:xfrm>
+            <a:off x="150812" y="0"/>
+            <a:ext cx="2436813" cy="6858001"/>
+            <a:chOff x="1320800" y="0"/>
+            <a:chExt cx="2436813" cy="6858001"/>
+          </a:xfrm>
+        </p:grpSpPr>
+        <p:sp>
+          <p:nvSpPr>
+            <p:cNvPr id="8" name="Freeform 6"/>
+            <p:cNvSpPr/>
+            <p:nvPr/>
+          </p:nvSpPr>
+          <p:spPr bwMode="auto">
+            <a:xfrm>
+              <a:off x="1627188" y="0"/>
+              <a:ext cx="1122363" cy="5329238"/>
+            </a:xfrm>
+            <a:custGeom>
+              <a:avLst/>
+              <a:gdLst/>
+              <a:ahLst/>
+              <a:cxnLst/>
+              <a:rect l="0" t="0" r="r" b="b"/>
+              <a:pathLst>
+                <a:path w="707" h="3357">
+                  <a:moveTo>
+                    <a:pt x="0" y="3330"/>
+                  </a:moveTo>
+                  <a:lnTo>
+                    <a:pt x="156" y="3357"/>
+                  </a:lnTo>
+                  <a:lnTo>
+                    <a:pt x="707" y="0"/>
+                  </a:lnTo>
+                  <a:lnTo>
+                    <a:pt x="547" y="0"/>
+                  </a:lnTo>
+                  <a:lnTo>
+                    <a:pt x="0" y="3330"/>
+                  </a:lnTo>
+                  <a:close/>
+                </a:path>
+              </a:pathLst>
+            </a:custGeom>
+            <a:solidFill>
+              <a:schemeClr val="accent1"/>
+            </a:solidFill>
+            <a:ln>
+              <a:noFill/>
+            </a:ln>
+          </p:spPr>
+          <p:txBody>
+            <a:bodyPr/>
+            <a:lstStyle/>
+            <a:p>
+              <a:endParaRPr lang="en-US"/>
+            </a:p>
+          </p:txBody>
+        </p:sp>
+        <p:sp>
+          <p:nvSpPr>
+            <p:cNvPr id="9" name="Freeform 7"/>
+            <p:cNvSpPr/>
+            <p:nvPr/>
+          </p:nvSpPr>
+          <p:spPr bwMode="auto">
+            <a:xfrm>
+              <a:off x="1320800" y="0"/>
+              <a:ext cx="1117600" cy="5276850"/>
+            </a:xfrm>
+            <a:custGeom>
+              <a:avLst/>
+              <a:gdLst/>
+              <a:ahLst/>
+              <a:cxnLst/>
+              <a:rect l="0" t="0" r="r" b="b"/>
+              <a:pathLst>
+                <a:path w="704" h="3324">
+                  <a:moveTo>
+                    <a:pt x="704" y="0"/>
+                  </a:moveTo>
+                  <a:lnTo>
+                    <a:pt x="545" y="0"/>
+                  </a:lnTo>
+                  <a:lnTo>
+                    <a:pt x="0" y="3300"/>
+                  </a:lnTo>
+                  <a:lnTo>
+                    <a:pt x="157" y="3324"/>
+                  </a:lnTo>
+                  <a:lnTo>
+                    <a:pt x="704" y="0"/>
+                  </a:lnTo>
+                  <a:close/>
+                </a:path>
+              </a:pathLst>
+            </a:custGeom>
+            <a:solidFill>
+              <a:schemeClr val="tx1">
+                <a:lumMod val="65000"/>
+                <a:lumOff val="35000"/>
+              </a:schemeClr>
+            </a:solidFill>
+            <a:ln>
+              <a:noFill/>
+            </a:ln>
+          </p:spPr>
+          <p:txBody>
+            <a:bodyPr/>
+            <a:lstStyle/>
+            <a:p>
+              <a:endParaRPr lang="en-US"/>
+            </a:p>
+          </p:txBody>
+        </p:sp>
+        <p:sp>
+          <p:nvSpPr>
+            <p:cNvPr id="10" name="Freeform 8"/>
+            <p:cNvSpPr/>
+            <p:nvPr/>
+          </p:nvSpPr>
+          <p:spPr bwMode="auto">
+            <a:xfrm>
+              <a:off x="1320800" y="5238750"/>
+              <a:ext cx="1228725" cy="1619250"/>
+            </a:xfrm>
+            <a:custGeom>
+              <a:avLst/>
+              <a:gdLst/>
+              <a:ahLst/>
+              <a:cxnLst/>
+              <a:rect l="0" t="0" r="r" b="b"/>
+              <a:pathLst>
+                <a:path w="774" h="1020">
+                  <a:moveTo>
+                    <a:pt x="0" y="0"/>
+                  </a:moveTo>
+                  <a:lnTo>
+                    <a:pt x="740" y="1020"/>
+                  </a:lnTo>
+                  <a:lnTo>
+                    <a:pt x="774" y="1020"/>
+                  </a:lnTo>
+                  <a:lnTo>
+                    <a:pt x="0" y="0"/>
+                  </a:lnTo>
+                  <a:close/>
+                </a:path>
+              </a:pathLst>
+            </a:custGeom>
+            <a:solidFill>
+              <a:schemeClr val="tx1">
+                <a:lumMod val="85000"/>
+                <a:lumOff val="15000"/>
+              </a:schemeClr>
+            </a:solidFill>
+            <a:ln>
+              <a:noFill/>
+            </a:ln>
+          </p:spPr>
+          <p:txBody>
+            <a:bodyPr/>
+            <a:lstStyle/>
+            <a:p>
+              <a:endParaRPr lang="en-US"/>
+            </a:p>
+          </p:txBody>
+        </p:sp>
+        <p:sp>
+          <p:nvSpPr>
+            <p:cNvPr id="11" name="Freeform 9"/>
+            <p:cNvSpPr/>
+            <p:nvPr/>
+          </p:nvSpPr>
+          <p:spPr bwMode="auto">
+            <a:xfrm>
+              <a:off x="1627188" y="5291138"/>
+              <a:ext cx="1495425" cy="1566863"/>
+            </a:xfrm>
+            <a:custGeom>
+              <a:avLst/>
+              <a:gdLst/>
+              <a:ahLst/>
+              <a:cxnLst/>
+              <a:rect l="0" t="0" r="r" b="b"/>
+              <a:pathLst>
+                <a:path w="942" h="987">
+                  <a:moveTo>
+                    <a:pt x="0" y="0"/>
+                  </a:moveTo>
+                  <a:lnTo>
+                    <a:pt x="909" y="987"/>
+                  </a:lnTo>
+                  <a:lnTo>
+                    <a:pt x="942" y="987"/>
+                  </a:lnTo>
+                  <a:lnTo>
+                    <a:pt x="0" y="0"/>
+                  </a:lnTo>
+                  <a:close/>
+                </a:path>
+              </a:pathLst>
+            </a:custGeom>
+            <a:solidFill>
+              <a:schemeClr val="accent1">
+                <a:lumMod val="50000"/>
+              </a:schemeClr>
+            </a:solidFill>
+            <a:ln>
+              <a:noFill/>
+            </a:ln>
+          </p:spPr>
+          <p:txBody>
+            <a:bodyPr/>
+            <a:lstStyle/>
+            <a:p>
+              <a:endParaRPr lang="en-US"/>
+            </a:p>
+          </p:txBody>
+        </p:sp>
+        <p:sp>
+          <p:nvSpPr>
+            <p:cNvPr id="12" name="Freeform 10"/>
+            <p:cNvSpPr/>
+            <p:nvPr/>
+          </p:nvSpPr>
+          <p:spPr bwMode="auto">
+            <a:xfrm>
+              <a:off x="1627188" y="5286375"/>
+              <a:ext cx="2130425" cy="1571625"/>
+            </a:xfrm>
+            <a:custGeom>
+              <a:avLst/>
+              <a:gdLst/>
+              <a:ahLst/>
+              <a:cxnLst/>
+              <a:rect l="0" t="0" r="r" b="b"/>
+              <a:pathLst>
+                <a:path w="1342" h="990">
+                  <a:moveTo>
+                    <a:pt x="0" y="3"/>
+                  </a:moveTo>
+                  <a:lnTo>
+                    <a:pt x="942" y="990"/>
+                  </a:lnTo>
+                  <a:lnTo>
+                    <a:pt x="1342" y="990"/>
+                  </a:lnTo>
+                  <a:lnTo>
+                    <a:pt x="156" y="27"/>
+                  </a:lnTo>
+                  <a:lnTo>
+                    <a:pt x="0" y="0"/>
+                  </a:lnTo>
+                  <a:lnTo>
+                    <a:pt x="0" y="3"/>
+                  </a:lnTo>
+                  <a:close/>
+                </a:path>
+              </a:pathLst>
+            </a:custGeom>
+            <a:solidFill>
+              <a:schemeClr val="accent1">
+                <a:lumMod val="75000"/>
+              </a:schemeClr>
+            </a:solidFill>
+            <a:ln>
+              <a:noFill/>
+            </a:ln>
+          </p:spPr>
+          <p:txBody>
+            <a:bodyPr/>
+            <a:lstStyle/>
+            <a:p>
+              <a:endParaRPr lang="en-US"/>
+            </a:p>
+          </p:txBody>
+        </p:sp>
+        <p:sp>
+          <p:nvSpPr>
+            <p:cNvPr id="13" name="Freeform 11"/>
+            <p:cNvSpPr/>
+            <p:nvPr/>
+          </p:nvSpPr>
+          <p:spPr bwMode="auto">
+            <a:xfrm>
+              <a:off x="1320800" y="5238750"/>
+              <a:ext cx="1695450" cy="1619250"/>
+            </a:xfrm>
+            <a:custGeom>
+              <a:avLst/>
+              <a:gdLst/>
+              <a:ahLst/>
+              <a:cxnLst/>
+              <a:rect l="0" t="0" r="r" b="b"/>
+              <a:pathLst>
+                <a:path w="1068" h="1020">
+                  <a:moveTo>
+                    <a:pt x="1068" y="1020"/>
+                  </a:moveTo>
+                  <a:lnTo>
+                    <a:pt x="184" y="60"/>
+                  </a:lnTo>
+                  <a:lnTo>
+                    <a:pt x="154" y="27"/>
+                  </a:lnTo>
+                  <a:lnTo>
+                    <a:pt x="157" y="27"/>
+                  </a:lnTo>
+                  <a:lnTo>
+                    <a:pt x="157" y="24"/>
+                  </a:lnTo>
+                  <a:lnTo>
+                    <a:pt x="154" y="24"/>
+                  </a:lnTo>
+                  <a:lnTo>
+                    <a:pt x="0" y="0"/>
+                  </a:lnTo>
+                  <a:lnTo>
+                    <a:pt x="0" y="0"/>
+                  </a:lnTo>
+                  <a:lnTo>
+                    <a:pt x="774" y="1020"/>
+                  </a:lnTo>
+                  <a:lnTo>
+                    <a:pt x="1068" y="1020"/>
+                  </a:lnTo>
+                  <a:close/>
+                </a:path>
+              </a:pathLst>
+            </a:custGeom>
+            <a:solidFill>
+              <a:schemeClr val="tx1">
+                <a:lumMod val="75000"/>
+                <a:lumOff val="25000"/>
+              </a:schemeClr>
+            </a:solidFill>
+            <a:ln>
+              <a:noFill/>
+            </a:ln>
+          </p:spPr>
+          <p:txBody>
+            <a:bodyPr/>
+            <a:lstStyle/>
+            <a:p>
+              <a:endParaRPr lang="en-US"/>
+            </a:p>
+          </p:txBody>
+        </p:sp>
+      </p:grpSp>
+      <p:sp>
+        <p:nvSpPr>
+          <p:cNvPr id="2" name="Title Placeholder 1"/>
           <p:cNvSpPr>
             <a:spLocks noGrp="1"/>
           </p:cNvSpPr>
@@ -2776,8 +5564,41 @@
         </p:nvSpPr>
         <p:spPr>
           <a:xfrm>
-            <a:off x="838200" y="365125"/>
-            <a:ext cx="10515600" cy="1325563"/>
+            <a:off x="1484311" y="685800"/>
+            <a:ext cx="10018713" cy="1752599"/>
+          </a:xfrm>
+          <a:prstGeom prst="rect">
+            <a:avLst/>
+          </a:prstGeom>
+          <a:effectLst/>
+        </p:spPr>
+        <p:txBody>
+          <a:bodyPr vert="horz" lIns="91440" tIns="45720" rIns="91440" bIns="45720" rtlCol="0" anchor="ctr">
+            <a:normAutofit/>
+          </a:bodyPr>
+          <a:lstStyle/>
+          <a:p>
+            <a:r>
+              <a:rPr lang="en-US"/>
+              <a:t>Click to edit Master title style</a:t>
+            </a:r>
+          </a:p>
+        </p:txBody>
+      </p:sp>
+      <p:sp>
+        <p:nvSpPr>
+          <p:cNvPr id="3" name="Text Placeholder 2"/>
+          <p:cNvSpPr>
+            <a:spLocks noGrp="1"/>
+          </p:cNvSpPr>
+          <p:nvPr>
+            <p:ph type="body" idx="1"/>
+          </p:nvPr>
+        </p:nvSpPr>
+        <p:spPr>
+          <a:xfrm>
+            <a:off x="1484310" y="2666999"/>
+            <a:ext cx="10018713" cy="3124201"/>
           </a:xfrm>
           <a:prstGeom prst="rect">
             <a:avLst/>
@@ -2789,100 +5610,97 @@
           </a:bodyPr>
           <a:lstStyle/>
           <a:p>
-            <a:r>
-              <a:rPr lang="en-US"/>
-              <a:t>Click to edit Master title style</a:t>
-            </a:r>
-          </a:p>
-        </p:txBody>
-      </p:sp>
-      <p:sp>
-        <p:nvSpPr>
-          <p:cNvPr id="3" name="Text Placeholder 2">
-            <a:extLst>
-              <a:ext uri="{FF2B5EF4-FFF2-40B4-BE49-F238E27FC236}">
-                <a16:creationId xmlns:a16="http://schemas.microsoft.com/office/drawing/2014/main" id="{E233261F-86E2-49E4-66D9-110754A6DE27}"/>
-              </a:ext>
-            </a:extLst>
-          </p:cNvPr>
-          <p:cNvSpPr>
-            <a:spLocks noGrp="1"/>
-          </p:cNvSpPr>
-          <p:nvPr>
-            <p:ph type="body" idx="1"/>
+            <a:pPr lvl="0"/>
+            <a:r>
+              <a:rPr lang="en-US"/>
+              <a:t>Click to edit Master text styles</a:t>
+            </a:r>
+          </a:p>
+          <a:p>
+            <a:pPr lvl="1"/>
+            <a:r>
+              <a:rPr lang="en-US"/>
+              <a:t>Second level</a:t>
+            </a:r>
+          </a:p>
+          <a:p>
+            <a:pPr lvl="2"/>
+            <a:r>
+              <a:rPr lang="en-US"/>
+              <a:t>Third level</a:t>
+            </a:r>
+          </a:p>
+          <a:p>
+            <a:pPr lvl="3"/>
+            <a:r>
+              <a:rPr lang="en-US"/>
+              <a:t>Fourth level</a:t>
+            </a:r>
+          </a:p>
+          <a:p>
+            <a:pPr lvl="4"/>
+            <a:r>
+              <a:rPr lang="en-US"/>
+              <a:t>Fifth level</a:t>
+            </a:r>
+          </a:p>
+        </p:txBody>
+      </p:sp>
+      <p:sp>
+        <p:nvSpPr>
+          <p:cNvPr id="4" name="Date Placeholder 3"/>
+          <p:cNvSpPr>
+            <a:spLocks noGrp="1"/>
+          </p:cNvSpPr>
+          <p:nvPr>
+            <p:ph type="dt" sz="half" idx="2"/>
           </p:nvPr>
         </p:nvSpPr>
         <p:spPr>
           <a:xfrm>
-            <a:off x="838200" y="1825625"/>
-            <a:ext cx="10515600" cy="4351338"/>
+            <a:off x="9732656" y="5883275"/>
+            <a:ext cx="1143000" cy="365125"/>
           </a:xfrm>
           <a:prstGeom prst="rect">
             <a:avLst/>
           </a:prstGeom>
         </p:spPr>
         <p:txBody>
-          <a:bodyPr vert="horz" lIns="91440" tIns="45720" rIns="91440" bIns="45720" rtlCol="0">
-            <a:normAutofit/>
-          </a:bodyPr>
-          <a:lstStyle/>
-          <a:p>
-            <a:pPr lvl="0"/>
-            <a:r>
-              <a:rPr lang="en-US"/>
-              <a:t>Click to edit Master text styles</a:t>
-            </a:r>
-          </a:p>
-          <a:p>
-            <a:pPr lvl="1"/>
-            <a:r>
-              <a:rPr lang="en-US"/>
-              <a:t>Second level</a:t>
-            </a:r>
-          </a:p>
-          <a:p>
-            <a:pPr lvl="2"/>
-            <a:r>
-              <a:rPr lang="en-US"/>
-              <a:t>Third level</a:t>
-            </a:r>
-          </a:p>
-          <a:p>
-            <a:pPr lvl="3"/>
-            <a:r>
-              <a:rPr lang="en-US"/>
-              <a:t>Fourth level</a:t>
-            </a:r>
-          </a:p>
-          <a:p>
-            <a:pPr lvl="4"/>
-            <a:r>
-              <a:rPr lang="en-US"/>
-              <a:t>Fifth level</a:t>
-            </a:r>
-          </a:p>
-        </p:txBody>
-      </p:sp>
-      <p:sp>
-        <p:nvSpPr>
-          <p:cNvPr id="4" name="Date Placeholder 3">
-            <a:extLst>
-              <a:ext uri="{FF2B5EF4-FFF2-40B4-BE49-F238E27FC236}">
-                <a16:creationId xmlns:a16="http://schemas.microsoft.com/office/drawing/2014/main" id="{14A71CC4-33B5-25F7-929A-0EA959E382BF}"/>
-              </a:ext>
-            </a:extLst>
-          </p:cNvPr>
-          <p:cNvSpPr>
-            <a:spLocks noGrp="1"/>
-          </p:cNvSpPr>
-          <p:nvPr>
-            <p:ph type="dt" sz="half" idx="2"/>
+          <a:bodyPr vert="horz" lIns="91440" tIns="45720" rIns="91440" bIns="45720" rtlCol="0" anchor="ctr"/>
+          <a:lstStyle>
+            <a:lvl1pPr algn="r">
+              <a:defRPr sz="1000" b="0" i="0">
+                <a:solidFill>
+                  <a:schemeClr val="tx1"/>
+                </a:solidFill>
+                <a:effectLst/>
+                <a:latin typeface="+mn-lt"/>
+              </a:defRPr>
+            </a:lvl1pPr>
+          </a:lstStyle>
+          <a:p>
+            <a:fld id="{1705C18A-ADD3-4375-A699-9F4488C0E00E}" type="datetimeFigureOut">
+              <a:rPr lang="en-US" smtClean="0"/>
+              <a:t>5/1/2026</a:t>
+            </a:fld>
+            <a:endParaRPr lang="en-US"/>
+          </a:p>
+        </p:txBody>
+      </p:sp>
+      <p:sp>
+        <p:nvSpPr>
+          <p:cNvPr id="5" name="Footer Placeholder 4"/>
+          <p:cNvSpPr>
+            <a:spLocks noGrp="1"/>
+          </p:cNvSpPr>
+          <p:nvPr>
+            <p:ph type="ftr" sz="quarter" idx="3"/>
           </p:nvPr>
         </p:nvSpPr>
         <p:spPr>
           <a:xfrm>
-            <a:off x="838200" y="6356350"/>
-            <a:ext cx="2743200" cy="365125"/>
+            <a:off x="2572279" y="5883275"/>
+            <a:ext cx="7084177" cy="365125"/>
           </a:xfrm>
           <a:prstGeom prst="rect">
             <a:avLst/>
@@ -2892,44 +5710,34 @@
           <a:bodyPr vert="horz" lIns="91440" tIns="45720" rIns="91440" bIns="45720" rtlCol="0" anchor="ctr"/>
           <a:lstStyle>
             <a:lvl1pPr algn="l">
-              <a:defRPr sz="1200">
-                <a:solidFill>
-                  <a:schemeClr val="tx1">
-                    <a:tint val="82000"/>
-                  </a:schemeClr>
-                </a:solidFill>
+              <a:defRPr sz="1000" b="0" i="0">
+                <a:solidFill>
+                  <a:schemeClr val="tx1"/>
+                </a:solidFill>
+                <a:effectLst/>
+                <a:latin typeface="+mn-lt"/>
               </a:defRPr>
             </a:lvl1pPr>
           </a:lstStyle>
           <a:p>
-            <a:fld id="{1705C18A-ADD3-4375-A699-9F4488C0E00E}" type="datetimeFigureOut">
-              <a:rPr lang="en-US" smtClean="0"/>
-              <a:t>4/26/2026</a:t>
-            </a:fld>
             <a:endParaRPr lang="en-US"/>
           </a:p>
         </p:txBody>
       </p:sp>
       <p:sp>
         <p:nvSpPr>
-          <p:cNvPr id="5" name="Footer Placeholder 4">
-            <a:extLst>
-              <a:ext uri="{FF2B5EF4-FFF2-40B4-BE49-F238E27FC236}">
-                <a16:creationId xmlns:a16="http://schemas.microsoft.com/office/drawing/2014/main" id="{EF43A9B7-0FC1-4F53-EF5A-5CF1303BF443}"/>
-              </a:ext>
-            </a:extLst>
-          </p:cNvPr>
-          <p:cNvSpPr>
-            <a:spLocks noGrp="1"/>
-          </p:cNvSpPr>
-          <p:nvPr>
-            <p:ph type="ftr" sz="quarter" idx="3"/>
+          <p:cNvPr id="6" name="Slide Number Placeholder 5"/>
+          <p:cNvSpPr>
+            <a:spLocks noGrp="1"/>
+          </p:cNvSpPr>
+          <p:nvPr>
+            <p:ph type="sldNum" sz="quarter" idx="4"/>
           </p:nvPr>
         </p:nvSpPr>
         <p:spPr>
           <a:xfrm>
-            <a:off x="4038600" y="6356350"/>
-            <a:ext cx="4114800" cy="365125"/>
+            <a:off x="10951856" y="5883275"/>
+            <a:ext cx="551167" cy="365125"/>
           </a:xfrm>
           <a:prstGeom prst="rect">
             <a:avLst/>
@@ -2938,56 +5746,13 @@
         <p:txBody>
           <a:bodyPr vert="horz" lIns="91440" tIns="45720" rIns="91440" bIns="45720" rtlCol="0" anchor="ctr"/>
           <a:lstStyle>
-            <a:lvl1pPr algn="ctr">
-              <a:defRPr sz="1200">
-                <a:solidFill>
-                  <a:schemeClr val="tx1">
-                    <a:tint val="82000"/>
-                  </a:schemeClr>
-                </a:solidFill>
-              </a:defRPr>
-            </a:lvl1pPr>
-          </a:lstStyle>
-          <a:p>
-            <a:endParaRPr lang="en-US"/>
-          </a:p>
-        </p:txBody>
-      </p:sp>
-      <p:sp>
-        <p:nvSpPr>
-          <p:cNvPr id="6" name="Slide Number Placeholder 5">
-            <a:extLst>
-              <a:ext uri="{FF2B5EF4-FFF2-40B4-BE49-F238E27FC236}">
-                <a16:creationId xmlns:a16="http://schemas.microsoft.com/office/drawing/2014/main" id="{CD0FF4BC-CA89-1C4B-B84A-73F73E17A062}"/>
-              </a:ext>
-            </a:extLst>
-          </p:cNvPr>
-          <p:cNvSpPr>
-            <a:spLocks noGrp="1"/>
-          </p:cNvSpPr>
-          <p:nvPr>
-            <p:ph type="sldNum" sz="quarter" idx="4"/>
-          </p:nvPr>
-        </p:nvSpPr>
-        <p:spPr>
-          <a:xfrm>
-            <a:off x="8610600" y="6356350"/>
-            <a:ext cx="2743200" cy="365125"/>
-          </a:xfrm>
-          <a:prstGeom prst="rect">
-            <a:avLst/>
-          </a:prstGeom>
-        </p:spPr>
-        <p:txBody>
-          <a:bodyPr vert="horz" lIns="91440" tIns="45720" rIns="91440" bIns="45720" rtlCol="0" anchor="ctr"/>
-          <a:lstStyle>
             <a:lvl1pPr algn="r">
-              <a:defRPr sz="1200">
-                <a:solidFill>
-                  <a:schemeClr val="tx1">
-                    <a:tint val="82000"/>
-                  </a:schemeClr>
-                </a:solidFill>
+              <a:defRPr sz="1000" b="0" i="0">
+                <a:solidFill>
+                  <a:schemeClr val="tx1"/>
+                </a:solidFill>
+                <a:effectLst/>
+                <a:latin typeface="+mn-lt"/>
               </a:defRPr>
             </a:lvl1pPr>
           </a:lstStyle>
@@ -3003,202 +5768,328 @@
     </p:spTree>
     <p:extLst>
       <p:ext uri="{BB962C8B-B14F-4D97-AF65-F5344CB8AC3E}">
-        <p14:creationId xmlns:p14="http://schemas.microsoft.com/office/powerpoint/2010/main" val="3401155932"/>
+        <p14:creationId xmlns:p14="http://schemas.microsoft.com/office/powerpoint/2010/main" val="2462670710"/>
       </p:ext>
     </p:extLst>
   </p:cSld>
   <p:clrMap bg1="lt1" tx1="dk1" bg2="lt2" tx2="dk2" accent1="accent1" accent2="accent2" accent3="accent3" accent4="accent4" accent5="accent5" accent6="accent6" hlink="hlink" folHlink="folHlink"/>
   <p:sldLayoutIdLst>
-    <p:sldLayoutId id="2147483649" r:id="rId1"/>
-    <p:sldLayoutId id="2147483650" r:id="rId2"/>
-    <p:sldLayoutId id="2147483651" r:id="rId3"/>
-    <p:sldLayoutId id="2147483652" r:id="rId4"/>
-    <p:sldLayoutId id="2147483653" r:id="rId5"/>
-    <p:sldLayoutId id="2147483654" r:id="rId6"/>
-    <p:sldLayoutId id="2147483655" r:id="rId7"/>
-    <p:sldLayoutId id="2147483656" r:id="rId8"/>
-    <p:sldLayoutId id="2147483657" r:id="rId9"/>
-    <p:sldLayoutId id="2147483658" r:id="rId10"/>
-    <p:sldLayoutId id="2147483659" r:id="rId11"/>
+    <p:sldLayoutId id="2147483661" r:id="rId1"/>
+    <p:sldLayoutId id="2147483662" r:id="rId2"/>
+    <p:sldLayoutId id="2147483663" r:id="rId3"/>
+    <p:sldLayoutId id="2147483664" r:id="rId4"/>
+    <p:sldLayoutId id="2147483665" r:id="rId5"/>
+    <p:sldLayoutId id="2147483666" r:id="rId6"/>
+    <p:sldLayoutId id="2147483667" r:id="rId7"/>
+    <p:sldLayoutId id="2147483668" r:id="rId8"/>
+    <p:sldLayoutId id="2147483669" r:id="rId9"/>
+    <p:sldLayoutId id="2147483670" r:id="rId10"/>
+    <p:sldLayoutId id="2147483671" r:id="rId11"/>
+    <p:sldLayoutId id="2147483672" r:id="rId12"/>
+    <p:sldLayoutId id="2147483673" r:id="rId13"/>
+    <p:sldLayoutId id="2147483674" r:id="rId14"/>
+    <p:sldLayoutId id="2147483675" r:id="rId15"/>
+    <p:sldLayoutId id="2147483676" r:id="rId16"/>
+    <p:sldLayoutId id="2147483677" r:id="rId17"/>
   </p:sldLayoutIdLst>
   <p:txStyles>
     <p:titleStyle>
-      <a:lvl1pPr algn="l" defTabSz="914400" rtl="0" eaLnBrk="1" latinLnBrk="0" hangingPunct="1">
-        <a:lnSpc>
-          <a:spcPct val="90000"/>
-        </a:lnSpc>
+      <a:lvl1pPr algn="ctr" defTabSz="457200" rtl="0" eaLnBrk="1" latinLnBrk="0" hangingPunct="1">
         <a:spcBef>
           <a:spcPct val="0"/>
         </a:spcBef>
         <a:buNone/>
-        <a:defRPr sz="4400" kern="1200">
+        <a:defRPr sz="4000" kern="1200" cap="none">
+          <a:ln w="3175" cmpd="sng">
+            <a:noFill/>
+          </a:ln>
           <a:solidFill>
             <a:schemeClr val="tx1"/>
           </a:solidFill>
+          <a:effectLst/>
           <a:latin typeface="+mj-lt"/>
           <a:ea typeface="+mj-ea"/>
           <a:cs typeface="+mj-cs"/>
         </a:defRPr>
       </a:lvl1pPr>
+      <a:lvl2pPr eaLnBrk="1" hangingPunct="1">
+        <a:defRPr>
+          <a:solidFill>
+            <a:schemeClr val="tx2"/>
+          </a:solidFill>
+        </a:defRPr>
+      </a:lvl2pPr>
+      <a:lvl3pPr eaLnBrk="1" hangingPunct="1">
+        <a:defRPr>
+          <a:solidFill>
+            <a:schemeClr val="tx2"/>
+          </a:solidFill>
+        </a:defRPr>
+      </a:lvl3pPr>
+      <a:lvl4pPr eaLnBrk="1" hangingPunct="1">
+        <a:defRPr>
+          <a:solidFill>
+            <a:schemeClr val="tx2"/>
+          </a:solidFill>
+        </a:defRPr>
+      </a:lvl4pPr>
+      <a:lvl5pPr eaLnBrk="1" hangingPunct="1">
+        <a:defRPr>
+          <a:solidFill>
+            <a:schemeClr val="tx2"/>
+          </a:solidFill>
+        </a:defRPr>
+      </a:lvl5pPr>
+      <a:lvl6pPr eaLnBrk="1" hangingPunct="1">
+        <a:defRPr>
+          <a:solidFill>
+            <a:schemeClr val="tx2"/>
+          </a:solidFill>
+        </a:defRPr>
+      </a:lvl6pPr>
+      <a:lvl7pPr eaLnBrk="1" hangingPunct="1">
+        <a:defRPr>
+          <a:solidFill>
+            <a:schemeClr val="tx2"/>
+          </a:solidFill>
+        </a:defRPr>
+      </a:lvl7pPr>
+      <a:lvl8pPr eaLnBrk="1" hangingPunct="1">
+        <a:defRPr>
+          <a:solidFill>
+            <a:schemeClr val="tx2"/>
+          </a:solidFill>
+        </a:defRPr>
+      </a:lvl8pPr>
+      <a:lvl9pPr eaLnBrk="1" hangingPunct="1">
+        <a:defRPr>
+          <a:solidFill>
+            <a:schemeClr val="tx2"/>
+          </a:solidFill>
+        </a:defRPr>
+      </a:lvl9pPr>
     </p:titleStyle>
     <p:bodyStyle>
-      <a:lvl1pPr marL="228600" indent="-228600" algn="l" defTabSz="914400" rtl="0" eaLnBrk="1" latinLnBrk="0" hangingPunct="1">
-        <a:lnSpc>
-          <a:spcPct val="90000"/>
-        </a:lnSpc>
+      <a:lvl1pPr marL="285750" indent="-285750" algn="l" defTabSz="457200" rtl="0" eaLnBrk="1" latinLnBrk="0" hangingPunct="1">
         <a:spcBef>
-          <a:spcPts val="1000"/>
+          <a:spcPct val="20000"/>
         </a:spcBef>
-        <a:buFont typeface="Arial" panose="020B0604020202020204" pitchFamily="34" charset="0"/>
+        <a:spcAft>
+          <a:spcPts val="600"/>
+        </a:spcAft>
+        <a:buClr>
+          <a:schemeClr val="accent1">
+            <a:lumMod val="75000"/>
+          </a:schemeClr>
+        </a:buClr>
+        <a:buSzPct val="145000"/>
+        <a:buFont typeface="Arial"/>
         <a:buChar char="•"/>
-        <a:defRPr sz="2800" kern="1200">
+        <a:defRPr sz="2400" kern="1200" cap="none">
           <a:solidFill>
             <a:schemeClr val="tx1"/>
           </a:solidFill>
+          <a:effectLst/>
           <a:latin typeface="+mn-lt"/>
           <a:ea typeface="+mn-ea"/>
           <a:cs typeface="+mn-cs"/>
         </a:defRPr>
       </a:lvl1pPr>
-      <a:lvl2pPr marL="685800" indent="-228600" algn="l" defTabSz="914400" rtl="0" eaLnBrk="1" latinLnBrk="0" hangingPunct="1">
-        <a:lnSpc>
-          <a:spcPct val="90000"/>
-        </a:lnSpc>
+      <a:lvl2pPr marL="742950" indent="-285750" algn="l" defTabSz="457200" rtl="0" eaLnBrk="1" latinLnBrk="0" hangingPunct="1">
         <a:spcBef>
-          <a:spcPts val="500"/>
+          <a:spcPct val="20000"/>
         </a:spcBef>
-        <a:buFont typeface="Arial" panose="020B0604020202020204" pitchFamily="34" charset="0"/>
+        <a:spcAft>
+          <a:spcPts val="600"/>
+        </a:spcAft>
+        <a:buClr>
+          <a:schemeClr val="accent1">
+            <a:lumMod val="75000"/>
+          </a:schemeClr>
+        </a:buClr>
+        <a:buSzPct val="145000"/>
+        <a:buFont typeface="Arial"/>
         <a:buChar char="•"/>
-        <a:defRPr sz="2400" kern="1200">
+        <a:defRPr sz="2000" kern="1200" cap="none">
           <a:solidFill>
             <a:schemeClr val="tx1"/>
           </a:solidFill>
+          <a:effectLst/>
           <a:latin typeface="+mn-lt"/>
           <a:ea typeface="+mn-ea"/>
           <a:cs typeface="+mn-cs"/>
         </a:defRPr>
       </a:lvl2pPr>
-      <a:lvl3pPr marL="1143000" indent="-228600" algn="l" defTabSz="914400" rtl="0" eaLnBrk="1" latinLnBrk="0" hangingPunct="1">
-        <a:lnSpc>
-          <a:spcPct val="90000"/>
-        </a:lnSpc>
+      <a:lvl3pPr marL="1200150" indent="-285750" algn="l" defTabSz="457200" rtl="0" eaLnBrk="1" latinLnBrk="0" hangingPunct="1">
         <a:spcBef>
-          <a:spcPts val="500"/>
+          <a:spcPct val="20000"/>
         </a:spcBef>
-        <a:buFont typeface="Arial" panose="020B0604020202020204" pitchFamily="34" charset="0"/>
+        <a:spcAft>
+          <a:spcPts val="600"/>
+        </a:spcAft>
+        <a:buClr>
+          <a:schemeClr val="accent1">
+            <a:lumMod val="75000"/>
+          </a:schemeClr>
+        </a:buClr>
+        <a:buSzPct val="145000"/>
+        <a:buFont typeface="Arial"/>
         <a:buChar char="•"/>
-        <a:defRPr sz="2000" kern="1200">
+        <a:defRPr sz="1800" kern="1200" cap="none">
           <a:solidFill>
             <a:schemeClr val="tx1"/>
           </a:solidFill>
+          <a:effectLst/>
           <a:latin typeface="+mn-lt"/>
           <a:ea typeface="+mn-ea"/>
           <a:cs typeface="+mn-cs"/>
         </a:defRPr>
       </a:lvl3pPr>
-      <a:lvl4pPr marL="1600200" indent="-228600" algn="l" defTabSz="914400" rtl="0" eaLnBrk="1" latinLnBrk="0" hangingPunct="1">
-        <a:lnSpc>
-          <a:spcPct val="90000"/>
-        </a:lnSpc>
+      <a:lvl4pPr marL="1543050" indent="-171450" algn="l" defTabSz="457200" rtl="0" eaLnBrk="1" latinLnBrk="0" hangingPunct="1">
         <a:spcBef>
-          <a:spcPts val="500"/>
+          <a:spcPct val="20000"/>
         </a:spcBef>
-        <a:buFont typeface="Arial" panose="020B0604020202020204" pitchFamily="34" charset="0"/>
+        <a:spcAft>
+          <a:spcPts val="600"/>
+        </a:spcAft>
+        <a:buClr>
+          <a:schemeClr val="accent1">
+            <a:lumMod val="75000"/>
+          </a:schemeClr>
+        </a:buClr>
+        <a:buSzPct val="145000"/>
+        <a:buFont typeface="Arial"/>
         <a:buChar char="•"/>
-        <a:defRPr sz="1800" kern="1200">
+        <a:defRPr sz="1600" kern="1200" cap="none">
           <a:solidFill>
             <a:schemeClr val="tx1"/>
           </a:solidFill>
+          <a:effectLst/>
           <a:latin typeface="+mn-lt"/>
           <a:ea typeface="+mn-ea"/>
           <a:cs typeface="+mn-cs"/>
         </a:defRPr>
       </a:lvl4pPr>
-      <a:lvl5pPr marL="2057400" indent="-228600" algn="l" defTabSz="914400" rtl="0" eaLnBrk="1" latinLnBrk="0" hangingPunct="1">
-        <a:lnSpc>
-          <a:spcPct val="90000"/>
-        </a:lnSpc>
+      <a:lvl5pPr marL="2000250" indent="-171450" algn="l" defTabSz="457200" rtl="0" eaLnBrk="1" latinLnBrk="0" hangingPunct="1">
         <a:spcBef>
-          <a:spcPts val="500"/>
+          <a:spcPct val="20000"/>
         </a:spcBef>
-        <a:buFont typeface="Arial" panose="020B0604020202020204" pitchFamily="34" charset="0"/>
+        <a:spcAft>
+          <a:spcPts val="600"/>
+        </a:spcAft>
+        <a:buClr>
+          <a:schemeClr val="accent1">
+            <a:lumMod val="75000"/>
+          </a:schemeClr>
+        </a:buClr>
+        <a:buSzPct val="145000"/>
+        <a:buFont typeface="Arial"/>
         <a:buChar char="•"/>
-        <a:defRPr sz="1800" kern="1200">
+        <a:defRPr sz="1400" kern="1200" cap="none">
           <a:solidFill>
             <a:schemeClr val="tx1"/>
           </a:solidFill>
+          <a:effectLst/>
           <a:latin typeface="+mn-lt"/>
           <a:ea typeface="+mn-ea"/>
           <a:cs typeface="+mn-cs"/>
         </a:defRPr>
       </a:lvl5pPr>
-      <a:lvl6pPr marL="2514600" indent="-228600" algn="l" defTabSz="914400" rtl="0" eaLnBrk="1" latinLnBrk="0" hangingPunct="1">
-        <a:lnSpc>
-          <a:spcPct val="90000"/>
-        </a:lnSpc>
+      <a:lvl6pPr marL="2514600" indent="-228600" algn="l" defTabSz="457200" rtl="0" eaLnBrk="1" latinLnBrk="0" hangingPunct="1">
         <a:spcBef>
-          <a:spcPts val="500"/>
+          <a:spcPct val="20000"/>
         </a:spcBef>
-        <a:buFont typeface="Arial" panose="020B0604020202020204" pitchFamily="34" charset="0"/>
+        <a:spcAft>
+          <a:spcPts val="600"/>
+        </a:spcAft>
+        <a:buClr>
+          <a:schemeClr val="accent1">
+            <a:lumMod val="75000"/>
+          </a:schemeClr>
+        </a:buClr>
+        <a:buSzPct val="145000"/>
+        <a:buFont typeface="Arial"/>
         <a:buChar char="•"/>
-        <a:defRPr sz="1800" kern="1200">
+        <a:defRPr sz="1400" kern="1200" cap="none">
           <a:solidFill>
             <a:schemeClr val="tx1"/>
           </a:solidFill>
+          <a:effectLst/>
           <a:latin typeface="+mn-lt"/>
           <a:ea typeface="+mn-ea"/>
           <a:cs typeface="+mn-cs"/>
         </a:defRPr>
       </a:lvl6pPr>
-      <a:lvl7pPr marL="2971800" indent="-228600" algn="l" defTabSz="914400" rtl="0" eaLnBrk="1" latinLnBrk="0" hangingPunct="1">
-        <a:lnSpc>
-          <a:spcPct val="90000"/>
-        </a:lnSpc>
+      <a:lvl7pPr marL="2971800" indent="-228600" algn="l" defTabSz="457200" rtl="0" eaLnBrk="1" latinLnBrk="0" hangingPunct="1">
         <a:spcBef>
-          <a:spcPts val="500"/>
+          <a:spcPct val="20000"/>
         </a:spcBef>
-        <a:buFont typeface="Arial" panose="020B0604020202020204" pitchFamily="34" charset="0"/>
+        <a:spcAft>
+          <a:spcPts val="600"/>
+        </a:spcAft>
+        <a:buClr>
+          <a:schemeClr val="accent1">
+            <a:lumMod val="75000"/>
+          </a:schemeClr>
+        </a:buClr>
+        <a:buSzPct val="145000"/>
+        <a:buFont typeface="Arial"/>
         <a:buChar char="•"/>
-        <a:defRPr sz="1800" kern="1200">
+        <a:defRPr sz="1400" kern="1200" cap="none">
           <a:solidFill>
             <a:schemeClr val="tx1"/>
           </a:solidFill>
+          <a:effectLst/>
           <a:latin typeface="+mn-lt"/>
           <a:ea typeface="+mn-ea"/>
           <a:cs typeface="+mn-cs"/>
         </a:defRPr>
       </a:lvl7pPr>
-      <a:lvl8pPr marL="3429000" indent="-228600" algn="l" defTabSz="914400" rtl="0" eaLnBrk="1" latinLnBrk="0" hangingPunct="1">
-        <a:lnSpc>
-          <a:spcPct val="90000"/>
-        </a:lnSpc>
+      <a:lvl8pPr marL="3429000" indent="-228600" algn="l" defTabSz="457200" rtl="0" eaLnBrk="1" latinLnBrk="0" hangingPunct="1">
         <a:spcBef>
-          <a:spcPts val="500"/>
+          <a:spcPct val="20000"/>
         </a:spcBef>
-        <a:buFont typeface="Arial" panose="020B0604020202020204" pitchFamily="34" charset="0"/>
+        <a:spcAft>
+          <a:spcPts val="600"/>
+        </a:spcAft>
+        <a:buClr>
+          <a:schemeClr val="accent1">
+            <a:lumMod val="75000"/>
+          </a:schemeClr>
+        </a:buClr>
+        <a:buSzPct val="145000"/>
+        <a:buFont typeface="Arial"/>
         <a:buChar char="•"/>
-        <a:defRPr sz="1800" kern="1200">
+        <a:defRPr sz="1400" kern="1200" cap="none">
           <a:solidFill>
             <a:schemeClr val="tx1"/>
           </a:solidFill>
+          <a:effectLst/>
           <a:latin typeface="+mn-lt"/>
           <a:ea typeface="+mn-ea"/>
           <a:cs typeface="+mn-cs"/>
         </a:defRPr>
       </a:lvl8pPr>
-      <a:lvl9pPr marL="3886200" indent="-228600" algn="l" defTabSz="914400" rtl="0" eaLnBrk="1" latinLnBrk="0" hangingPunct="1">
-        <a:lnSpc>
-          <a:spcPct val="90000"/>
-        </a:lnSpc>
+      <a:lvl9pPr marL="3886200" indent="-228600" algn="l" defTabSz="457200" rtl="0" eaLnBrk="1" latinLnBrk="0" hangingPunct="1">
         <a:spcBef>
-          <a:spcPts val="500"/>
+          <a:spcPct val="20000"/>
         </a:spcBef>
-        <a:buFont typeface="Arial" panose="020B0604020202020204" pitchFamily="34" charset="0"/>
+        <a:spcAft>
+          <a:spcPts val="600"/>
+        </a:spcAft>
+        <a:buClr>
+          <a:schemeClr val="accent1">
+            <a:lumMod val="75000"/>
+          </a:schemeClr>
+        </a:buClr>
+        <a:buSzPct val="145000"/>
+        <a:buFont typeface="Arial"/>
         <a:buChar char="•"/>
-        <a:defRPr sz="1800" kern="1200">
+        <a:defRPr sz="1400" kern="1200" cap="none">
           <a:solidFill>
             <a:schemeClr val="tx1"/>
           </a:solidFill>
+          <a:effectLst/>
           <a:latin typeface="+mn-lt"/>
           <a:ea typeface="+mn-ea"/>
           <a:cs typeface="+mn-cs"/>
@@ -3209,7 +6100,7 @@
       <a:defPPr>
         <a:defRPr lang="en-US"/>
       </a:defPPr>
-      <a:lvl1pPr marL="0" algn="l" defTabSz="914400" rtl="0" eaLnBrk="1" latinLnBrk="0" hangingPunct="1">
+      <a:lvl1pPr marL="0" algn="l" defTabSz="457200" rtl="0" eaLnBrk="1" latinLnBrk="0" hangingPunct="1">
         <a:defRPr sz="1800" kern="1200">
           <a:solidFill>
             <a:schemeClr val="tx1"/>
@@ -3219,7 +6110,7 @@
           <a:cs typeface="+mn-cs"/>
         </a:defRPr>
       </a:lvl1pPr>
-      <a:lvl2pPr marL="457200" algn="l" defTabSz="914400" rtl="0" eaLnBrk="1" latinLnBrk="0" hangingPunct="1">
+      <a:lvl2pPr marL="457200" algn="l" defTabSz="457200" rtl="0" eaLnBrk="1" latinLnBrk="0" hangingPunct="1">
         <a:defRPr sz="1800" kern="1200">
           <a:solidFill>
             <a:schemeClr val="tx1"/>
@@ -3229,7 +6120,7 @@
           <a:cs typeface="+mn-cs"/>
         </a:defRPr>
       </a:lvl2pPr>
-      <a:lvl3pPr marL="914400" algn="l" defTabSz="914400" rtl="0" eaLnBrk="1" latinLnBrk="0" hangingPunct="1">
+      <a:lvl3pPr marL="914400" algn="l" defTabSz="457200" rtl="0" eaLnBrk="1" latinLnBrk="0" hangingPunct="1">
         <a:defRPr sz="1800" kern="1200">
           <a:solidFill>
             <a:schemeClr val="tx1"/>
@@ -3239,7 +6130,7 @@
           <a:cs typeface="+mn-cs"/>
         </a:defRPr>
       </a:lvl3pPr>
-      <a:lvl4pPr marL="1371600" algn="l" defTabSz="914400" rtl="0" eaLnBrk="1" latinLnBrk="0" hangingPunct="1">
+      <a:lvl4pPr marL="1371600" algn="l" defTabSz="457200" rtl="0" eaLnBrk="1" latinLnBrk="0" hangingPunct="1">
         <a:defRPr sz="1800" kern="1200">
           <a:solidFill>
             <a:schemeClr val="tx1"/>
@@ -3249,7 +6140,7 @@
           <a:cs typeface="+mn-cs"/>
         </a:defRPr>
       </a:lvl4pPr>
-      <a:lvl5pPr marL="1828800" algn="l" defTabSz="914400" rtl="0" eaLnBrk="1" latinLnBrk="0" hangingPunct="1">
+      <a:lvl5pPr marL="1828800" algn="l" defTabSz="457200" rtl="0" eaLnBrk="1" latinLnBrk="0" hangingPunct="1">
         <a:defRPr sz="1800" kern="1200">
           <a:solidFill>
             <a:schemeClr val="tx1"/>
@@ -3259,7 +6150,7 @@
           <a:cs typeface="+mn-cs"/>
         </a:defRPr>
       </a:lvl5pPr>
-      <a:lvl6pPr marL="2286000" algn="l" defTabSz="914400" rtl="0" eaLnBrk="1" latinLnBrk="0" hangingPunct="1">
+      <a:lvl6pPr marL="2286000" algn="l" defTabSz="457200" rtl="0" eaLnBrk="1" latinLnBrk="0" hangingPunct="1">
         <a:defRPr sz="1800" kern="1200">
           <a:solidFill>
             <a:schemeClr val="tx1"/>
@@ -3269,7 +6160,7 @@
           <a:cs typeface="+mn-cs"/>
         </a:defRPr>
       </a:lvl6pPr>
-      <a:lvl7pPr marL="2743200" algn="l" defTabSz="914400" rtl="0" eaLnBrk="1" latinLnBrk="0" hangingPunct="1">
+      <a:lvl7pPr marL="2743200" algn="l" defTabSz="457200" rtl="0" eaLnBrk="1" latinLnBrk="0" hangingPunct="1">
         <a:defRPr sz="1800" kern="1200">
           <a:solidFill>
             <a:schemeClr val="tx1"/>
@@ -3279,7 +6170,7 @@
           <a:cs typeface="+mn-cs"/>
         </a:defRPr>
       </a:lvl7pPr>
-      <a:lvl8pPr marL="3200400" algn="l" defTabSz="914400" rtl="0" eaLnBrk="1" latinLnBrk="0" hangingPunct="1">
+      <a:lvl8pPr marL="3200400" algn="l" defTabSz="457200" rtl="0" eaLnBrk="1" latinLnBrk="0" hangingPunct="1">
         <a:defRPr sz="1800" kern="1200">
           <a:solidFill>
             <a:schemeClr val="tx1"/>
@@ -3289,7 +6180,7 @@
           <a:cs typeface="+mn-cs"/>
         </a:defRPr>
       </a:lvl8pPr>
-      <a:lvl9pPr marL="3657600" algn="l" defTabSz="914400" rtl="0" eaLnBrk="1" latinLnBrk="0" hangingPunct="1">
+      <a:lvl9pPr marL="3657600" algn="l" defTabSz="457200" rtl="0" eaLnBrk="1" latinLnBrk="0" hangingPunct="1">
         <a:defRPr sz="1800" kern="1200">
           <a:solidFill>
             <a:schemeClr val="tx1"/>
@@ -3342,7 +6233,10 @@
           <a:bodyPr/>
           <a:lstStyle/>
           <a:p>
-            <a:endParaRPr lang="en-US"/>
+            <a:r>
+              <a:rPr lang="en-US"/>
+              <a:t>Coll 400 Presentation</a:t>
+            </a:r>
           </a:p>
         </p:txBody>
       </p:sp>
@@ -3367,7 +6261,31 @@
           <a:bodyPr/>
           <a:lstStyle/>
           <a:p>
-            <a:endParaRPr lang="en-US"/>
+            <a:r>
+              <a:rPr lang="en-US"/>
+              <a:t>Adam Chisholm</a:t>
+            </a:r>
+            <a:br>
+              <a:rPr lang="en-US"/>
+            </a:br>
+            <a:r>
+              <a:rPr lang="en-US"/>
+              <a:t>Conner Wright</a:t>
+            </a:r>
+            <a:br>
+              <a:rPr lang="en-US"/>
+            </a:br>
+            <a:r>
+              <a:rPr lang="en-US"/>
+              <a:t>Elijah Gilliam</a:t>
+            </a:r>
+            <a:br>
+              <a:rPr lang="en-US"/>
+            </a:br>
+            <a:r>
+              <a:rPr lang="en-US"/>
+              <a:t>Zachary Klein</a:t>
+            </a:r>
           </a:p>
         </p:txBody>
       </p:sp>
@@ -3384,10 +6302,2221 @@
 </p:sld>
 </file>
 
+<file path=ppt/slides/slide10.xml><?xml version="1.0" encoding="utf-8"?>
+<p:sld xmlns:a="http://schemas.openxmlformats.org/drawingml/2006/main" xmlns:r="http://schemas.openxmlformats.org/officeDocument/2006/relationships" xmlns:p="http://schemas.openxmlformats.org/presentationml/2006/main">
+  <p:cSld>
+    <p:spTree>
+      <p:nvGrpSpPr>
+        <p:cNvPr id="1" name=""/>
+        <p:cNvGrpSpPr/>
+        <p:nvPr/>
+      </p:nvGrpSpPr>
+      <p:grpSpPr>
+        <a:xfrm>
+          <a:off x="0" y="0"/>
+          <a:ext cx="0" cy="0"/>
+          <a:chOff x="0" y="0"/>
+          <a:chExt cx="0" cy="0"/>
+        </a:xfrm>
+      </p:grpSpPr>
+      <p:sp>
+        <p:nvSpPr>
+          <p:cNvPr id="2" name="Title 1">
+            <a:extLst>
+              <a:ext uri="{FF2B5EF4-FFF2-40B4-BE49-F238E27FC236}">
+                <a16:creationId xmlns:a16="http://schemas.microsoft.com/office/drawing/2014/main" id="{8F10653B-7303-3C48-976F-B0D34DA2BA04}"/>
+              </a:ext>
+            </a:extLst>
+          </p:cNvPr>
+          <p:cNvSpPr>
+            <a:spLocks noGrp="1"/>
+          </p:cNvSpPr>
+          <p:nvPr>
+            <p:ph type="title"/>
+          </p:nvPr>
+        </p:nvSpPr>
+        <p:spPr>
+          <a:xfrm>
+            <a:off x="1484311" y="-3048"/>
+            <a:ext cx="10018713" cy="1752599"/>
+          </a:xfrm>
+        </p:spPr>
+        <p:txBody>
+          <a:bodyPr/>
+          <a:lstStyle/>
+          <a:p>
+            <a:r>
+              <a:rPr lang="en-US"/>
+              <a:t>Visualization Results</a:t>
+            </a:r>
+          </a:p>
+        </p:txBody>
+      </p:sp>
+      <p:pic>
+        <p:nvPicPr>
+          <p:cNvPr id="6" name="Content Placeholder 5" descr="A graph of a line graph&#10;&#10;AI-generated content may be incorrect.">
+            <a:extLst>
+              <a:ext uri="{FF2B5EF4-FFF2-40B4-BE49-F238E27FC236}">
+                <a16:creationId xmlns:a16="http://schemas.microsoft.com/office/drawing/2014/main" id="{61533818-4707-FB88-90F1-A1DB002AFE32}"/>
+              </a:ext>
+            </a:extLst>
+          </p:cNvPr>
+          <p:cNvPicPr>
+            <a:picLocks noGrp="1" noChangeAspect="1"/>
+          </p:cNvPicPr>
+          <p:nvPr>
+            <p:ph idx="1"/>
+          </p:nvPr>
+        </p:nvPicPr>
+        <p:blipFill>
+          <a:blip r:embed="rId2"/>
+          <a:stretch>
+            <a:fillRect/>
+          </a:stretch>
+        </p:blipFill>
+        <p:spPr>
+          <a:xfrm>
+            <a:off x="732348" y="1374587"/>
+            <a:ext cx="5411697" cy="2705849"/>
+          </a:xfrm>
+          <a:prstGeom prst="rect">
+            <a:avLst/>
+          </a:prstGeom>
+        </p:spPr>
+      </p:pic>
+      <p:pic>
+        <p:nvPicPr>
+          <p:cNvPr id="7" name="Picture 6" descr="A graph of a logistic regression multi-class classification&#10;&#10;AI-generated content may be incorrect.">
+            <a:extLst>
+              <a:ext uri="{FF2B5EF4-FFF2-40B4-BE49-F238E27FC236}">
+                <a16:creationId xmlns:a16="http://schemas.microsoft.com/office/drawing/2014/main" id="{F80CFE52-C14D-A72D-9946-B51D1FECEC37}"/>
+              </a:ext>
+            </a:extLst>
+          </p:cNvPr>
+          <p:cNvPicPr>
+            <a:picLocks noChangeAspect="1"/>
+          </p:cNvPicPr>
+          <p:nvPr/>
+        </p:nvPicPr>
+        <p:blipFill>
+          <a:blip r:embed="rId3"/>
+          <a:stretch>
+            <a:fillRect/>
+          </a:stretch>
+        </p:blipFill>
+        <p:spPr>
+          <a:xfrm>
+            <a:off x="6140824" y="4078940"/>
+            <a:ext cx="5192060" cy="2599766"/>
+          </a:xfrm>
+          <a:prstGeom prst="rect">
+            <a:avLst/>
+          </a:prstGeom>
+        </p:spPr>
+      </p:pic>
+    </p:spTree>
+    <p:extLst>
+      <p:ext uri="{BB962C8B-B14F-4D97-AF65-F5344CB8AC3E}">
+        <p14:creationId xmlns:p14="http://schemas.microsoft.com/office/powerpoint/2010/main" val="1910518132"/>
+      </p:ext>
+    </p:extLst>
+  </p:cSld>
+  <p:clrMapOvr>
+    <a:masterClrMapping/>
+  </p:clrMapOvr>
+</p:sld>
+</file>
+
+<file path=ppt/slides/slide11.xml><?xml version="1.0" encoding="utf-8"?>
+<p:sld xmlns:a="http://schemas.openxmlformats.org/drawingml/2006/main" xmlns:r="http://schemas.openxmlformats.org/officeDocument/2006/relationships" xmlns:p="http://schemas.openxmlformats.org/presentationml/2006/main">
+  <p:cSld>
+    <p:spTree>
+      <p:nvGrpSpPr>
+        <p:cNvPr id="1" name="">
+          <a:extLst>
+            <a:ext uri="{FF2B5EF4-FFF2-40B4-BE49-F238E27FC236}">
+              <a16:creationId xmlns:a16="http://schemas.microsoft.com/office/drawing/2014/main" id="{45E4E976-AAFE-56A7-979F-D50C9CC329AC}"/>
+            </a:ext>
+          </a:extLst>
+        </p:cNvPr>
+        <p:cNvGrpSpPr/>
+        <p:nvPr/>
+      </p:nvGrpSpPr>
+      <p:grpSpPr>
+        <a:xfrm>
+          <a:off x="0" y="0"/>
+          <a:ext cx="0" cy="0"/>
+          <a:chOff x="0" y="0"/>
+          <a:chExt cx="0" cy="0"/>
+        </a:xfrm>
+      </p:grpSpPr>
+      <p:pic>
+        <p:nvPicPr>
+          <p:cNvPr id="2" name="Picture 1">
+            <a:extLst>
+              <a:ext uri="{FF2B5EF4-FFF2-40B4-BE49-F238E27FC236}">
+                <a16:creationId xmlns:a16="http://schemas.microsoft.com/office/drawing/2014/main" id="{468D5D68-EE25-02C4-AC4A-C3905371564D}"/>
+              </a:ext>
+            </a:extLst>
+          </p:cNvPr>
+          <p:cNvPicPr>
+            <a:picLocks noChangeAspect="1"/>
+          </p:cNvPicPr>
+          <p:nvPr/>
+        </p:nvPicPr>
+        <p:blipFill>
+          <a:blip r:embed="rId2"/>
+          <a:stretch>
+            <a:fillRect/>
+          </a:stretch>
+        </p:blipFill>
+        <p:spPr>
+          <a:xfrm>
+            <a:off x="0" y="381000"/>
+            <a:ext cx="12192000" cy="6096000"/>
+          </a:xfrm>
+          <a:prstGeom prst="rect">
+            <a:avLst/>
+          </a:prstGeom>
+        </p:spPr>
+      </p:pic>
+    </p:spTree>
+    <p:extLst>
+      <p:ext uri="{BB962C8B-B14F-4D97-AF65-F5344CB8AC3E}">
+        <p14:creationId xmlns:p14="http://schemas.microsoft.com/office/powerpoint/2010/main" val="2376669291"/>
+      </p:ext>
+    </p:extLst>
+  </p:cSld>
+  <p:clrMapOvr>
+    <a:masterClrMapping/>
+  </p:clrMapOvr>
+</p:sld>
+</file>
+
+<file path=ppt/slides/slide12.xml><?xml version="1.0" encoding="utf-8"?>
+<p:sld xmlns:a="http://schemas.openxmlformats.org/drawingml/2006/main" xmlns:r="http://schemas.openxmlformats.org/officeDocument/2006/relationships" xmlns:p="http://schemas.openxmlformats.org/presentationml/2006/main">
+  <p:cSld>
+    <p:spTree>
+      <p:nvGrpSpPr>
+        <p:cNvPr id="1" name=""/>
+        <p:cNvGrpSpPr/>
+        <p:nvPr/>
+      </p:nvGrpSpPr>
+      <p:grpSpPr>
+        <a:xfrm>
+          <a:off x="0" y="0"/>
+          <a:ext cx="0" cy="0"/>
+          <a:chOff x="0" y="0"/>
+          <a:chExt cx="0" cy="0"/>
+        </a:xfrm>
+      </p:grpSpPr>
+      <p:sp>
+        <p:nvSpPr>
+          <p:cNvPr id="2" name="Title 1">
+            <a:extLst>
+              <a:ext uri="{FF2B5EF4-FFF2-40B4-BE49-F238E27FC236}">
+                <a16:creationId xmlns:a16="http://schemas.microsoft.com/office/drawing/2014/main" id="{78DC20F7-4C82-8440-8AA8-F61D54402D5F}"/>
+              </a:ext>
+            </a:extLst>
+          </p:cNvPr>
+          <p:cNvSpPr>
+            <a:spLocks noGrp="1"/>
+          </p:cNvSpPr>
+          <p:nvPr>
+            <p:ph type="title"/>
+          </p:nvPr>
+        </p:nvSpPr>
+        <p:spPr/>
+        <p:txBody>
+          <a:bodyPr/>
+          <a:lstStyle/>
+          <a:p>
+            <a:r>
+              <a:rPr lang="en-US"/>
+              <a:t>Interpretation of Results</a:t>
+            </a:r>
+          </a:p>
+        </p:txBody>
+      </p:sp>
+      <p:sp>
+        <p:nvSpPr>
+          <p:cNvPr id="3" name="Content Placeholder 2">
+            <a:extLst>
+              <a:ext uri="{FF2B5EF4-FFF2-40B4-BE49-F238E27FC236}">
+                <a16:creationId xmlns:a16="http://schemas.microsoft.com/office/drawing/2014/main" id="{61BCDB38-04C6-22F7-78D3-E28DB3624EB0}"/>
+              </a:ext>
+            </a:extLst>
+          </p:cNvPr>
+          <p:cNvSpPr>
+            <a:spLocks noGrp="1"/>
+          </p:cNvSpPr>
+          <p:nvPr>
+            <p:ph idx="1"/>
+          </p:nvPr>
+        </p:nvSpPr>
+        <p:spPr/>
+        <p:txBody>
+          <a:bodyPr/>
+          <a:lstStyle/>
+          <a:p>
+            <a:pPr>
+              <a:buClr>
+                <a:srgbClr val="1287C3"/>
+              </a:buClr>
+            </a:pPr>
+            <a:r>
+              <a:rPr lang="en-US"/>
+              <a:t>Some models more accurate than others </a:t>
+            </a:r>
+          </a:p>
+          <a:p>
+            <a:pPr>
+              <a:buClr>
+                <a:srgbClr val="1287C3"/>
+              </a:buClr>
+            </a:pPr>
+            <a:r>
+              <a:rPr lang="en-US"/>
+              <a:t>Some features may be more significant than others</a:t>
+            </a:r>
+          </a:p>
+        </p:txBody>
+      </p:sp>
+    </p:spTree>
+    <p:extLst>
+      <p:ext uri="{BB962C8B-B14F-4D97-AF65-F5344CB8AC3E}">
+        <p14:creationId xmlns:p14="http://schemas.microsoft.com/office/powerpoint/2010/main" val="806143980"/>
+      </p:ext>
+    </p:extLst>
+  </p:cSld>
+  <p:clrMapOvr>
+    <a:masterClrMapping/>
+  </p:clrMapOvr>
+</p:sld>
+</file>
+
+<file path=ppt/slides/slide13.xml><?xml version="1.0" encoding="utf-8"?>
+<p:sld xmlns:a="http://schemas.openxmlformats.org/drawingml/2006/main" xmlns:r="http://schemas.openxmlformats.org/officeDocument/2006/relationships" xmlns:p="http://schemas.openxmlformats.org/presentationml/2006/main">
+  <p:cSld>
+    <p:spTree>
+      <p:nvGrpSpPr>
+        <p:cNvPr id="1" name=""/>
+        <p:cNvGrpSpPr/>
+        <p:nvPr/>
+      </p:nvGrpSpPr>
+      <p:grpSpPr>
+        <a:xfrm>
+          <a:off x="0" y="0"/>
+          <a:ext cx="0" cy="0"/>
+          <a:chOff x="0" y="0"/>
+          <a:chExt cx="0" cy="0"/>
+        </a:xfrm>
+      </p:grpSpPr>
+      <p:sp>
+        <p:nvSpPr>
+          <p:cNvPr id="2" name="Title 1">
+            <a:extLst>
+              <a:ext uri="{FF2B5EF4-FFF2-40B4-BE49-F238E27FC236}">
+                <a16:creationId xmlns:a16="http://schemas.microsoft.com/office/drawing/2014/main" id="{BB343BC1-88BC-2689-9DB3-2DB6DDD98B76}"/>
+              </a:ext>
+            </a:extLst>
+          </p:cNvPr>
+          <p:cNvSpPr>
+            <a:spLocks noGrp="1"/>
+          </p:cNvSpPr>
+          <p:nvPr>
+            <p:ph type="title"/>
+          </p:nvPr>
+        </p:nvSpPr>
+        <p:spPr/>
+        <p:txBody>
+          <a:bodyPr/>
+          <a:lstStyle/>
+          <a:p>
+            <a:r>
+              <a:rPr lang="en-US"/>
+              <a:t>Future Work</a:t>
+            </a:r>
+          </a:p>
+        </p:txBody>
+      </p:sp>
+      <p:sp>
+        <p:nvSpPr>
+          <p:cNvPr id="3" name="Content Placeholder 2">
+            <a:extLst>
+              <a:ext uri="{FF2B5EF4-FFF2-40B4-BE49-F238E27FC236}">
+                <a16:creationId xmlns:a16="http://schemas.microsoft.com/office/drawing/2014/main" id="{506EC5AE-9C0A-2799-108C-91D29A5486F8}"/>
+              </a:ext>
+            </a:extLst>
+          </p:cNvPr>
+          <p:cNvSpPr>
+            <a:spLocks noGrp="1"/>
+          </p:cNvSpPr>
+          <p:nvPr>
+            <p:ph idx="1"/>
+          </p:nvPr>
+        </p:nvSpPr>
+        <p:spPr>
+          <a:xfrm>
+            <a:off x="1595465" y="2664370"/>
+            <a:ext cx="4898202" cy="1856230"/>
+          </a:xfrm>
+        </p:spPr>
+        <p:txBody>
+          <a:bodyPr/>
+          <a:lstStyle/>
+          <a:p>
+            <a:r>
+              <a:rPr lang="en-US"/>
+              <a:t>Challenges</a:t>
+            </a:r>
+          </a:p>
+          <a:p>
+            <a:pPr lvl="1"/>
+            <a:r>
+              <a:rPr lang="en-US"/>
+              <a:t>Dataset Size, Complexity</a:t>
+            </a:r>
+          </a:p>
+          <a:p>
+            <a:pPr lvl="1"/>
+            <a:r>
+              <a:rPr lang="en-US"/>
+              <a:t>Handling Real-Time Data</a:t>
+            </a:r>
+          </a:p>
+          <a:p>
+            <a:pPr lvl="1"/>
+            <a:r>
+              <a:rPr lang="en-US"/>
+              <a:t>Model Complexity</a:t>
+            </a:r>
+          </a:p>
+        </p:txBody>
+      </p:sp>
+      <p:sp>
+        <p:nvSpPr>
+          <p:cNvPr id="5" name="TextBox 4">
+            <a:extLst>
+              <a:ext uri="{FF2B5EF4-FFF2-40B4-BE49-F238E27FC236}">
+                <a16:creationId xmlns:a16="http://schemas.microsoft.com/office/drawing/2014/main" id="{81795136-8188-4D3F-B344-459A0E6EB564}"/>
+              </a:ext>
+            </a:extLst>
+          </p:cNvPr>
+          <p:cNvSpPr txBox="1"/>
+          <p:nvPr/>
+        </p:nvSpPr>
+        <p:spPr>
+          <a:xfrm>
+            <a:off x="6493667" y="2251500"/>
+            <a:ext cx="4325176" cy="2629951"/>
+          </a:xfrm>
+          <a:prstGeom prst="rect">
+            <a:avLst/>
+          </a:prstGeom>
+          <a:noFill/>
+        </p:spPr>
+        <p:txBody>
+          <a:bodyPr wrap="square" rtlCol="0">
+            <a:spAutoFit/>
+          </a:bodyPr>
+          <a:lstStyle/>
+          <a:p>
+            <a:pPr marL="342900" indent="-342900">
+              <a:buClr>
+                <a:schemeClr val="accent1">
+                  <a:lumMod val="75000"/>
+                </a:schemeClr>
+              </a:buClr>
+              <a:buSzPct val="145000"/>
+              <a:buFont typeface="Arial" panose="020B0604020202020204" pitchFamily="34" charset="0"/>
+              <a:buChar char="•"/>
+            </a:pPr>
+            <a:endParaRPr lang="en-US" sz="2400"/>
+          </a:p>
+          <a:p>
+            <a:pPr marL="342900" indent="-342900">
+              <a:buClr>
+                <a:schemeClr val="accent1">
+                  <a:lumMod val="75000"/>
+                </a:schemeClr>
+              </a:buClr>
+              <a:buSzPct val="145000"/>
+              <a:buFont typeface="Arial" panose="020B0604020202020204" pitchFamily="34" charset="0"/>
+              <a:buChar char="•"/>
+            </a:pPr>
+            <a:r>
+              <a:rPr lang="en-US" sz="2400"/>
+              <a:t>Improvements</a:t>
+            </a:r>
+          </a:p>
+          <a:p>
+            <a:pPr marL="800100" lvl="1" indent="-342900">
+              <a:lnSpc>
+                <a:spcPct val="150000"/>
+              </a:lnSpc>
+              <a:buClr>
+                <a:schemeClr val="accent1">
+                  <a:lumMod val="75000"/>
+                </a:schemeClr>
+              </a:buClr>
+              <a:buSzPct val="145000"/>
+              <a:buFont typeface="Arial" panose="020B0604020202020204" pitchFamily="34" charset="0"/>
+              <a:buChar char="•"/>
+            </a:pPr>
+            <a:r>
+              <a:rPr lang="en-US" sz="2000"/>
+              <a:t>Expansion of the Dataset</a:t>
+            </a:r>
+          </a:p>
+          <a:p>
+            <a:pPr marL="800100" lvl="1" indent="-342900">
+              <a:lnSpc>
+                <a:spcPct val="150000"/>
+              </a:lnSpc>
+              <a:buClr>
+                <a:schemeClr val="accent1">
+                  <a:lumMod val="75000"/>
+                </a:schemeClr>
+              </a:buClr>
+              <a:buSzPct val="145000"/>
+              <a:buFont typeface="Arial" panose="020B0604020202020204" pitchFamily="34" charset="0"/>
+              <a:buChar char="•"/>
+            </a:pPr>
+            <a:r>
+              <a:rPr lang="en-US" sz="2000"/>
+              <a:t>Advanced Models</a:t>
+            </a:r>
+          </a:p>
+          <a:p>
+            <a:pPr marL="800100" lvl="1" indent="-342900">
+              <a:lnSpc>
+                <a:spcPct val="150000"/>
+              </a:lnSpc>
+              <a:buClr>
+                <a:schemeClr val="accent1">
+                  <a:lumMod val="75000"/>
+                </a:schemeClr>
+              </a:buClr>
+              <a:buSzPct val="145000"/>
+              <a:buFont typeface="Arial" panose="020B0604020202020204" pitchFamily="34" charset="0"/>
+              <a:buChar char="•"/>
+            </a:pPr>
+            <a:r>
+              <a:rPr lang="en-US" sz="2000"/>
+              <a:t>Real-Time Processing</a:t>
+            </a:r>
+          </a:p>
+          <a:p>
+            <a:pPr marL="800100" lvl="1" indent="-342900">
+              <a:lnSpc>
+                <a:spcPct val="150000"/>
+              </a:lnSpc>
+              <a:buClr>
+                <a:schemeClr val="accent1">
+                  <a:lumMod val="75000"/>
+                </a:schemeClr>
+              </a:buClr>
+              <a:buSzPct val="145000"/>
+              <a:buFont typeface="Arial" panose="020B0604020202020204" pitchFamily="34" charset="0"/>
+              <a:buChar char="•"/>
+            </a:pPr>
+            <a:r>
+              <a:rPr lang="en-US" sz="2000"/>
+              <a:t>Practical Applications</a:t>
+            </a:r>
+          </a:p>
+        </p:txBody>
+      </p:sp>
+    </p:spTree>
+    <p:extLst>
+      <p:ext uri="{BB962C8B-B14F-4D97-AF65-F5344CB8AC3E}">
+        <p14:creationId xmlns:p14="http://schemas.microsoft.com/office/powerpoint/2010/main" val="297576816"/>
+      </p:ext>
+    </p:extLst>
+  </p:cSld>
+  <p:clrMapOvr>
+    <a:masterClrMapping/>
+  </p:clrMapOvr>
+</p:sld>
+</file>
+
+<file path=ppt/slides/slide14.xml><?xml version="1.0" encoding="utf-8"?>
+<p:sld xmlns:a="http://schemas.openxmlformats.org/drawingml/2006/main" xmlns:r="http://schemas.openxmlformats.org/officeDocument/2006/relationships" xmlns:p="http://schemas.openxmlformats.org/presentationml/2006/main">
+  <p:cSld>
+    <p:spTree>
+      <p:nvGrpSpPr>
+        <p:cNvPr id="1" name=""/>
+        <p:cNvGrpSpPr/>
+        <p:nvPr/>
+      </p:nvGrpSpPr>
+      <p:grpSpPr>
+        <a:xfrm>
+          <a:off x="0" y="0"/>
+          <a:ext cx="0" cy="0"/>
+          <a:chOff x="0" y="0"/>
+          <a:chExt cx="0" cy="0"/>
+        </a:xfrm>
+      </p:grpSpPr>
+      <p:sp>
+        <p:nvSpPr>
+          <p:cNvPr id="2" name="Title 1">
+            <a:extLst>
+              <a:ext uri="{FF2B5EF4-FFF2-40B4-BE49-F238E27FC236}">
+                <a16:creationId xmlns:a16="http://schemas.microsoft.com/office/drawing/2014/main" id="{97253FEC-F110-3251-A12A-F76ED89DDCD8}"/>
+              </a:ext>
+            </a:extLst>
+          </p:cNvPr>
+          <p:cNvSpPr>
+            <a:spLocks noGrp="1"/>
+          </p:cNvSpPr>
+          <p:nvPr>
+            <p:ph type="title"/>
+          </p:nvPr>
+        </p:nvSpPr>
+        <p:spPr/>
+        <p:txBody>
+          <a:bodyPr/>
+          <a:lstStyle/>
+          <a:p>
+            <a:r>
+              <a:rPr lang="en-US"/>
+              <a:t>Conclusion</a:t>
+            </a:r>
+          </a:p>
+        </p:txBody>
+      </p:sp>
+      <p:sp>
+        <p:nvSpPr>
+          <p:cNvPr id="3" name="Content Placeholder 2">
+            <a:extLst>
+              <a:ext uri="{FF2B5EF4-FFF2-40B4-BE49-F238E27FC236}">
+                <a16:creationId xmlns:a16="http://schemas.microsoft.com/office/drawing/2014/main" id="{70EC1CDB-4D77-11AD-B9FF-C10E832E36AC}"/>
+              </a:ext>
+            </a:extLst>
+          </p:cNvPr>
+          <p:cNvSpPr>
+            <a:spLocks noGrp="1"/>
+          </p:cNvSpPr>
+          <p:nvPr>
+            <p:ph idx="1"/>
+          </p:nvPr>
+        </p:nvSpPr>
+        <p:spPr/>
+        <p:txBody>
+          <a:bodyPr/>
+          <a:lstStyle/>
+          <a:p>
+            <a:r>
+              <a:rPr lang="en-US"/>
+              <a:t>Main insights</a:t>
+            </a:r>
+          </a:p>
+          <a:p>
+            <a:pPr lvl="1"/>
+            <a:r>
+              <a:rPr lang="en-US"/>
+              <a:t>Random Forest model outperformed the other models</a:t>
+            </a:r>
+          </a:p>
+          <a:p>
+            <a:pPr lvl="1"/>
+            <a:r>
+              <a:rPr lang="en-US"/>
+              <a:t>Importance of dataset size and its need for increase in size for future work</a:t>
+            </a:r>
+          </a:p>
+          <a:p>
+            <a:pPr lvl="1"/>
+            <a:r>
+              <a:rPr lang="en-US"/>
+              <a:t>Shows how machine learning can help with classification of network traffic patterns</a:t>
+            </a:r>
+          </a:p>
+          <a:p>
+            <a:pPr lvl="1"/>
+            <a:endParaRPr lang="en-US"/>
+          </a:p>
+        </p:txBody>
+      </p:sp>
+    </p:spTree>
+    <p:extLst>
+      <p:ext uri="{BB962C8B-B14F-4D97-AF65-F5344CB8AC3E}">
+        <p14:creationId xmlns:p14="http://schemas.microsoft.com/office/powerpoint/2010/main" val="2246108156"/>
+      </p:ext>
+    </p:extLst>
+  </p:cSld>
+  <p:clrMapOvr>
+    <a:masterClrMapping/>
+  </p:clrMapOvr>
+</p:sld>
+</file>
+
+<file path=ppt/slides/slide15.xml><?xml version="1.0" encoding="utf-8"?>
+<p:sld xmlns:a="http://schemas.openxmlformats.org/drawingml/2006/main" xmlns:r="http://schemas.openxmlformats.org/officeDocument/2006/relationships" xmlns:p="http://schemas.openxmlformats.org/presentationml/2006/main">
+  <p:cSld>
+    <p:spTree>
+      <p:nvGrpSpPr>
+        <p:cNvPr id="1" name=""/>
+        <p:cNvGrpSpPr/>
+        <p:nvPr/>
+      </p:nvGrpSpPr>
+      <p:grpSpPr>
+        <a:xfrm>
+          <a:off x="0" y="0"/>
+          <a:ext cx="0" cy="0"/>
+          <a:chOff x="0" y="0"/>
+          <a:chExt cx="0" cy="0"/>
+        </a:xfrm>
+      </p:grpSpPr>
+      <p:sp>
+        <p:nvSpPr>
+          <p:cNvPr id="2" name="Title 1">
+            <a:extLst>
+              <a:ext uri="{FF2B5EF4-FFF2-40B4-BE49-F238E27FC236}">
+                <a16:creationId xmlns:a16="http://schemas.microsoft.com/office/drawing/2014/main" id="{0EB89EE4-FE3F-311F-E2EB-D8677F63D1F1}"/>
+              </a:ext>
+            </a:extLst>
+          </p:cNvPr>
+          <p:cNvSpPr>
+            <a:spLocks noGrp="1"/>
+          </p:cNvSpPr>
+          <p:nvPr>
+            <p:ph type="title"/>
+          </p:nvPr>
+        </p:nvSpPr>
+        <p:spPr/>
+        <p:txBody>
+          <a:bodyPr/>
+          <a:lstStyle/>
+          <a:p>
+            <a:r>
+              <a:rPr lang="en-US"/>
+              <a:t>References</a:t>
+            </a:r>
+          </a:p>
+        </p:txBody>
+      </p:sp>
+      <p:sp>
+        <p:nvSpPr>
+          <p:cNvPr id="3" name="Content Placeholder 2">
+            <a:extLst>
+              <a:ext uri="{FF2B5EF4-FFF2-40B4-BE49-F238E27FC236}">
+                <a16:creationId xmlns:a16="http://schemas.microsoft.com/office/drawing/2014/main" id="{A0F35035-5051-554D-F543-EE72D0DB7FDF}"/>
+              </a:ext>
+            </a:extLst>
+          </p:cNvPr>
+          <p:cNvSpPr>
+            <a:spLocks noGrp="1"/>
+          </p:cNvSpPr>
+          <p:nvPr>
+            <p:ph idx="1"/>
+          </p:nvPr>
+        </p:nvSpPr>
+        <p:spPr/>
+        <p:txBody>
+          <a:bodyPr/>
+          <a:lstStyle/>
+          <a:p>
+            <a:r>
+              <a:rPr lang="en-US">
+                <a:ea typeface="+mn-lt"/>
+                <a:cs typeface="+mn-lt"/>
+                <a:hlinkClick r:id="rId2"/>
+              </a:rPr>
+              <a:t>Network Traffic Classification Techniques: A Survey | IEEE Conference Publication | IEEE Xplore</a:t>
+            </a:r>
+          </a:p>
+          <a:p>
+            <a:pPr>
+              <a:buClr>
+                <a:srgbClr val="1287C3"/>
+              </a:buClr>
+            </a:pPr>
+            <a:r>
+              <a:rPr lang="en-US">
+                <a:ea typeface="+mn-lt"/>
+                <a:cs typeface="+mn-lt"/>
+                <a:hlinkClick r:id="rId3"/>
+              </a:rPr>
+              <a:t>Wireshark • Go Deep</a:t>
+            </a:r>
+          </a:p>
+          <a:p>
+            <a:pPr>
+              <a:buClr>
+                <a:srgbClr val="1287C3"/>
+              </a:buClr>
+            </a:pPr>
+            <a:r>
+              <a:rPr lang="en-US">
+                <a:ea typeface="+mn-lt"/>
+                <a:cs typeface="+mn-lt"/>
+                <a:hlinkClick r:id="rId4"/>
+              </a:rPr>
+              <a:t>Machine Learning Made Easy: A Review of "Scikit-learn" Package in Python Programming Language on JSTOR</a:t>
+            </a:r>
+          </a:p>
+          <a:p>
+            <a:pPr>
+              <a:buClr>
+                <a:srgbClr val="1287C3"/>
+              </a:buClr>
+            </a:pPr>
+            <a:r>
+              <a:rPr lang="en-US" err="1">
+                <a:ea typeface="+mn-lt"/>
+                <a:cs typeface="+mn-lt"/>
+                <a:hlinkClick r:id="rId5"/>
+              </a:rPr>
+              <a:t>RandomForestClassifier</a:t>
+            </a:r>
+            <a:r>
+              <a:rPr lang="en-US">
+                <a:ea typeface="+mn-lt"/>
+                <a:cs typeface="+mn-lt"/>
+                <a:hlinkClick r:id="rId5"/>
+              </a:rPr>
+              <a:t> — scikit-learn 1.8.0 documentation</a:t>
+            </a:r>
+            <a:endParaRPr lang="en-US"/>
+          </a:p>
+        </p:txBody>
+      </p:sp>
+    </p:spTree>
+    <p:extLst>
+      <p:ext uri="{BB962C8B-B14F-4D97-AF65-F5344CB8AC3E}">
+        <p14:creationId xmlns:p14="http://schemas.microsoft.com/office/powerpoint/2010/main" val="3251416079"/>
+      </p:ext>
+    </p:extLst>
+  </p:cSld>
+  <p:clrMapOvr>
+    <a:masterClrMapping/>
+  </p:clrMapOvr>
+</p:sld>
+</file>
+
+<file path=ppt/slides/slide2.xml><?xml version="1.0" encoding="utf-8"?>
+<p:sld xmlns:a="http://schemas.openxmlformats.org/drawingml/2006/main" xmlns:r="http://schemas.openxmlformats.org/officeDocument/2006/relationships" xmlns:p="http://schemas.openxmlformats.org/presentationml/2006/main">
+  <p:cSld>
+    <p:spTree>
+      <p:nvGrpSpPr>
+        <p:cNvPr id="1" name=""/>
+        <p:cNvGrpSpPr/>
+        <p:nvPr/>
+      </p:nvGrpSpPr>
+      <p:grpSpPr>
+        <a:xfrm>
+          <a:off x="0" y="0"/>
+          <a:ext cx="0" cy="0"/>
+          <a:chOff x="0" y="0"/>
+          <a:chExt cx="0" cy="0"/>
+        </a:xfrm>
+      </p:grpSpPr>
+      <p:sp>
+        <p:nvSpPr>
+          <p:cNvPr id="2" name="Title 1">
+            <a:extLst>
+              <a:ext uri="{FF2B5EF4-FFF2-40B4-BE49-F238E27FC236}">
+                <a16:creationId xmlns:a16="http://schemas.microsoft.com/office/drawing/2014/main" id="{80CB4100-292A-F4E2-C703-7C9CAF76C32F}"/>
+              </a:ext>
+            </a:extLst>
+          </p:cNvPr>
+          <p:cNvSpPr>
+            <a:spLocks noGrp="1"/>
+          </p:cNvSpPr>
+          <p:nvPr>
+            <p:ph type="title"/>
+          </p:nvPr>
+        </p:nvSpPr>
+        <p:spPr>
+          <a:xfrm>
+            <a:off x="1484311" y="311484"/>
+            <a:ext cx="10018713" cy="1191126"/>
+          </a:xfrm>
+        </p:spPr>
+        <p:txBody>
+          <a:bodyPr/>
+          <a:lstStyle/>
+          <a:p>
+            <a:r>
+              <a:rPr lang="en-US"/>
+              <a:t>Abstract</a:t>
+            </a:r>
+          </a:p>
+        </p:txBody>
+      </p:sp>
+      <p:sp>
+        <p:nvSpPr>
+          <p:cNvPr id="3" name="Content Placeholder 2">
+            <a:extLst>
+              <a:ext uri="{FF2B5EF4-FFF2-40B4-BE49-F238E27FC236}">
+                <a16:creationId xmlns:a16="http://schemas.microsoft.com/office/drawing/2014/main" id="{05447B11-FC7B-43BA-D5CC-B6ABB706891D}"/>
+              </a:ext>
+            </a:extLst>
+          </p:cNvPr>
+          <p:cNvSpPr>
+            <a:spLocks noGrp="1"/>
+          </p:cNvSpPr>
+          <p:nvPr>
+            <p:ph idx="1"/>
+          </p:nvPr>
+        </p:nvSpPr>
+        <p:spPr>
+          <a:xfrm>
+            <a:off x="1484310" y="1467760"/>
+            <a:ext cx="10018713" cy="5006612"/>
+          </a:xfrm>
+        </p:spPr>
+        <p:txBody>
+          <a:bodyPr/>
+          <a:lstStyle/>
+          <a:p>
+            <a:pPr marL="0" indent="0">
+              <a:lnSpc>
+                <a:spcPct val="150000"/>
+              </a:lnSpc>
+              <a:spcBef>
+                <a:spcPts val="1400"/>
+              </a:spcBef>
+              <a:buNone/>
+            </a:pPr>
+            <a:r>
+              <a:rPr lang="en-US"/>
+              <a:t>This project addresses the problem of classifying network traffic by its website of origin. The goal of this classification is to improve providers' ability to manage their networks based on users' activity. The traffic records we analyzed come from five websites – </a:t>
+            </a:r>
+            <a:r>
+              <a:rPr lang="en-US" err="1"/>
+              <a:t>Backloggd</a:t>
+            </a:r>
+            <a:r>
+              <a:rPr lang="en-US"/>
+              <a:t>, </a:t>
+            </a:r>
+            <a:r>
+              <a:rPr lang="en-US" err="1"/>
+              <a:t>Github</a:t>
+            </a:r>
+            <a:r>
+              <a:rPr lang="en-US"/>
+              <a:t>, Letterboxd, Reddit, and weather.com -  and, based on nine characteristics, classified the records with the Linear Regression, Logistic Regression, and Random Forest models. </a:t>
+            </a:r>
+          </a:p>
+        </p:txBody>
+      </p:sp>
+    </p:spTree>
+    <p:extLst>
+      <p:ext uri="{BB962C8B-B14F-4D97-AF65-F5344CB8AC3E}">
+        <p14:creationId xmlns:p14="http://schemas.microsoft.com/office/powerpoint/2010/main" val="2277789728"/>
+      </p:ext>
+    </p:extLst>
+  </p:cSld>
+  <p:clrMapOvr>
+    <a:masterClrMapping/>
+  </p:clrMapOvr>
+</p:sld>
+</file>
+
+<file path=ppt/slides/slide3.xml><?xml version="1.0" encoding="utf-8"?>
+<p:sld xmlns:a="http://schemas.openxmlformats.org/drawingml/2006/main" xmlns:r="http://schemas.openxmlformats.org/officeDocument/2006/relationships" xmlns:p="http://schemas.openxmlformats.org/presentationml/2006/main">
+  <p:cSld>
+    <p:spTree>
+      <p:nvGrpSpPr>
+        <p:cNvPr id="1" name=""/>
+        <p:cNvGrpSpPr/>
+        <p:nvPr/>
+      </p:nvGrpSpPr>
+      <p:grpSpPr>
+        <a:xfrm>
+          <a:off x="0" y="0"/>
+          <a:ext cx="0" cy="0"/>
+          <a:chOff x="0" y="0"/>
+          <a:chExt cx="0" cy="0"/>
+        </a:xfrm>
+      </p:grpSpPr>
+      <p:sp>
+        <p:nvSpPr>
+          <p:cNvPr id="2" name="Title 1">
+            <a:extLst>
+              <a:ext uri="{FF2B5EF4-FFF2-40B4-BE49-F238E27FC236}">
+                <a16:creationId xmlns:a16="http://schemas.microsoft.com/office/drawing/2014/main" id="{37B35B5C-8D87-01B5-DACF-860108CACD8D}"/>
+              </a:ext>
+            </a:extLst>
+          </p:cNvPr>
+          <p:cNvSpPr>
+            <a:spLocks noGrp="1"/>
+          </p:cNvSpPr>
+          <p:nvPr>
+            <p:ph type="title"/>
+          </p:nvPr>
+        </p:nvSpPr>
+        <p:spPr/>
+        <p:txBody>
+          <a:bodyPr/>
+          <a:lstStyle/>
+          <a:p>
+            <a:r>
+              <a:rPr lang="en-US"/>
+              <a:t>Introduction</a:t>
+            </a:r>
+          </a:p>
+        </p:txBody>
+      </p:sp>
+      <p:sp>
+        <p:nvSpPr>
+          <p:cNvPr id="3" name="Content Placeholder 2">
+            <a:extLst>
+              <a:ext uri="{FF2B5EF4-FFF2-40B4-BE49-F238E27FC236}">
+                <a16:creationId xmlns:a16="http://schemas.microsoft.com/office/drawing/2014/main" id="{9B14594A-382C-DB1C-EF2F-97329C0BFE8A}"/>
+              </a:ext>
+            </a:extLst>
+          </p:cNvPr>
+          <p:cNvSpPr>
+            <a:spLocks noGrp="1"/>
+          </p:cNvSpPr>
+          <p:nvPr>
+            <p:ph idx="1"/>
+          </p:nvPr>
+        </p:nvSpPr>
+        <p:spPr/>
+        <p:txBody>
+          <a:bodyPr vert="horz" lIns="91440" tIns="45720" rIns="91440" bIns="45720" rtlCol="0" anchor="t">
+            <a:normAutofit fontScale="85000" lnSpcReduction="10000"/>
+          </a:bodyPr>
+          <a:lstStyle/>
+          <a:p>
+            <a:r>
+              <a:rPr lang="en-US">
+                <a:ea typeface="+mn-lt"/>
+                <a:cs typeface="+mn-lt"/>
+              </a:rPr>
+              <a:t>Dataset of traffic records from GitHub, </a:t>
+            </a:r>
+            <a:r>
+              <a:rPr lang="en-US" err="1">
+                <a:ea typeface="+mn-lt"/>
+                <a:cs typeface="+mn-lt"/>
+              </a:rPr>
+              <a:t>LetterBoxd</a:t>
+            </a:r>
+            <a:r>
+              <a:rPr lang="en-US">
+                <a:ea typeface="+mn-lt"/>
+                <a:cs typeface="+mn-lt"/>
+              </a:rPr>
+              <a:t>, </a:t>
+            </a:r>
+            <a:r>
+              <a:rPr lang="en-US" err="1">
+                <a:ea typeface="+mn-lt"/>
+                <a:cs typeface="+mn-lt"/>
+              </a:rPr>
+              <a:t>Backloggd</a:t>
+            </a:r>
+            <a:r>
+              <a:rPr lang="en-US">
+                <a:ea typeface="+mn-lt"/>
+                <a:cs typeface="+mn-lt"/>
+              </a:rPr>
+              <a:t>, Reddit, and Weather.</a:t>
+            </a:r>
+          </a:p>
+          <a:p>
+            <a:r>
+              <a:rPr lang="en-US">
+                <a:ea typeface="+mn-lt"/>
+                <a:cs typeface="+mn-lt"/>
+              </a:rPr>
+              <a:t>Dataset was split into training, and test sets</a:t>
+            </a:r>
+          </a:p>
+          <a:p>
+            <a:r>
+              <a:rPr lang="en-US"/>
+              <a:t>3 models used for classification</a:t>
+            </a:r>
+          </a:p>
+          <a:p>
+            <a:pPr lvl="1">
+              <a:buFont typeface="Courier New" panose="020B0604020202020204" pitchFamily="34" charset="0"/>
+              <a:buChar char="o"/>
+            </a:pPr>
+            <a:r>
+              <a:rPr lang="en-US"/>
+              <a:t>Linear Regression</a:t>
+            </a:r>
+          </a:p>
+          <a:p>
+            <a:pPr lvl="1">
+              <a:buFont typeface="Courier New" panose="020B0604020202020204" pitchFamily="34" charset="0"/>
+              <a:buChar char="o"/>
+            </a:pPr>
+            <a:r>
+              <a:rPr lang="en-US"/>
+              <a:t>Logistic Regression</a:t>
+            </a:r>
+          </a:p>
+          <a:p>
+            <a:pPr lvl="1">
+              <a:buFont typeface="Courier New" panose="020B0604020202020204" pitchFamily="34" charset="0"/>
+              <a:buChar char="o"/>
+            </a:pPr>
+            <a:r>
+              <a:rPr lang="en-US"/>
+              <a:t>Random Forest</a:t>
+            </a:r>
+          </a:p>
+          <a:p>
+            <a:r>
+              <a:rPr lang="en-US"/>
+              <a:t>Random Forest</a:t>
+            </a:r>
+            <a:r>
+              <a:rPr lang="en-US" b="1"/>
+              <a:t> </a:t>
+            </a:r>
+            <a:r>
+              <a:rPr lang="en-US"/>
+              <a:t>achieved the highest accuracy and Macro F1 score</a:t>
+            </a:r>
+          </a:p>
+          <a:p>
+            <a:pPr marL="457200" lvl="1" indent="0">
+              <a:buNone/>
+            </a:pPr>
+            <a:r>
+              <a:rPr lang="en-US"/>
+              <a:t> </a:t>
+            </a:r>
+          </a:p>
+        </p:txBody>
+      </p:sp>
+    </p:spTree>
+    <p:extLst>
+      <p:ext uri="{BB962C8B-B14F-4D97-AF65-F5344CB8AC3E}">
+        <p14:creationId xmlns:p14="http://schemas.microsoft.com/office/powerpoint/2010/main" val="1026154494"/>
+      </p:ext>
+    </p:extLst>
+  </p:cSld>
+  <p:clrMapOvr>
+    <a:masterClrMapping/>
+  </p:clrMapOvr>
+</p:sld>
+</file>
+
+<file path=ppt/slides/slide4.xml><?xml version="1.0" encoding="utf-8"?>
+<p:sld xmlns:a="http://schemas.openxmlformats.org/drawingml/2006/main" xmlns:r="http://schemas.openxmlformats.org/officeDocument/2006/relationships" xmlns:p="http://schemas.openxmlformats.org/presentationml/2006/main">
+  <p:cSld>
+    <p:spTree>
+      <p:nvGrpSpPr>
+        <p:cNvPr id="1" name=""/>
+        <p:cNvGrpSpPr/>
+        <p:nvPr/>
+      </p:nvGrpSpPr>
+      <p:grpSpPr>
+        <a:xfrm>
+          <a:off x="0" y="0"/>
+          <a:ext cx="0" cy="0"/>
+          <a:chOff x="0" y="0"/>
+          <a:chExt cx="0" cy="0"/>
+        </a:xfrm>
+      </p:grpSpPr>
+      <p:sp>
+        <p:nvSpPr>
+          <p:cNvPr id="2" name="Title 1">
+            <a:extLst>
+              <a:ext uri="{FF2B5EF4-FFF2-40B4-BE49-F238E27FC236}">
+                <a16:creationId xmlns:a16="http://schemas.microsoft.com/office/drawing/2014/main" id="{30556E56-CF5F-EE2E-4C86-011D39759E8A}"/>
+              </a:ext>
+            </a:extLst>
+          </p:cNvPr>
+          <p:cNvSpPr>
+            <a:spLocks noGrp="1"/>
+          </p:cNvSpPr>
+          <p:nvPr>
+            <p:ph type="title"/>
+          </p:nvPr>
+        </p:nvSpPr>
+        <p:spPr/>
+        <p:txBody>
+          <a:bodyPr/>
+          <a:lstStyle/>
+          <a:p>
+            <a:r>
+              <a:rPr lang="en-US"/>
+              <a:t>Data Preparation</a:t>
+            </a:r>
+          </a:p>
+        </p:txBody>
+      </p:sp>
+      <p:sp>
+        <p:nvSpPr>
+          <p:cNvPr id="3" name="Content Placeholder 2">
+            <a:extLst>
+              <a:ext uri="{FF2B5EF4-FFF2-40B4-BE49-F238E27FC236}">
+                <a16:creationId xmlns:a16="http://schemas.microsoft.com/office/drawing/2014/main" id="{A4484CC7-82B7-64FB-2F61-97A4DA91082F}"/>
+              </a:ext>
+            </a:extLst>
+          </p:cNvPr>
+          <p:cNvSpPr>
+            <a:spLocks noGrp="1"/>
+          </p:cNvSpPr>
+          <p:nvPr>
+            <p:ph idx="1"/>
+          </p:nvPr>
+        </p:nvSpPr>
+        <p:spPr/>
+        <p:txBody>
+          <a:bodyPr vert="horz" lIns="91440" tIns="45720" rIns="91440" bIns="45720" rtlCol="0" anchor="t">
+            <a:normAutofit fontScale="77500" lnSpcReduction="20000"/>
+          </a:bodyPr>
+          <a:lstStyle/>
+          <a:p>
+            <a:r>
+              <a:rPr lang="en-US"/>
+              <a:t>Wireshark</a:t>
+            </a:r>
+          </a:p>
+          <a:p>
+            <a:pPr lvl="1">
+              <a:buFont typeface="Courier New" panose="020B0604020202020204" pitchFamily="34" charset="0"/>
+              <a:buChar char="o"/>
+            </a:pPr>
+            <a:r>
+              <a:rPr lang="en-US">
+                <a:ea typeface="+mn-lt"/>
+                <a:cs typeface="+mn-lt"/>
+              </a:rPr>
+              <a:t>network protocol analyzer</a:t>
+            </a:r>
+          </a:p>
+          <a:p>
+            <a:pPr lvl="1">
+              <a:buFont typeface="Courier New" panose="020B0604020202020204" pitchFamily="34" charset="0"/>
+              <a:buChar char="o"/>
+            </a:pPr>
+            <a:r>
+              <a:rPr lang="en-US">
+                <a:ea typeface="+mn-lt"/>
+                <a:cs typeface="+mn-lt"/>
+              </a:rPr>
+              <a:t>configuring filters to capture traffic from specific web sites</a:t>
+            </a:r>
+          </a:p>
+          <a:p>
+            <a:r>
+              <a:rPr lang="en-US"/>
+              <a:t>Features Collected</a:t>
+            </a:r>
+          </a:p>
+          <a:p>
+            <a:pPr lvl="1">
+              <a:buFont typeface="Courier New" panose="020B0604020202020204" pitchFamily="34" charset="0"/>
+              <a:buChar char="o"/>
+            </a:pPr>
+            <a:r>
+              <a:rPr lang="en-US"/>
+              <a:t>Packet Count</a:t>
+            </a:r>
+          </a:p>
+          <a:p>
+            <a:pPr lvl="1">
+              <a:buFont typeface="Courier New" panose="020B0604020202020204" pitchFamily="34" charset="0"/>
+              <a:buChar char="o"/>
+            </a:pPr>
+            <a:r>
+              <a:rPr lang="en-US"/>
+              <a:t>Total Length</a:t>
+            </a:r>
+          </a:p>
+          <a:p>
+            <a:pPr lvl="1">
+              <a:buFont typeface="Courier New" panose="020B0604020202020204" pitchFamily="34" charset="0"/>
+              <a:buChar char="o"/>
+            </a:pPr>
+            <a:r>
+              <a:rPr lang="en-US"/>
+              <a:t>Average Packet Interval</a:t>
+            </a:r>
+          </a:p>
+          <a:p>
+            <a:pPr lvl="1">
+              <a:buFont typeface="Courier New" panose="020B0604020202020204" pitchFamily="34" charset="0"/>
+              <a:buChar char="o"/>
+            </a:pPr>
+            <a:r>
+              <a:rPr lang="en-US"/>
+              <a:t>Maximum Packet Interval</a:t>
+            </a:r>
+          </a:p>
+          <a:p>
+            <a:pPr lvl="1">
+              <a:buFont typeface="Courier New" panose="020B0604020202020204" pitchFamily="34" charset="0"/>
+              <a:buChar char="o"/>
+            </a:pPr>
+            <a:r>
+              <a:rPr lang="en-US"/>
+              <a:t>Minimum Packet Interval</a:t>
+            </a:r>
+          </a:p>
+          <a:p>
+            <a:pPr marL="457200" lvl="1" indent="0">
+              <a:buNone/>
+            </a:pPr>
+            <a:endParaRPr lang="en-US"/>
+          </a:p>
+        </p:txBody>
+      </p:sp>
+      <p:sp>
+        <p:nvSpPr>
+          <p:cNvPr id="4" name="TextBox 3">
+            <a:extLst>
+              <a:ext uri="{FF2B5EF4-FFF2-40B4-BE49-F238E27FC236}">
+                <a16:creationId xmlns:a16="http://schemas.microsoft.com/office/drawing/2014/main" id="{84309009-C055-ED4E-E14F-3879B8075781}"/>
+              </a:ext>
+            </a:extLst>
+          </p:cNvPr>
+          <p:cNvSpPr txBox="1"/>
+          <p:nvPr/>
+        </p:nvSpPr>
+        <p:spPr>
+          <a:xfrm>
+            <a:off x="4341942" y="3882420"/>
+            <a:ext cx="6585138" cy="1531445"/>
+          </a:xfrm>
+          <a:prstGeom prst="rect">
+            <a:avLst/>
+          </a:prstGeom>
+          <a:noFill/>
+        </p:spPr>
+        <p:txBody>
+          <a:bodyPr wrap="square" rtlCol="0">
+            <a:spAutoFit/>
+          </a:bodyPr>
+          <a:lstStyle/>
+          <a:p>
+            <a:pPr marL="742950" lvl="1" indent="-285750">
+              <a:lnSpc>
+                <a:spcPct val="150000"/>
+              </a:lnSpc>
+              <a:buClr>
+                <a:schemeClr val="accent1"/>
+              </a:buClr>
+              <a:buSzPct val="145000"/>
+              <a:buFont typeface="Courier New" panose="02070309020205020404" pitchFamily="49" charset="0"/>
+              <a:buChar char="o"/>
+            </a:pPr>
+            <a:r>
+              <a:rPr lang="en-US" sz="1600"/>
+              <a:t>Average Packet length</a:t>
+            </a:r>
+          </a:p>
+          <a:p>
+            <a:pPr marL="742950" lvl="1" indent="-285750">
+              <a:lnSpc>
+                <a:spcPct val="150000"/>
+              </a:lnSpc>
+              <a:buClr>
+                <a:schemeClr val="accent1"/>
+              </a:buClr>
+              <a:buSzPct val="145000"/>
+              <a:buFont typeface="Courier New" panose="02070309020205020404" pitchFamily="49" charset="0"/>
+              <a:buChar char="o"/>
+            </a:pPr>
+            <a:r>
+              <a:rPr lang="en-US" sz="1600"/>
+              <a:t>Maximum Packet Length</a:t>
+            </a:r>
+          </a:p>
+          <a:p>
+            <a:pPr marL="742950" lvl="1" indent="-285750">
+              <a:lnSpc>
+                <a:spcPct val="150000"/>
+              </a:lnSpc>
+              <a:buClr>
+                <a:schemeClr val="accent1"/>
+              </a:buClr>
+              <a:buSzPct val="145000"/>
+              <a:buFont typeface="Courier New" panose="02070309020205020404" pitchFamily="49" charset="0"/>
+              <a:buChar char="o"/>
+            </a:pPr>
+            <a:r>
+              <a:rPr lang="en-US" sz="1600"/>
+              <a:t>Minimum Packet Length</a:t>
+            </a:r>
+          </a:p>
+          <a:p>
+            <a:pPr marL="742950" lvl="1" indent="-285750">
+              <a:lnSpc>
+                <a:spcPct val="150000"/>
+              </a:lnSpc>
+              <a:buClr>
+                <a:schemeClr val="accent1"/>
+              </a:buClr>
+              <a:buSzPct val="145000"/>
+              <a:buFont typeface="Courier New" panose="02070309020205020404" pitchFamily="49" charset="0"/>
+              <a:buChar char="o"/>
+            </a:pPr>
+            <a:r>
+              <a:rPr lang="en-US" sz="1600"/>
+              <a:t>Most Common Packet Length</a:t>
+            </a:r>
+          </a:p>
+        </p:txBody>
+      </p:sp>
+    </p:spTree>
+    <p:extLst>
+      <p:ext uri="{BB962C8B-B14F-4D97-AF65-F5344CB8AC3E}">
+        <p14:creationId xmlns:p14="http://schemas.microsoft.com/office/powerpoint/2010/main" val="3200656440"/>
+      </p:ext>
+    </p:extLst>
+  </p:cSld>
+  <p:clrMapOvr>
+    <a:masterClrMapping/>
+  </p:clrMapOvr>
+</p:sld>
+</file>
+
+<file path=ppt/slides/slide5.xml><?xml version="1.0" encoding="utf-8"?>
+<p:sld xmlns:a="http://schemas.openxmlformats.org/drawingml/2006/main" xmlns:r="http://schemas.openxmlformats.org/officeDocument/2006/relationships" xmlns:p="http://schemas.openxmlformats.org/presentationml/2006/main">
+  <p:cSld>
+    <p:spTree>
+      <p:nvGrpSpPr>
+        <p:cNvPr id="1" name=""/>
+        <p:cNvGrpSpPr/>
+        <p:nvPr/>
+      </p:nvGrpSpPr>
+      <p:grpSpPr>
+        <a:xfrm>
+          <a:off x="0" y="0"/>
+          <a:ext cx="0" cy="0"/>
+          <a:chOff x="0" y="0"/>
+          <a:chExt cx="0" cy="0"/>
+        </a:xfrm>
+      </p:grpSpPr>
+      <p:sp>
+        <p:nvSpPr>
+          <p:cNvPr id="2" name="Title 1">
+            <a:extLst>
+              <a:ext uri="{FF2B5EF4-FFF2-40B4-BE49-F238E27FC236}">
+                <a16:creationId xmlns:a16="http://schemas.microsoft.com/office/drawing/2014/main" id="{9AA2865A-0433-502A-5F11-A6E3B8B8A608}"/>
+              </a:ext>
+            </a:extLst>
+          </p:cNvPr>
+          <p:cNvSpPr>
+            <a:spLocks noGrp="1"/>
+          </p:cNvSpPr>
+          <p:nvPr>
+            <p:ph type="title"/>
+          </p:nvPr>
+        </p:nvSpPr>
+        <p:spPr/>
+        <p:txBody>
+          <a:bodyPr/>
+          <a:lstStyle/>
+          <a:p>
+            <a:r>
+              <a:rPr lang="en-US"/>
+              <a:t>Employed Method</a:t>
+            </a:r>
+          </a:p>
+        </p:txBody>
+      </p:sp>
+      <p:sp>
+        <p:nvSpPr>
+          <p:cNvPr id="3" name="Content Placeholder 2">
+            <a:extLst>
+              <a:ext uri="{FF2B5EF4-FFF2-40B4-BE49-F238E27FC236}">
+                <a16:creationId xmlns:a16="http://schemas.microsoft.com/office/drawing/2014/main" id="{294EF941-DA16-8606-2248-65B029B768FD}"/>
+              </a:ext>
+            </a:extLst>
+          </p:cNvPr>
+          <p:cNvSpPr>
+            <a:spLocks noGrp="1"/>
+          </p:cNvSpPr>
+          <p:nvPr>
+            <p:ph idx="1"/>
+          </p:nvPr>
+        </p:nvSpPr>
+        <p:spPr/>
+        <p:txBody>
+          <a:bodyPr>
+            <a:normAutofit fontScale="92500" lnSpcReduction="10000"/>
+          </a:bodyPr>
+          <a:lstStyle/>
+          <a:p>
+            <a:r>
+              <a:rPr lang="en-US"/>
+              <a:t>Random Forest</a:t>
+            </a:r>
+          </a:p>
+          <a:p>
+            <a:r>
+              <a:rPr lang="en-US"/>
+              <a:t>Constructs multiple decision trees during the training phase then aggregates their outputs to make a final decision.</a:t>
+            </a:r>
+          </a:p>
+          <a:p>
+            <a:pPr lvl="1"/>
+            <a:r>
+              <a:rPr lang="en-US"/>
+              <a:t>Process:</a:t>
+            </a:r>
+          </a:p>
+          <a:p>
+            <a:pPr lvl="2"/>
+            <a:r>
+              <a:rPr lang="en-US"/>
+              <a:t>Building the Forest</a:t>
+            </a:r>
+          </a:p>
+          <a:p>
+            <a:pPr lvl="2"/>
+            <a:r>
+              <a:rPr lang="en-US"/>
+              <a:t>Voting Mechanism</a:t>
+            </a:r>
+          </a:p>
+          <a:p>
+            <a:pPr lvl="2"/>
+            <a:r>
+              <a:rPr lang="en-US"/>
+              <a:t>Robustness and Stability</a:t>
+            </a:r>
+          </a:p>
+          <a:p>
+            <a:pPr lvl="3"/>
+            <a:r>
+              <a:rPr lang="en-US"/>
+              <a:t>Resistant to overfitting</a:t>
+            </a:r>
+          </a:p>
+          <a:p>
+            <a:pPr lvl="1"/>
+            <a:endParaRPr lang="en-US"/>
+          </a:p>
+        </p:txBody>
+      </p:sp>
+      <p:sp>
+        <p:nvSpPr>
+          <p:cNvPr id="4" name="TextBox 3">
+            <a:extLst>
+              <a:ext uri="{FF2B5EF4-FFF2-40B4-BE49-F238E27FC236}">
+                <a16:creationId xmlns:a16="http://schemas.microsoft.com/office/drawing/2014/main" id="{E67D3F2F-262B-AC30-9846-4FA15A634B56}"/>
+              </a:ext>
+            </a:extLst>
+          </p:cNvPr>
+          <p:cNvSpPr txBox="1"/>
+          <p:nvPr/>
+        </p:nvSpPr>
+        <p:spPr>
+          <a:xfrm>
+            <a:off x="5749954" y="3802320"/>
+            <a:ext cx="4559727" cy="2954655"/>
+          </a:xfrm>
+          <a:prstGeom prst="rect">
+            <a:avLst/>
+          </a:prstGeom>
+          <a:noFill/>
+        </p:spPr>
+        <p:txBody>
+          <a:bodyPr wrap="square" rtlCol="0">
+            <a:spAutoFit/>
+          </a:bodyPr>
+          <a:lstStyle/>
+          <a:p>
+            <a:pPr marL="342900" indent="-342900">
+              <a:buClr>
+                <a:schemeClr val="accent1">
+                  <a:lumMod val="75000"/>
+                </a:schemeClr>
+              </a:buClr>
+              <a:buSzPct val="145000"/>
+              <a:buFont typeface="Arial" panose="020B0604020202020204" pitchFamily="34" charset="0"/>
+              <a:buChar char="•"/>
+            </a:pPr>
+            <a:r>
+              <a:rPr lang="en-US" sz="1900"/>
+              <a:t>Benefits:</a:t>
+            </a:r>
+          </a:p>
+          <a:p>
+            <a:pPr marL="800100" lvl="1" indent="-342900">
+              <a:lnSpc>
+                <a:spcPct val="150000"/>
+              </a:lnSpc>
+              <a:buClr>
+                <a:schemeClr val="accent1">
+                  <a:lumMod val="75000"/>
+                </a:schemeClr>
+              </a:buClr>
+              <a:buSzPct val="145000"/>
+              <a:buFont typeface="Arial" panose="020B0604020202020204" pitchFamily="34" charset="0"/>
+              <a:buChar char="•"/>
+            </a:pPr>
+            <a:r>
+              <a:rPr lang="en-US" sz="1700"/>
+              <a:t>Handling Complex Features</a:t>
+            </a:r>
+          </a:p>
+          <a:p>
+            <a:pPr marL="1257300" lvl="2" indent="-342900">
+              <a:lnSpc>
+                <a:spcPct val="150000"/>
+              </a:lnSpc>
+              <a:buClr>
+                <a:schemeClr val="accent1">
+                  <a:lumMod val="75000"/>
+                </a:schemeClr>
+              </a:buClr>
+              <a:buSzPct val="145000"/>
+              <a:buFont typeface="Arial" panose="020B0604020202020204" pitchFamily="34" charset="0"/>
+              <a:buChar char="•"/>
+            </a:pPr>
+            <a:r>
+              <a:rPr lang="en-US" sz="1500"/>
+              <a:t>Protocols and Packet Length</a:t>
+            </a:r>
+          </a:p>
+          <a:p>
+            <a:pPr marL="800100" lvl="1" indent="-342900">
+              <a:lnSpc>
+                <a:spcPct val="150000"/>
+              </a:lnSpc>
+              <a:buClr>
+                <a:schemeClr val="accent1">
+                  <a:lumMod val="75000"/>
+                </a:schemeClr>
+              </a:buClr>
+              <a:buSzPct val="145000"/>
+              <a:buFont typeface="Arial" panose="020B0604020202020204" pitchFamily="34" charset="0"/>
+              <a:buChar char="•"/>
+            </a:pPr>
+            <a:r>
+              <a:rPr lang="en-US" sz="1700"/>
+              <a:t>Generalization</a:t>
+            </a:r>
+          </a:p>
+          <a:p>
+            <a:pPr marL="1257300" lvl="2" indent="-342900">
+              <a:lnSpc>
+                <a:spcPct val="150000"/>
+              </a:lnSpc>
+              <a:buClr>
+                <a:schemeClr val="accent1">
+                  <a:lumMod val="75000"/>
+                </a:schemeClr>
+              </a:buClr>
+              <a:buSzPct val="145000"/>
+              <a:buFont typeface="Arial" panose="020B0604020202020204" pitchFamily="34" charset="0"/>
+              <a:buChar char="•"/>
+            </a:pPr>
+            <a:r>
+              <a:rPr lang="en-US" sz="1500"/>
+              <a:t>Variation in traffic patterns</a:t>
+            </a:r>
+          </a:p>
+          <a:p>
+            <a:pPr marL="800100" lvl="1" indent="-342900">
+              <a:lnSpc>
+                <a:spcPct val="150000"/>
+              </a:lnSpc>
+              <a:buClr>
+                <a:schemeClr val="accent1">
+                  <a:lumMod val="75000"/>
+                </a:schemeClr>
+              </a:buClr>
+              <a:buSzPct val="145000"/>
+              <a:buFont typeface="Arial" panose="020B0604020202020204" pitchFamily="34" charset="0"/>
+              <a:buChar char="•"/>
+            </a:pPr>
+            <a:r>
+              <a:rPr lang="en-US" sz="1700"/>
+              <a:t>Interpretability</a:t>
+            </a:r>
+          </a:p>
+          <a:p>
+            <a:pPr marL="800100" lvl="1" indent="-342900">
+              <a:lnSpc>
+                <a:spcPct val="150000"/>
+              </a:lnSpc>
+              <a:buClr>
+                <a:schemeClr val="accent1">
+                  <a:lumMod val="75000"/>
+                </a:schemeClr>
+              </a:buClr>
+              <a:buSzPct val="145000"/>
+              <a:buFont typeface="Arial" panose="020B0604020202020204" pitchFamily="34" charset="0"/>
+              <a:buChar char="•"/>
+            </a:pPr>
+            <a:r>
+              <a:rPr lang="en-US" sz="1700"/>
+              <a:t>Scalability</a:t>
+            </a:r>
+          </a:p>
+          <a:p>
+            <a:pPr marL="800100" lvl="1" indent="-342900">
+              <a:buClr>
+                <a:schemeClr val="accent1">
+                  <a:lumMod val="75000"/>
+                </a:schemeClr>
+              </a:buClr>
+              <a:buSzPct val="145000"/>
+              <a:buFont typeface="Arial" panose="020B0604020202020204" pitchFamily="34" charset="0"/>
+              <a:buChar char="•"/>
+            </a:pPr>
+            <a:endParaRPr lang="en-US" sz="2000"/>
+          </a:p>
+        </p:txBody>
+      </p:sp>
+    </p:spTree>
+    <p:extLst>
+      <p:ext uri="{BB962C8B-B14F-4D97-AF65-F5344CB8AC3E}">
+        <p14:creationId xmlns:p14="http://schemas.microsoft.com/office/powerpoint/2010/main" val="3499279880"/>
+      </p:ext>
+    </p:extLst>
+  </p:cSld>
+  <p:clrMapOvr>
+    <a:masterClrMapping/>
+  </p:clrMapOvr>
+</p:sld>
+</file>
+
+<file path=ppt/slides/slide6.xml><?xml version="1.0" encoding="utf-8"?>
+<p:sld xmlns:a="http://schemas.openxmlformats.org/drawingml/2006/main" xmlns:r="http://schemas.openxmlformats.org/officeDocument/2006/relationships" xmlns:p="http://schemas.openxmlformats.org/presentationml/2006/main">
+  <p:cSld>
+    <p:spTree>
+      <p:nvGrpSpPr>
+        <p:cNvPr id="1" name=""/>
+        <p:cNvGrpSpPr/>
+        <p:nvPr/>
+      </p:nvGrpSpPr>
+      <p:grpSpPr>
+        <a:xfrm>
+          <a:off x="0" y="0"/>
+          <a:ext cx="0" cy="0"/>
+          <a:chOff x="0" y="0"/>
+          <a:chExt cx="0" cy="0"/>
+        </a:xfrm>
+      </p:grpSpPr>
+      <p:sp>
+        <p:nvSpPr>
+          <p:cNvPr id="2" name="Title 1">
+            <a:extLst>
+              <a:ext uri="{FF2B5EF4-FFF2-40B4-BE49-F238E27FC236}">
+                <a16:creationId xmlns:a16="http://schemas.microsoft.com/office/drawing/2014/main" id="{D29AD1C1-8E9C-DD17-57F2-99864BEA7C67}"/>
+              </a:ext>
+            </a:extLst>
+          </p:cNvPr>
+          <p:cNvSpPr>
+            <a:spLocks noGrp="1"/>
+          </p:cNvSpPr>
+          <p:nvPr>
+            <p:ph type="title"/>
+          </p:nvPr>
+        </p:nvSpPr>
+        <p:spPr/>
+        <p:txBody>
+          <a:bodyPr/>
+          <a:lstStyle/>
+          <a:p>
+            <a:r>
+              <a:rPr lang="en-US"/>
+              <a:t>Employed Method</a:t>
+            </a:r>
+          </a:p>
+        </p:txBody>
+      </p:sp>
+      <p:sp>
+        <p:nvSpPr>
+          <p:cNvPr id="3" name="Content Placeholder 2">
+            <a:extLst>
+              <a:ext uri="{FF2B5EF4-FFF2-40B4-BE49-F238E27FC236}">
+                <a16:creationId xmlns:a16="http://schemas.microsoft.com/office/drawing/2014/main" id="{8FFDAC13-B76C-1C81-84CF-D39D3CB14F4F}"/>
+              </a:ext>
+            </a:extLst>
+          </p:cNvPr>
+          <p:cNvSpPr>
+            <a:spLocks noGrp="1"/>
+          </p:cNvSpPr>
+          <p:nvPr>
+            <p:ph idx="1"/>
+          </p:nvPr>
+        </p:nvSpPr>
+        <p:spPr/>
+        <p:txBody>
+          <a:bodyPr/>
+          <a:lstStyle/>
+          <a:p>
+            <a:r>
+              <a:rPr lang="en-US"/>
+              <a:t>Compared two Baselines</a:t>
+            </a:r>
+          </a:p>
+          <a:p>
+            <a:pPr lvl="1"/>
+            <a:r>
+              <a:rPr lang="en-US"/>
+              <a:t>Linear Regression</a:t>
+            </a:r>
+          </a:p>
+          <a:p>
+            <a:pPr lvl="1"/>
+            <a:r>
+              <a:rPr lang="en-US"/>
+              <a:t>Logistic Regression</a:t>
+            </a:r>
+          </a:p>
+        </p:txBody>
+      </p:sp>
+    </p:spTree>
+    <p:extLst>
+      <p:ext uri="{BB962C8B-B14F-4D97-AF65-F5344CB8AC3E}">
+        <p14:creationId xmlns:p14="http://schemas.microsoft.com/office/powerpoint/2010/main" val="3438306843"/>
+      </p:ext>
+    </p:extLst>
+  </p:cSld>
+  <p:clrMapOvr>
+    <a:masterClrMapping/>
+  </p:clrMapOvr>
+</p:sld>
+</file>
+
+<file path=ppt/slides/slide7.xml><?xml version="1.0" encoding="utf-8"?>
+<p:sld xmlns:a="http://schemas.openxmlformats.org/drawingml/2006/main" xmlns:r="http://schemas.openxmlformats.org/officeDocument/2006/relationships" xmlns:p="http://schemas.openxmlformats.org/presentationml/2006/main">
+  <p:cSld>
+    <p:spTree>
+      <p:nvGrpSpPr>
+        <p:cNvPr id="1" name=""/>
+        <p:cNvGrpSpPr/>
+        <p:nvPr/>
+      </p:nvGrpSpPr>
+      <p:grpSpPr>
+        <a:xfrm>
+          <a:off x="0" y="0"/>
+          <a:ext cx="0" cy="0"/>
+          <a:chOff x="0" y="0"/>
+          <a:chExt cx="0" cy="0"/>
+        </a:xfrm>
+      </p:grpSpPr>
+      <p:sp>
+        <p:nvSpPr>
+          <p:cNvPr id="2" name="Title 1">
+            <a:extLst>
+              <a:ext uri="{FF2B5EF4-FFF2-40B4-BE49-F238E27FC236}">
+                <a16:creationId xmlns:a16="http://schemas.microsoft.com/office/drawing/2014/main" id="{4FCCF608-2CA3-5142-E05E-942C76D6394A}"/>
+              </a:ext>
+            </a:extLst>
+          </p:cNvPr>
+          <p:cNvSpPr>
+            <a:spLocks noGrp="1"/>
+          </p:cNvSpPr>
+          <p:nvPr>
+            <p:ph type="title"/>
+          </p:nvPr>
+        </p:nvSpPr>
+        <p:spPr>
+          <a:xfrm>
+            <a:off x="1179511" y="9144"/>
+            <a:ext cx="10018713" cy="1752599"/>
+          </a:xfrm>
+        </p:spPr>
+        <p:txBody>
+          <a:bodyPr/>
+          <a:lstStyle/>
+          <a:p>
+            <a:r>
+              <a:rPr lang="en-US"/>
+              <a:t>Dataset</a:t>
+            </a:r>
+          </a:p>
+        </p:txBody>
+      </p:sp>
+      <p:sp>
+        <p:nvSpPr>
+          <p:cNvPr id="3" name="Content Placeholder 2">
+            <a:extLst>
+              <a:ext uri="{FF2B5EF4-FFF2-40B4-BE49-F238E27FC236}">
+                <a16:creationId xmlns:a16="http://schemas.microsoft.com/office/drawing/2014/main" id="{2C0F809A-20D9-1C89-DFD4-A17B19BE18A1}"/>
+              </a:ext>
+            </a:extLst>
+          </p:cNvPr>
+          <p:cNvSpPr>
+            <a:spLocks noGrp="1"/>
+          </p:cNvSpPr>
+          <p:nvPr>
+            <p:ph idx="1"/>
+          </p:nvPr>
+        </p:nvSpPr>
+        <p:spPr>
+          <a:xfrm>
+            <a:off x="1496503" y="2008631"/>
+            <a:ext cx="3572506" cy="3124201"/>
+          </a:xfrm>
+        </p:spPr>
+        <p:txBody>
+          <a:bodyPr/>
+          <a:lstStyle/>
+          <a:p>
+            <a:pPr>
+              <a:buClr>
+                <a:srgbClr val="30ACEC">
+                  <a:lumMod val="75000"/>
+                </a:srgbClr>
+              </a:buClr>
+            </a:pPr>
+            <a:r>
+              <a:rPr lang="en-US"/>
+              <a:t>The training and test sets were split with a ratio of </a:t>
+            </a:r>
+            <a:r>
+              <a:rPr lang="en-US" b="1"/>
+              <a:t>50:50 </a:t>
+            </a:r>
+            <a:r>
+              <a:rPr lang="en-US"/>
+              <a:t> </a:t>
+            </a:r>
+          </a:p>
+          <a:p>
+            <a:pPr>
+              <a:buClr>
+                <a:srgbClr val="1287C3"/>
+              </a:buClr>
+            </a:pPr>
+            <a:r>
+              <a:rPr lang="en-US">
+                <a:solidFill>
+                  <a:srgbClr val="000000"/>
+                </a:solidFill>
+              </a:rPr>
+              <a:t>10 captures for each label/website</a:t>
+            </a:r>
+          </a:p>
+        </p:txBody>
+      </p:sp>
+      <p:pic>
+        <p:nvPicPr>
+          <p:cNvPr id="5" name="Picture 4" descr="A table of numbers and lines&#10;&#10;AI-generated content may be incorrect.">
+            <a:extLst>
+              <a:ext uri="{FF2B5EF4-FFF2-40B4-BE49-F238E27FC236}">
+                <a16:creationId xmlns:a16="http://schemas.microsoft.com/office/drawing/2014/main" id="{FE734E51-B36D-6B7D-FA99-0588314BE74B}"/>
+              </a:ext>
+            </a:extLst>
+          </p:cNvPr>
+          <p:cNvPicPr>
+            <a:picLocks noChangeAspect="1"/>
+          </p:cNvPicPr>
+          <p:nvPr/>
+        </p:nvPicPr>
+        <p:blipFill>
+          <a:blip r:embed="rId2"/>
+          <a:stretch>
+            <a:fillRect/>
+          </a:stretch>
+        </p:blipFill>
+        <p:spPr>
+          <a:xfrm>
+            <a:off x="5217540" y="1603248"/>
+            <a:ext cx="6420359" cy="4669536"/>
+          </a:xfrm>
+          <a:prstGeom prst="rect">
+            <a:avLst/>
+          </a:prstGeom>
+        </p:spPr>
+      </p:pic>
+    </p:spTree>
+    <p:extLst>
+      <p:ext uri="{BB962C8B-B14F-4D97-AF65-F5344CB8AC3E}">
+        <p14:creationId xmlns:p14="http://schemas.microsoft.com/office/powerpoint/2010/main" val="818039549"/>
+      </p:ext>
+    </p:extLst>
+  </p:cSld>
+  <p:clrMapOvr>
+    <a:masterClrMapping/>
+  </p:clrMapOvr>
+</p:sld>
+</file>
+
+<file path=ppt/slides/slide8.xml><?xml version="1.0" encoding="utf-8"?>
+<p:sld xmlns:a="http://schemas.openxmlformats.org/drawingml/2006/main" xmlns:r="http://schemas.openxmlformats.org/officeDocument/2006/relationships" xmlns:p="http://schemas.openxmlformats.org/presentationml/2006/main">
+  <p:cSld>
+    <p:spTree>
+      <p:nvGrpSpPr>
+        <p:cNvPr id="1" name=""/>
+        <p:cNvGrpSpPr/>
+        <p:nvPr/>
+      </p:nvGrpSpPr>
+      <p:grpSpPr>
+        <a:xfrm>
+          <a:off x="0" y="0"/>
+          <a:ext cx="0" cy="0"/>
+          <a:chOff x="0" y="0"/>
+          <a:chExt cx="0" cy="0"/>
+        </a:xfrm>
+      </p:grpSpPr>
+      <p:sp>
+        <p:nvSpPr>
+          <p:cNvPr id="2" name="Title 1">
+            <a:extLst>
+              <a:ext uri="{FF2B5EF4-FFF2-40B4-BE49-F238E27FC236}">
+                <a16:creationId xmlns:a16="http://schemas.microsoft.com/office/drawing/2014/main" id="{67A5C3C6-C5CA-CB41-FE8A-706179C21A89}"/>
+              </a:ext>
+            </a:extLst>
+          </p:cNvPr>
+          <p:cNvSpPr>
+            <a:spLocks noGrp="1"/>
+          </p:cNvSpPr>
+          <p:nvPr>
+            <p:ph type="title"/>
+          </p:nvPr>
+        </p:nvSpPr>
+        <p:spPr/>
+        <p:txBody>
+          <a:bodyPr/>
+          <a:lstStyle/>
+          <a:p>
+            <a:r>
+              <a:rPr lang="en-US"/>
+              <a:t>Evaluation Metrics</a:t>
+            </a:r>
+          </a:p>
+        </p:txBody>
+      </p:sp>
+      <p:sp>
+        <p:nvSpPr>
+          <p:cNvPr id="3" name="Content Placeholder 2">
+            <a:extLst>
+              <a:ext uri="{FF2B5EF4-FFF2-40B4-BE49-F238E27FC236}">
+                <a16:creationId xmlns:a16="http://schemas.microsoft.com/office/drawing/2014/main" id="{6FDF66EC-97AF-BB01-6DE3-73033D1C439D}"/>
+              </a:ext>
+            </a:extLst>
+          </p:cNvPr>
+          <p:cNvSpPr>
+            <a:spLocks noGrp="1"/>
+          </p:cNvSpPr>
+          <p:nvPr>
+            <p:ph idx="1"/>
+          </p:nvPr>
+        </p:nvSpPr>
+        <p:spPr/>
+        <p:txBody>
+          <a:bodyPr/>
+          <a:lstStyle/>
+          <a:p>
+            <a:r>
+              <a:rPr lang="en-US"/>
+              <a:t>Primary Metrics	</a:t>
+            </a:r>
+          </a:p>
+          <a:p>
+            <a:pPr lvl="1"/>
+            <a:r>
+              <a:rPr lang="en-US"/>
+              <a:t>Accuracy</a:t>
+            </a:r>
+          </a:p>
+          <a:p>
+            <a:pPr lvl="1"/>
+            <a:r>
+              <a:rPr lang="en-US"/>
+              <a:t>Macro F1 score</a:t>
+            </a:r>
+          </a:p>
+        </p:txBody>
+      </p:sp>
+      <p:pic>
+        <p:nvPicPr>
+          <p:cNvPr id="5" name="Picture 4">
+            <a:extLst>
+              <a:ext uri="{FF2B5EF4-FFF2-40B4-BE49-F238E27FC236}">
+                <a16:creationId xmlns:a16="http://schemas.microsoft.com/office/drawing/2014/main" id="{6E214C93-6571-028F-F90C-C640E4A7428C}"/>
+              </a:ext>
+            </a:extLst>
+          </p:cNvPr>
+          <p:cNvPicPr>
+            <a:picLocks noChangeAspect="1"/>
+          </p:cNvPicPr>
+          <p:nvPr/>
+        </p:nvPicPr>
+        <p:blipFill>
+          <a:blip r:embed="rId2"/>
+          <a:srcRect l="5679" t="33766" r="2595"/>
+          <a:stretch>
+            <a:fillRect/>
+          </a:stretch>
+        </p:blipFill>
+        <p:spPr>
+          <a:xfrm>
+            <a:off x="5147630" y="3528725"/>
+            <a:ext cx="3687478" cy="700374"/>
+          </a:xfrm>
+          <a:prstGeom prst="rect">
+            <a:avLst/>
+          </a:prstGeom>
+        </p:spPr>
+      </p:pic>
+      <p:pic>
+        <p:nvPicPr>
+          <p:cNvPr id="7" name="Picture 6">
+            <a:extLst>
+              <a:ext uri="{FF2B5EF4-FFF2-40B4-BE49-F238E27FC236}">
+                <a16:creationId xmlns:a16="http://schemas.microsoft.com/office/drawing/2014/main" id="{1946F648-0E1B-3649-650E-CCA2B20F3016}"/>
+              </a:ext>
+            </a:extLst>
+          </p:cNvPr>
+          <p:cNvPicPr>
+            <a:picLocks noChangeAspect="1"/>
+          </p:cNvPicPr>
+          <p:nvPr/>
+        </p:nvPicPr>
+        <p:blipFill>
+          <a:blip r:embed="rId3"/>
+          <a:srcRect l="2332" r="-80"/>
+          <a:stretch>
+            <a:fillRect/>
+          </a:stretch>
+        </p:blipFill>
+        <p:spPr>
+          <a:xfrm>
+            <a:off x="5147630" y="4229099"/>
+            <a:ext cx="3687478" cy="847843"/>
+          </a:xfrm>
+          <a:prstGeom prst="rect">
+            <a:avLst/>
+          </a:prstGeom>
+        </p:spPr>
+      </p:pic>
+    </p:spTree>
+    <p:extLst>
+      <p:ext uri="{BB962C8B-B14F-4D97-AF65-F5344CB8AC3E}">
+        <p14:creationId xmlns:p14="http://schemas.microsoft.com/office/powerpoint/2010/main" val="574110398"/>
+      </p:ext>
+    </p:extLst>
+  </p:cSld>
+  <p:clrMapOvr>
+    <a:masterClrMapping/>
+  </p:clrMapOvr>
+</p:sld>
+</file>
+
+<file path=ppt/slides/slide9.xml><?xml version="1.0" encoding="utf-8"?>
+<p:sld xmlns:a="http://schemas.openxmlformats.org/drawingml/2006/main" xmlns:r="http://schemas.openxmlformats.org/officeDocument/2006/relationships" xmlns:p="http://schemas.openxmlformats.org/presentationml/2006/main">
+  <p:cSld>
+    <p:spTree>
+      <p:nvGrpSpPr>
+        <p:cNvPr id="1" name=""/>
+        <p:cNvGrpSpPr/>
+        <p:nvPr/>
+      </p:nvGrpSpPr>
+      <p:grpSpPr>
+        <a:xfrm>
+          <a:off x="0" y="0"/>
+          <a:ext cx="0" cy="0"/>
+          <a:chOff x="0" y="0"/>
+          <a:chExt cx="0" cy="0"/>
+        </a:xfrm>
+      </p:grpSpPr>
+      <p:sp>
+        <p:nvSpPr>
+          <p:cNvPr id="2" name="Title 1">
+            <a:extLst>
+              <a:ext uri="{FF2B5EF4-FFF2-40B4-BE49-F238E27FC236}">
+                <a16:creationId xmlns:a16="http://schemas.microsoft.com/office/drawing/2014/main" id="{CAB3BA5F-48EA-CE01-213C-55D29FBA4715}"/>
+              </a:ext>
+            </a:extLst>
+          </p:cNvPr>
+          <p:cNvSpPr>
+            <a:spLocks noGrp="1"/>
+          </p:cNvSpPr>
+          <p:nvPr>
+            <p:ph type="title"/>
+          </p:nvPr>
+        </p:nvSpPr>
+        <p:spPr/>
+        <p:txBody>
+          <a:bodyPr/>
+          <a:lstStyle/>
+          <a:p>
+            <a:r>
+              <a:rPr lang="en-US"/>
+              <a:t>Evaluation Results</a:t>
+            </a:r>
+          </a:p>
+        </p:txBody>
+      </p:sp>
+      <p:sp>
+        <p:nvSpPr>
+          <p:cNvPr id="3" name="Content Placeholder 2">
+            <a:extLst>
+              <a:ext uri="{FF2B5EF4-FFF2-40B4-BE49-F238E27FC236}">
+                <a16:creationId xmlns:a16="http://schemas.microsoft.com/office/drawing/2014/main" id="{714ACD84-8AE7-9CAA-1786-42A0AAFCBF84}"/>
+              </a:ext>
+            </a:extLst>
+          </p:cNvPr>
+          <p:cNvSpPr>
+            <a:spLocks noGrp="1"/>
+          </p:cNvSpPr>
+          <p:nvPr>
+            <p:ph idx="1"/>
+          </p:nvPr>
+        </p:nvSpPr>
+        <p:spPr/>
+        <p:txBody>
+          <a:bodyPr/>
+          <a:lstStyle/>
+          <a:p>
+            <a:pPr>
+              <a:buClr>
+                <a:srgbClr val="1287C3"/>
+              </a:buClr>
+            </a:pPr>
+            <a:r>
+              <a:rPr lang="en-US"/>
+              <a:t>Linear Regression Accuracy: 0.36   Linear Regression Macro F1: 0.34</a:t>
+            </a:r>
+          </a:p>
+          <a:p>
+            <a:pPr>
+              <a:buClr>
+                <a:srgbClr val="1287C3"/>
+              </a:buClr>
+            </a:pPr>
+            <a:r>
+              <a:rPr lang="en-US"/>
+              <a:t>Logistic Regression Accuracy: 0.48    Logistic Regression Macro F1: 0.47</a:t>
+            </a:r>
+          </a:p>
+          <a:p>
+            <a:pPr>
+              <a:buClr>
+                <a:srgbClr val="1287C3"/>
+              </a:buClr>
+            </a:pPr>
+            <a:r>
+              <a:rPr lang="en-US"/>
+              <a:t>Random Forest Accuracy: 0.68    Random Forest Macro F1: 0.68</a:t>
+            </a:r>
+          </a:p>
+        </p:txBody>
+      </p:sp>
+    </p:spTree>
+    <p:extLst>
+      <p:ext uri="{BB962C8B-B14F-4D97-AF65-F5344CB8AC3E}">
+        <p14:creationId xmlns:p14="http://schemas.microsoft.com/office/powerpoint/2010/main" val="2958145603"/>
+      </p:ext>
+    </p:extLst>
+  </p:cSld>
+  <p:clrMapOvr>
+    <a:masterClrMapping/>
+  </p:clrMapOvr>
+</p:sld>
+</file>
+
 <file path=ppt/theme/theme1.xml><?xml version="1.0" encoding="utf-8"?>
-<a:theme xmlns:a="http://schemas.openxmlformats.org/drawingml/2006/main" name="Office Theme">
+<a:theme xmlns:a="http://schemas.openxmlformats.org/drawingml/2006/main" name="Parallax">
   <a:themeElements>
-    <a:clrScheme name="Office">
+    <a:clrScheme name="Parallax">
       <a:dk1>
         <a:sysClr val="windowText" lastClr="000000"/>
       </a:dk1>
@@ -3395,100 +8524,48 @@
         <a:sysClr val="window" lastClr="FFFFFF"/>
       </a:lt1>
       <a:dk2>
-        <a:srgbClr val="0E2841"/>
+        <a:srgbClr val="212121"/>
       </a:dk2>
       <a:lt2>
-        <a:srgbClr val="E8E8E8"/>
+        <a:srgbClr val="CDD0D1"/>
       </a:lt2>
       <a:accent1>
-        <a:srgbClr val="156082"/>
+        <a:srgbClr val="30ACEC"/>
       </a:accent1>
       <a:accent2>
-        <a:srgbClr val="E97132"/>
+        <a:srgbClr val="80C34F"/>
       </a:accent2>
       <a:accent3>
-        <a:srgbClr val="196B24"/>
+        <a:srgbClr val="E29D3E"/>
       </a:accent3>
       <a:accent4>
-        <a:srgbClr val="0F9ED5"/>
+        <a:srgbClr val="D64A3B"/>
       </a:accent4>
       <a:accent5>
-        <a:srgbClr val="A02B93"/>
+        <a:srgbClr val="D64787"/>
       </a:accent5>
       <a:accent6>
-        <a:srgbClr val="4EA72E"/>
+        <a:srgbClr val="A666E1"/>
       </a:accent6>
       <a:hlink>
-        <a:srgbClr val="467886"/>
+        <a:srgbClr val="3085ED"/>
       </a:hlink>
       <a:folHlink>
-        <a:srgbClr val="96607D"/>
+        <a:srgbClr val="82B6F4"/>
       </a:folHlink>
     </a:clrScheme>
-    <a:fontScheme name="Office">
+    <a:fontScheme name="Parallax">
       <a:majorFont>
-        <a:latin typeface="Aptos Display" panose="02110004020202020204"/>
+        <a:latin typeface="Corbel" panose="020B0503020204020204"/>
         <a:ea typeface=""/>
         <a:cs typeface=""/>
-        <a:font script="Jpan" typeface="游ゴシック Light"/>
-        <a:font script="Hang" typeface="맑은 고딕"/>
-        <a:font script="Hans" typeface="等线 Light"/>
+        <a:font script="Jpan" typeface="HGｺﾞｼｯｸM"/>
+        <a:font script="Hang" typeface="HY엽서L"/>
+        <a:font script="Hans" typeface="华文楷体"/>
         <a:font script="Hant" typeface="新細明體"/>
-        <a:font script="Arab" typeface="Times New Roman"/>
-        <a:font script="Hebr" typeface="Times New Roman"/>
-        <a:font script="Thai" typeface="Angsana New"/>
-        <a:font script="Ethi" typeface="Nyala"/>
-        <a:font script="Beng" typeface="Vrinda"/>
-        <a:font script="Gujr" typeface="Shruti"/>
-        <a:font script="Khmr" typeface="MoolBoran"/>
-        <a:font script="Knda" typeface="Tunga"/>
-        <a:font script="Guru" typeface="Raavi"/>
-        <a:font script="Cans" typeface="Euphemia"/>
-        <a:font script="Cher" typeface="Plantagenet Cherokee"/>
-        <a:font script="Yiii" typeface="Microsoft Yi Baiti"/>
-        <a:font script="Tibt" typeface="Microsoft Himalaya"/>
-        <a:font script="Thaa" typeface="MV Boli"/>
-        <a:font script="Deva" typeface="Mangal"/>
-        <a:font script="Telu" typeface="Gautami"/>
-        <a:font script="Taml" typeface="Latha"/>
-        <a:font script="Syrc" typeface="Estrangelo Edessa"/>
-        <a:font script="Orya" typeface="Kalinga"/>
-        <a:font script="Mlym" typeface="Kartika"/>
-        <a:font script="Laoo" typeface="DokChampa"/>
-        <a:font script="Sinh" typeface="Iskoola Pota"/>
-        <a:font script="Mong" typeface="Mongolian Baiti"/>
-        <a:font script="Viet" typeface="Times New Roman"/>
-        <a:font script="Uigh" typeface="Microsoft Uighur"/>
-        <a:font script="Geor" typeface="Sylfaen"/>
-        <a:font script="Armn" typeface="Arial"/>
-        <a:font script="Bugi" typeface="Leelawadee UI"/>
-        <a:font script="Bopo" typeface="Microsoft JhengHei"/>
-        <a:font script="Java" typeface="Javanese Text"/>
-        <a:font script="Lisu" typeface="Segoe UI"/>
-        <a:font script="Mymr" typeface="Myanmar Text"/>
-        <a:font script="Nkoo" typeface="Ebrima"/>
-        <a:font script="Olck" typeface="Nirmala UI"/>
-        <a:font script="Osma" typeface="Ebrima"/>
-        <a:font script="Phag" typeface="Phagspa"/>
-        <a:font script="Syrn" typeface="Estrangelo Edessa"/>
-        <a:font script="Syrj" typeface="Estrangelo Edessa"/>
-        <a:font script="Syre" typeface="Estrangelo Edessa"/>
-        <a:font script="Sora" typeface="Nirmala UI"/>
-        <a:font script="Tale" typeface="Microsoft Tai Le"/>
-        <a:font script="Talu" typeface="Microsoft New Tai Lue"/>
-        <a:font script="Tfng" typeface="Ebrima"/>
-      </a:majorFont>
-      <a:minorFont>
-        <a:latin typeface="Aptos" panose="02110004020202020204"/>
-        <a:ea typeface=""/>
-        <a:cs typeface=""/>
-        <a:font script="Jpan" typeface="游ゴシック"/>
-        <a:font script="Hang" typeface="맑은 고딕"/>
-        <a:font script="Hans" typeface="等线"/>
-        <a:font script="Hant" typeface="新細明體"/>
-        <a:font script="Arab" typeface="Arial"/>
-        <a:font script="Hebr" typeface="Arial"/>
-        <a:font script="Thai" typeface="Cordia New"/>
+        <a:font script="Arab" typeface="Tahoma"/>
+        <a:font script="Hebr" typeface="Miriam"/>
+        <a:font script="Thai" typeface="DilleniaUPC"/>
         <a:font script="Ethi" typeface="Nyala"/>
         <a:font script="Beng" typeface="Vrinda"/>
         <a:font script="Gujr" typeface="Shruti"/>
@@ -3512,26 +8589,44 @@
         <a:font script="Viet" typeface="Arial"/>
         <a:font script="Uigh" typeface="Microsoft Uighur"/>
         <a:font script="Geor" typeface="Sylfaen"/>
-        <a:font script="Armn" typeface="Arial"/>
-        <a:font script="Bugi" typeface="Leelawadee UI"/>
-        <a:font script="Bopo" typeface="Microsoft JhengHei"/>
-        <a:font script="Java" typeface="Javanese Text"/>
-        <a:font script="Lisu" typeface="Segoe UI"/>
-        <a:font script="Mymr" typeface="Myanmar Text"/>
-        <a:font script="Nkoo" typeface="Ebrima"/>
-        <a:font script="Olck" typeface="Nirmala UI"/>
-        <a:font script="Osma" typeface="Ebrima"/>
-        <a:font script="Phag" typeface="Phagspa"/>
-        <a:font script="Syrn" typeface="Estrangelo Edessa"/>
-        <a:font script="Syrj" typeface="Estrangelo Edessa"/>
-        <a:font script="Syre" typeface="Estrangelo Edessa"/>
-        <a:font script="Sora" typeface="Nirmala UI"/>
-        <a:font script="Tale" typeface="Microsoft Tai Le"/>
-        <a:font script="Talu" typeface="Microsoft New Tai Lue"/>
-        <a:font script="Tfng" typeface="Ebrima"/>
+      </a:majorFont>
+      <a:minorFont>
+        <a:latin typeface="Corbel" panose="020B0503020204020204"/>
+        <a:ea typeface=""/>
+        <a:cs typeface=""/>
+        <a:font script="Jpan" typeface="HGｺﾞｼｯｸM"/>
+        <a:font script="Hang" typeface="HY엽서L"/>
+        <a:font script="Hans" typeface="华文楷体"/>
+        <a:font script="Hant" typeface="新細明體"/>
+        <a:font script="Arab" typeface="Tahoma"/>
+        <a:font script="Hebr" typeface="Miriam"/>
+        <a:font script="Thai" typeface="DilleniaUPC"/>
+        <a:font script="Ethi" typeface="Nyala"/>
+        <a:font script="Beng" typeface="Vrinda"/>
+        <a:font script="Gujr" typeface="Shruti"/>
+        <a:font script="Khmr" typeface="DaunPenh"/>
+        <a:font script="Knda" typeface="Tunga"/>
+        <a:font script="Guru" typeface="Raavi"/>
+        <a:font script="Cans" typeface="Euphemia"/>
+        <a:font script="Cher" typeface="Plantagenet Cherokee"/>
+        <a:font script="Yiii" typeface="Microsoft Yi Baiti"/>
+        <a:font script="Tibt" typeface="Microsoft Himalaya"/>
+        <a:font script="Thaa" typeface="MV Boli"/>
+        <a:font script="Deva" typeface="Mangal"/>
+        <a:font script="Telu" typeface="Gautami"/>
+        <a:font script="Taml" typeface="Latha"/>
+        <a:font script="Syrc" typeface="Estrangelo Edessa"/>
+        <a:font script="Orya" typeface="Kalinga"/>
+        <a:font script="Mlym" typeface="Kartika"/>
+        <a:font script="Laoo" typeface="DokChampa"/>
+        <a:font script="Sinh" typeface="Iskoola Pota"/>
+        <a:font script="Mong" typeface="Mongolian Baiti"/>
+        <a:font script="Viet" typeface="Arial"/>
+        <a:font script="Uigh" typeface="Microsoft Uighur"/>
+        <a:font script="Geor" typeface="Sylfaen"/>
       </a:minorFont>
     </a:fontScheme>
-    <a:fmtScheme name="Office">
+    <a:fmtScheme name="Parallax">
       <a:fillStyleLst>
         <a:solidFill>
           <a:schemeClr val="phClr"/>
@@ -3540,23 +8635,13 @@
           <a:gsLst>
             <a:gs pos="0">
               <a:schemeClr val="phClr">
-                <a:lumMod val="110000"/>
-                <a:satMod val="105000"/>
-                <a:tint val="67000"/>
-              </a:schemeClr>
-            </a:gs>
-            <a:gs pos="50000">
-              <a:schemeClr val="phClr">
-                <a:lumMod val="105000"/>
-                <a:satMod val="103000"/>
-                <a:tint val="73000"/>
+                <a:tint val="60000"/>
+                <a:lumMod val="104000"/>
               </a:schemeClr>
             </a:gs>
             <a:gs pos="100000">
               <a:schemeClr val="phClr">
-                <a:lumMod val="105000"/>
-                <a:satMod val="109000"/>
-                <a:tint val="81000"/>
+                <a:tint val="84000"/>
               </a:schemeClr>
             </a:gs>
           </a:gsLst>
@@ -3566,50 +8651,42 @@
           <a:gsLst>
             <a:gs pos="0">
               <a:schemeClr val="phClr">
-                <a:satMod val="103000"/>
+                <a:tint val="96000"/>
                 <a:lumMod val="102000"/>
-                <a:tint val="94000"/>
-              </a:schemeClr>
-            </a:gs>
-            <a:gs pos="50000">
-              <a:schemeClr val="phClr">
-                <a:satMod val="110000"/>
-                <a:lumMod val="100000"/>
-                <a:shade val="100000"/>
               </a:schemeClr>
             </a:gs>
             <a:gs pos="100000">
               <a:schemeClr val="phClr">
-                <a:lumMod val="99000"/>
-                <a:satMod val="120000"/>
-                <a:shade val="78000"/>
+                <a:shade val="88000"/>
+                <a:lumMod val="94000"/>
               </a:schemeClr>
             </a:gs>
           </a:gsLst>
-          <a:lin ang="5400000" scaled="0"/>
+          <a:path path="circle">
+            <a:fillToRect l="50000" t="100000" r="100000" b="50000"/>
+          </a:path>
         </a:gradFill>
       </a:fillStyleLst>
       <a:lnStyleLst>
-        <a:ln w="12700" cap="flat" cmpd="sng" algn="ctr">
+        <a:ln w="9525" cap="rnd" cmpd="sng" algn="ctr">
+          <a:solidFill>
+            <a:schemeClr val="phClr">
+              <a:tint val="60000"/>
+            </a:schemeClr>
+          </a:solidFill>
+          <a:prstDash val="solid"/>
+        </a:ln>
+        <a:ln w="15875" cap="rnd" cmpd="sng" algn="ctr">
           <a:solidFill>
             <a:schemeClr val="phClr"/>
           </a:solidFill>
           <a:prstDash val="solid"/>
-          <a:miter lim="800000"/>
         </a:ln>
-        <a:ln w="19050" cap="flat" cmpd="sng" algn="ctr">
+        <a:ln w="22225" cap="rnd" cmpd="sng" algn="ctr">
           <a:solidFill>
             <a:schemeClr val="phClr"/>
           </a:solidFill>
           <a:prstDash val="solid"/>
-          <a:miter lim="800000"/>
-        </a:ln>
-        <a:ln w="25400" cap="flat" cmpd="sng" algn="ctr">
-          <a:solidFill>
-            <a:schemeClr val="phClr"/>
-          </a:solidFill>
-          <a:prstDash val="solid"/>
-          <a:miter lim="800000"/>
         </a:ln>
       </a:lnStyleLst>
       <a:effectStyleLst>
@@ -3617,89 +8694,90 @@
           <a:effectLst/>
         </a:effectStyle>
         <a:effectStyle>
-          <a:effectLst/>
+          <a:effectLst>
+            <a:reflection blurRad="12700" stA="26000" endPos="32000" dist="12700" dir="5400000" sy="-100000" rotWithShape="0"/>
+          </a:effectLst>
         </a:effectStyle>
         <a:effectStyle>
           <a:effectLst>
-            <a:outerShdw blurRad="57150" dist="19050" dir="5400000" algn="ctr" rotWithShape="0">
+            <a:outerShdw blurRad="38100" dist="25400" dir="5400000" rotWithShape="0">
               <a:srgbClr val="000000">
-                <a:alpha val="63000"/>
+                <a:alpha val="64000"/>
               </a:srgbClr>
             </a:outerShdw>
           </a:effectLst>
+          <a:scene3d>
+            <a:camera prst="orthographicFront">
+              <a:rot lat="0" lon="0" rev="0"/>
+            </a:camera>
+            <a:lightRig rig="threePt" dir="tl">
+              <a:rot lat="0" lon="0" rev="1200000"/>
+            </a:lightRig>
+          </a:scene3d>
+          <a:sp3d>
+            <a:bevelT w="25400" h="12700"/>
+          </a:sp3d>
         </a:effectStyle>
       </a:effectStyleLst>
       <a:bgFillStyleLst>
         <a:solidFill>
           <a:schemeClr val="phClr"/>
         </a:solidFill>
-        <a:solidFill>
-          <a:schemeClr val="phClr">
-            <a:tint val="95000"/>
-            <a:satMod val="170000"/>
-          </a:schemeClr>
-        </a:solidFill>
         <a:gradFill rotWithShape="1">
           <a:gsLst>
             <a:gs pos="0">
               <a:schemeClr val="phClr">
-                <a:tint val="93000"/>
-                <a:satMod val="150000"/>
-                <a:shade val="98000"/>
-                <a:lumMod val="102000"/>
-              </a:schemeClr>
-            </a:gs>
-            <a:gs pos="50000">
-              <a:schemeClr val="phClr">
-                <a:tint val="98000"/>
-                <a:satMod val="130000"/>
-                <a:shade val="90000"/>
-                <a:lumMod val="103000"/>
+                <a:tint val="90000"/>
+                <a:lumMod val="110000"/>
               </a:schemeClr>
             </a:gs>
             <a:gs pos="100000">
               <a:schemeClr val="phClr">
-                <a:shade val="63000"/>
-                <a:satMod val="120000"/>
+                <a:shade val="64000"/>
+                <a:lumMod val="98000"/>
               </a:schemeClr>
             </a:gs>
           </a:gsLst>
           <a:lin ang="5400000" scaled="0"/>
         </a:gradFill>
+        <a:blipFill rotWithShape="1">
+          <a:blip xmlns:r="http://schemas.openxmlformats.org/officeDocument/2006/relationships" r:embed="rId1">
+            <a:duotone>
+              <a:schemeClr val="phClr">
+                <a:shade val="76000"/>
+                <a:satMod val="180000"/>
+              </a:schemeClr>
+              <a:schemeClr val="phClr">
+                <a:tint val="80000"/>
+                <a:satMod val="120000"/>
+                <a:lumMod val="180000"/>
+              </a:schemeClr>
+            </a:duotone>
+          </a:blip>
+          <a:stretch/>
+        </a:blipFill>
       </a:bgFillStyleLst>
     </a:fmtScheme>
   </a:themeElements>
-  <a:objectDefaults>
-    <a:lnDef>
-      <a:spPr/>
-      <a:bodyPr/>
-      <a:lstStyle/>
-      <a:style>
-        <a:lnRef idx="2">
-          <a:schemeClr val="accent1"/>
-        </a:lnRef>
-        <a:fillRef idx="0">
-          <a:schemeClr val="accent1"/>
-        </a:fillRef>
-        <a:effectRef idx="1">
-          <a:schemeClr val="accent1"/>
-        </a:effectRef>
-        <a:fontRef idx="minor">
-          <a:schemeClr val="tx1"/>
-        </a:fontRef>
-      </a:style>
-    </a:lnDef>
-  </a:objectDefaults>
+  <a:objectDefaults/>
   <a:extraClrSchemeLst/>
   <a:extLst>
     <a:ext uri="{05A4C25C-085E-4340-85A3-A5531E510DB2}">
-      <thm15:themeFamily xmlns:thm15="http://schemas.microsoft.com/office/thememl/2012/main" name="Office Theme" id="{2E142A2C-CD16-42D6-873A-C26D2A0506FA}" vid="{1BDDFF52-6CD6-40A5-AB3C-68EB2F1E4D0A}"/>
+      <thm15:themeFamily xmlns:thm15="http://schemas.microsoft.com/office/thememl/2012/main" name="Parallax" id="{3388167B-A2EB-4685-9635-1831D9AEF8C4}" vid="{4F7A876A-7598-49CA-AFC8-8EDA2551E4A7}"/>
     </a:ext>
   </a:extLst>
 </a:theme>
 </file>
 
 <file path=customXml/item1.xml><?xml version="1.0" encoding="utf-8"?>
+<p:properties xmlns:p="http://schemas.microsoft.com/office/2006/metadata/properties" xmlns:xsi="http://www.w3.org/2001/XMLSchema-instance" xmlns:pc="http://schemas.microsoft.com/office/infopath/2007/PartnerControls">
+  <documentManagement>
+    <_activity xmlns="7bcfb77a-0d04-4d39-a1da-abbc10082cde" xsi:nil="true"/>
+  </documentManagement>
+</p:properties>
+</file>
+
+<file path=customXml/item2.xml><?xml version="1.0" encoding="utf-8"?>
 <ct:contentTypeSchema xmlns:ct="http://schemas.microsoft.com/office/2006/metadata/contentType" xmlns:ma="http://schemas.microsoft.com/office/2006/metadata/properties/metaAttributes" ct:_="" ma:_="" ma:contentTypeName="Document" ma:contentTypeID="0x0101005820D1BB45C5B04989BD0658BE0035CA" ma:contentTypeVersion="10" ma:contentTypeDescription="Create a new document." ma:contentTypeScope="" ma:versionID="4875a40d73c7e1f3be6b4ce750fc5242">
   <xsd:schema xmlns:xsd="http://www.w3.org/2001/XMLSchema" xmlns:xs="http://www.w3.org/2001/XMLSchema" xmlns:p="http://schemas.microsoft.com/office/2006/metadata/properties" xmlns:ns3="7bcfb77a-0d04-4d39-a1da-abbc10082cde" targetNamespace="http://schemas.microsoft.com/office/2006/metadata/properties" ma:root="true" ma:fieldsID="a9e1b1a633a511498fbd7ee146ca990a" ns3:_="">
     <xsd:import namespace="7bcfb77a-0d04-4d39-a1da-abbc10082cde"/>
@@ -3879,7 +8957,7 @@
 </ct:contentTypeSchema>
 </file>
 
-<file path=customXml/item2.xml><?xml version="1.0" encoding="utf-8"?>
+<file path=customXml/item3.xml><?xml version="1.0" encoding="utf-8"?>
 <?mso-contentType ?>
 <FormTemplates xmlns="http://schemas.microsoft.com/sharepoint/v3/contenttype/forms">
   <Display>DocumentLibraryForm</Display>
@@ -3888,52 +8966,44 @@
 </FormTemplates>
 </file>
 
-<file path=customXml/item3.xml><?xml version="1.0" encoding="utf-8"?>
-<p:properties xmlns:p="http://schemas.microsoft.com/office/2006/metadata/properties" xmlns:xsi="http://www.w3.org/2001/XMLSchema-instance" xmlns:pc="http://schemas.microsoft.com/office/infopath/2007/PartnerControls">
-  <documentManagement>
-    <_activity xmlns="7bcfb77a-0d04-4d39-a1da-abbc10082cde" xsi:nil="true"/>
-  </documentManagement>
-</p:properties>
-</file>
-
 <file path=customXml/itemProps1.xml><?xml version="1.0" encoding="utf-8"?>
-<ds:datastoreItem xmlns:ds="http://schemas.openxmlformats.org/officeDocument/2006/customXml" ds:itemID="{F7C6A45B-6243-4DB6-889A-985984A70D72}">
+<ds:datastoreItem xmlns:ds="http://schemas.openxmlformats.org/officeDocument/2006/customXml" ds:itemID="{628D1346-E11B-48D7-B6D8-55FA4D26DC39}">
   <ds:schemaRefs>
-    <ds:schemaRef ds:uri="http://schemas.microsoft.com/office/2006/metadata/contentType"/>
-    <ds:schemaRef ds:uri="http://schemas.microsoft.com/office/2006/metadata/properties/metaAttributes"/>
-    <ds:schemaRef ds:uri="http://www.w3.org/2001/XMLSchema"/>
+    <ds:schemaRef ds:uri="7bcfb77a-0d04-4d39-a1da-abbc10082cde"/>
+    <ds:schemaRef ds:uri="http://purl.org/dc/dcmitype/"/>
+    <ds:schemaRef ds:uri="http://purl.org/dc/elements/1.1/"/>
+    <ds:schemaRef ds:uri="http://purl.org/dc/terms/"/>
+    <ds:schemaRef ds:uri="http://schemas.microsoft.com/office/2006/documentManagement/types"/>
     <ds:schemaRef ds:uri="http://schemas.microsoft.com/office/2006/metadata/properties"/>
-    <ds:schemaRef ds:uri="7bcfb77a-0d04-4d39-a1da-abbc10082cde"/>
-    <ds:schemaRef ds:uri="http://schemas.microsoft.com/office/2006/documentManagement/types"/>
     <ds:schemaRef ds:uri="http://schemas.microsoft.com/office/infopath/2007/PartnerControls"/>
     <ds:schemaRef ds:uri="http://schemas.openxmlformats.org/package/2006/metadata/core-properties"/>
-    <ds:schemaRef ds:uri="http://purl.org/dc/elements/1.1/"/>
-    <ds:schemaRef ds:uri="http://purl.org/dc/terms/"/>
-    <ds:schemaRef ds:uri="http://schemas.microsoft.com/internal/obd"/>
+    <ds:schemaRef ds:uri="http://www.w3.org/XML/1998/namespace"/>
   </ds:schemaRefs>
 </ds:datastoreItem>
 </file>
 
 <file path=customXml/itemProps2.xml><?xml version="1.0" encoding="utf-8"?>
+<ds:datastoreItem xmlns:ds="http://schemas.openxmlformats.org/officeDocument/2006/customXml" ds:itemID="{F7C6A45B-6243-4DB6-889A-985984A70D72}">
+  <ds:schemaRefs>
+    <ds:schemaRef ds:uri="7bcfb77a-0d04-4d39-a1da-abbc10082cde"/>
+    <ds:schemaRef ds:uri="http://purl.org/dc/elements/1.1/"/>
+    <ds:schemaRef ds:uri="http://purl.org/dc/terms/"/>
+    <ds:schemaRef ds:uri="http://schemas.microsoft.com/internal/obd"/>
+    <ds:schemaRef ds:uri="http://schemas.microsoft.com/office/2006/documentManagement/types"/>
+    <ds:schemaRef ds:uri="http://schemas.microsoft.com/office/2006/metadata/contentType"/>
+    <ds:schemaRef ds:uri="http://schemas.microsoft.com/office/2006/metadata/properties"/>
+    <ds:schemaRef ds:uri="http://schemas.microsoft.com/office/2006/metadata/properties/metaAttributes"/>
+    <ds:schemaRef ds:uri="http://schemas.microsoft.com/office/infopath/2007/PartnerControls"/>
+    <ds:schemaRef ds:uri="http://schemas.openxmlformats.org/package/2006/metadata/core-properties"/>
+    <ds:schemaRef ds:uri="http://www.w3.org/2001/XMLSchema"/>
+  </ds:schemaRefs>
+</ds:datastoreItem>
+</file>
+
+<file path=customXml/itemProps3.xml><?xml version="1.0" encoding="utf-8"?>
 <ds:datastoreItem xmlns:ds="http://schemas.openxmlformats.org/officeDocument/2006/customXml" ds:itemID="{47A14FE8-55A8-477F-876B-E3C3881BFEDD}">
   <ds:schemaRefs>
     <ds:schemaRef ds:uri="http://schemas.microsoft.com/sharepoint/v3/contenttype/forms"/>
   </ds:schemaRefs>
 </ds:datastoreItem>
-</file>
-
-<file path=customXml/itemProps3.xml><?xml version="1.0" encoding="utf-8"?>
-<ds:datastoreItem xmlns:ds="http://schemas.openxmlformats.org/officeDocument/2006/customXml" ds:itemID="{628D1346-E11B-48D7-B6D8-55FA4D26DC39}">
-  <ds:schemaRefs>
-    <ds:schemaRef ds:uri="http://www.w3.org/XML/1998/namespace"/>
-    <ds:schemaRef ds:uri="http://schemas.microsoft.com/office/infopath/2007/PartnerControls"/>
-    <ds:schemaRef ds:uri="http://purl.org/dc/elements/1.1/"/>
-    <ds:schemaRef ds:uri="http://purl.org/dc/terms/"/>
-    <ds:schemaRef ds:uri="7bcfb77a-0d04-4d39-a1da-abbc10082cde"/>
-    <ds:schemaRef ds:uri="http://purl.org/dc/dcmitype/"/>
-    <ds:schemaRef ds:uri="http://schemas.microsoft.com/office/2006/documentManagement/types"/>
-    <ds:schemaRef ds:uri="http://schemas.openxmlformats.org/package/2006/metadata/core-properties"/>
-    <ds:schemaRef ds:uri="http://schemas.microsoft.com/office/2006/metadata/properties"/>
-  </ds:schemaRefs>
-</ds:datastoreItem>
 </file>